--- a/livrables/Presentation_P5_SportDataPulse.pptx
+++ b/livrables/Presentation_P5_SportDataPulse.pptx
@@ -134,7 +134,14 @@
   <c:date1904 val="0"/>
   <c:lang val="fr-FR"/>
   <c:roundedCorners val="1"/>
-  <c:style val="2"/>
+  <mc:AlternateContent xmlns:mc="http://schemas.openxmlformats.org/markup-compatibility/2006">
+    <mc:Choice xmlns:c14="http://schemas.microsoft.com/office/drawing/2007/8/2/chart" Requires="c14">
+      <c14:style val="102"/>
+    </mc:Choice>
+    <mc:Fallback>
+      <c:style val="2"/>
+    </mc:Fallback>
+  </mc:AlternateContent>
   <c:chart>
     <c:autoTitleDeleted val="1"/>
     <c:plotArea>
@@ -143,9 +150,9 @@
           <c:layoutTarget val="inner"/>
           <c:xMode val="edge"/>
           <c:yMode val="edge"/>
-          <c:x val="0"/>
+          <c:x val="4.4171506016483737E-2"/>
           <c:y val="0"/>
-          <c:w val="1"/>
+          <c:w val="0.95582849398351621"/>
           <c:h val="1"/>
         </c:manualLayout>
       </c:layout>
@@ -171,9 +178,98 @@
             <a:solidFill>
               <a:srgbClr val="E20044"/>
             </a:solidFill>
-            <a:effectLst/>
+            <a:ln>
+              <a:solidFill>
+                <a:schemeClr val="accent2"/>
+              </a:solidFill>
+            </a:ln>
+            <a:effectLst>
+              <a:outerShdw blurRad="76200" dir="18900000" sy="23000" kx="-1200000" algn="bl" rotWithShape="0">
+                <a:prstClr val="black">
+                  <a:alpha val="20000"/>
+                </a:prstClr>
+              </a:outerShdw>
+            </a:effectLst>
+            <a:scene3d>
+              <a:camera prst="orthographicFront"/>
+              <a:lightRig rig="threePt" dir="t"/>
+            </a:scene3d>
+            <a:sp3d>
+              <a:bevelT w="190500" h="38100"/>
+            </a:sp3d>
           </c:spPr>
           <c:invertIfNegative val="0"/>
+          <c:dLbls>
+            <c:spPr>
+              <a:noFill/>
+              <a:ln>
+                <a:noFill/>
+              </a:ln>
+              <a:effectLst/>
+            </c:spPr>
+            <c:txPr>
+              <a:bodyPr rot="0" spcFirstLastPara="1" vertOverflow="ellipsis" vert="horz" wrap="square" lIns="38100" tIns="0" rIns="38100" bIns="0" anchor="ctr" anchorCtr="1">
+                <a:spAutoFit/>
+              </a:bodyPr>
+              <a:lstStyle/>
+              <a:p>
+                <a:pPr>
+                  <a:defRPr sz="1330" b="1" i="0" u="none" strike="noStrike" kern="1200" baseline="0">
+                    <a:solidFill>
+                      <a:schemeClr val="lt1"/>
+                    </a:solidFill>
+                    <a:effectLst>
+                      <a:outerShdw blurRad="38100" dist="38100" dir="2700000" algn="tl">
+                        <a:srgbClr val="000000">
+                          <a:alpha val="43137"/>
+                        </a:srgbClr>
+                      </a:outerShdw>
+                    </a:effectLst>
+                    <a:latin typeface="+mn-lt"/>
+                    <a:ea typeface="+mn-ea"/>
+                    <a:cs typeface="+mn-cs"/>
+                  </a:defRPr>
+                </a:pPr>
+                <a:endParaRPr lang="fr-FR"/>
+              </a:p>
+            </c:txPr>
+            <c:dLblPos val="inEnd"/>
+            <c:showLegendKey val="0"/>
+            <c:showVal val="1"/>
+            <c:showCatName val="0"/>
+            <c:showSerName val="0"/>
+            <c:showPercent val="0"/>
+            <c:showBubbleSize val="0"/>
+            <c:separator>; </c:separator>
+            <c:showLeaderLines val="0"/>
+            <c:extLst>
+              <c:ext xmlns:c15="http://schemas.microsoft.com/office/drawing/2012/chart" uri="{CE6537A1-D6FC-4f65-9D91-7224C49458BB}">
+                <c15:spPr xmlns:c15="http://schemas.microsoft.com/office/drawing/2012/chart">
+                  <a:prstGeom prst="rect">
+                    <a:avLst/>
+                  </a:prstGeom>
+                  <a:noFill/>
+                  <a:ln>
+                    <a:noFill/>
+                  </a:ln>
+                </c15:spPr>
+                <c15:showLeaderLines val="1"/>
+                <c15:leaderLines>
+                  <c:spPr>
+                    <a:ln w="9525">
+                      <a:solidFill>
+                        <a:schemeClr val="dk1">
+                          <a:lumMod val="50000"/>
+                          <a:lumOff val="50000"/>
+                        </a:schemeClr>
+                      </a:solidFill>
+                    </a:ln>
+                    <a:effectLst/>
+                  </c:spPr>
+                </c15:leaderLines>
+              </c:ext>
+            </c:extLst>
+          </c:dLbls>
           <c:cat>
             <c:strRef>
               <c:f>Sheet1!$A$2:$A$9</c:f>
@@ -246,14 +342,15 @@
           </c:extLst>
         </c:ser>
         <c:dLbls>
+          <c:dLblPos val="inEnd"/>
           <c:showLegendKey val="0"/>
-          <c:showVal val="0"/>
+          <c:showVal val="1"/>
           <c:showCatName val="0"/>
           <c:showSerName val="0"/>
           <c:showPercent val="0"/>
           <c:showBubbleSize val="0"/>
         </c:dLbls>
-        <c:gapWidth val="150"/>
+        <c:gapWidth val="41"/>
         <c:axId val="2094734554"/>
         <c:axId val="2094734552"/>
       </c:barChart>
@@ -265,28 +362,32 @@
         <c:delete val="0"/>
         <c:axPos val="b"/>
         <c:numFmt formatCode="General" sourceLinked="1"/>
-        <c:majorTickMark val="out"/>
+        <c:majorTickMark val="none"/>
         <c:minorTickMark val="none"/>
         <c:tickLblPos val="low"/>
         <c:spPr>
-          <a:ln w="12700" cap="flat">
-            <a:solidFill>
-              <a:srgbClr val="888888"/>
-            </a:solidFill>
-            <a:prstDash val="solid"/>
-            <a:round/>
+          <a:noFill/>
+          <a:ln>
+            <a:noFill/>
           </a:ln>
+          <a:effectLst/>
         </c:spPr>
         <c:txPr>
-          <a:bodyPr/>
+          <a:bodyPr rot="-60000000" spcFirstLastPara="1" vertOverflow="ellipsis" vert="horz" wrap="square" anchor="ctr" anchorCtr="1"/>
           <a:lstStyle/>
           <a:p>
             <a:pPr>
-              <a:defRPr sz="800" b="0" i="0" u="none" strike="noStrike">
-                <a:solidFill>
-                  <a:srgbClr val="17252A"/>
-                </a:solidFill>
-                <a:latin typeface="Aptos"/>
+              <a:defRPr sz="1197" b="0" i="0" u="none" strike="noStrike" kern="1200" baseline="0">
+                <a:solidFill>
+                  <a:schemeClr val="dk1">
+                    <a:lumMod val="65000"/>
+                    <a:lumOff val="35000"/>
+                  </a:schemeClr>
+                </a:solidFill>
+                <a:effectLst/>
+                <a:latin typeface="+mn-lt"/>
+                <a:ea typeface="+mn-ea"/>
+                <a:cs typeface="+mn-cs"/>
               </a:defRPr>
             </a:pPr>
             <a:endParaRPr lang="fr-FR"/>
@@ -305,57 +406,75 @@
           <c:orientation val="minMax"/>
           <c:min val="0"/>
         </c:scaling>
-        <c:delete val="0"/>
+        <c:delete val="1"/>
         <c:axPos val="l"/>
-        <c:majorGridlines>
+        <c:title>
+          <c:tx>
+            <c:rich>
+              <a:bodyPr rot="-5400000" spcFirstLastPara="1" vertOverflow="ellipsis" vert="horz" wrap="square" anchor="ctr" anchorCtr="1"/>
+              <a:lstStyle/>
+              <a:p>
+                <a:pPr>
+                  <a:defRPr sz="1197" b="1" i="0" u="none" strike="noStrike" kern="1200" baseline="0">
+                    <a:solidFill>
+                      <a:schemeClr val="dk1">
+                        <a:lumMod val="65000"/>
+                        <a:lumOff val="35000"/>
+                      </a:schemeClr>
+                    </a:solidFill>
+                    <a:latin typeface="+mn-lt"/>
+                    <a:ea typeface="+mn-ea"/>
+                    <a:cs typeface="+mn-cs"/>
+                  </a:defRPr>
+                </a:pPr>
+                <a:r>
+                  <a:rPr lang="fr-FR" dirty="0"/>
+                  <a:t>Buts</a:t>
+                </a:r>
+              </a:p>
+            </c:rich>
+          </c:tx>
+          <c:overlay val="0"/>
           <c:spPr>
-            <a:ln w="12700" cap="flat">
-              <a:solidFill>
-                <a:srgbClr val="888888"/>
-              </a:solidFill>
-              <a:prstDash val="solid"/>
-              <a:round/>
+            <a:noFill/>
+            <a:ln>
+              <a:noFill/>
             </a:ln>
+            <a:effectLst/>
           </c:spPr>
-        </c:majorGridlines>
+          <c:txPr>
+            <a:bodyPr rot="-5400000" spcFirstLastPara="1" vertOverflow="ellipsis" vert="horz" wrap="square" anchor="ctr" anchorCtr="1"/>
+            <a:lstStyle/>
+            <a:p>
+              <a:pPr>
+                <a:defRPr sz="1197" b="1" i="0" u="none" strike="noStrike" kern="1200" baseline="0">
+                  <a:solidFill>
+                    <a:schemeClr val="dk1">
+                      <a:lumMod val="65000"/>
+                      <a:lumOff val="35000"/>
+                    </a:schemeClr>
+                  </a:solidFill>
+                  <a:latin typeface="+mn-lt"/>
+                  <a:ea typeface="+mn-ea"/>
+                  <a:cs typeface="+mn-cs"/>
+                </a:defRPr>
+              </a:pPr>
+              <a:endParaRPr lang="fr-FR"/>
+            </a:p>
+          </c:txPr>
+        </c:title>
         <c:numFmt formatCode="General" sourceLinked="0"/>
-        <c:majorTickMark val="out"/>
+        <c:majorTickMark val="none"/>
         <c:minorTickMark val="none"/>
         <c:tickLblPos val="nextTo"/>
-        <c:spPr>
-          <a:ln w="12700" cap="flat">
-            <a:solidFill>
-              <a:srgbClr val="888888"/>
-            </a:solidFill>
-            <a:prstDash val="solid"/>
-            <a:round/>
-          </a:ln>
-        </c:spPr>
-        <c:txPr>
-          <a:bodyPr/>
-          <a:lstStyle/>
-          <a:p>
-            <a:pPr>
-              <a:defRPr sz="700" b="0" i="0" u="none" strike="noStrike">
-                <a:solidFill>
-                  <a:srgbClr val="607D8B"/>
-                </a:solidFill>
-                <a:latin typeface="Aptos"/>
-              </a:defRPr>
-            </a:pPr>
-            <a:endParaRPr lang="fr-FR"/>
-          </a:p>
-        </c:txPr>
         <c:crossAx val="2094734554"/>
         <c:crosses val="autoZero"/>
         <c:crossBetween val="between"/>
       </c:valAx>
       <c:spPr>
         <a:noFill/>
-        <a:ln w="12700" cap="flat">
-          <a:solidFill>
-            <a:srgbClr val="FFFFFF"/>
-          </a:solidFill>
+        <a:ln>
+          <a:noFill/>
         </a:ln>
         <a:effectLst/>
       </c:spPr>
@@ -365,13 +484,45 @@
     <c:showDLblsOverMax val="1"/>
   </c:chart>
   <c:spPr>
-    <a:noFill/>
-    <a:ln>
-      <a:noFill/>
+    <a:gradFill flip="none" rotWithShape="1">
+      <a:gsLst>
+        <a:gs pos="0">
+          <a:schemeClr val="lt1"/>
+        </a:gs>
+        <a:gs pos="68000">
+          <a:schemeClr val="lt1">
+            <a:lumMod val="85000"/>
+          </a:schemeClr>
+        </a:gs>
+        <a:gs pos="100000">
+          <a:schemeClr val="lt1"/>
+        </a:gs>
+      </a:gsLst>
+      <a:lin ang="5400000" scaled="1"/>
+      <a:tileRect/>
+    </a:gradFill>
+    <a:ln w="9525" cap="flat" cmpd="sng" algn="ctr">
+      <a:solidFill>
+        <a:schemeClr val="dk1">
+          <a:lumMod val="15000"/>
+          <a:lumOff val="85000"/>
+        </a:schemeClr>
+      </a:solidFill>
+      <a:round/>
     </a:ln>
     <a:effectLst/>
   </c:spPr>
-  <c:externalData r:id="rId1">
+  <c:txPr>
+    <a:bodyPr/>
+    <a:lstStyle/>
+    <a:p>
+      <a:pPr>
+        <a:defRPr/>
+      </a:pPr>
+      <a:endParaRPr lang="fr-FR"/>
+    </a:p>
+  </c:txPr>
+  <c:externalData r:id="rId3">
     <c:autoUpdate val="0"/>
   </c:externalData>
 </c:chartSpace>
@@ -382,7 +533,14 @@
   <c:date1904 val="0"/>
   <c:lang val="fr-FR"/>
   <c:roundedCorners val="1"/>
-  <c:style val="2"/>
+  <mc:AlternateContent xmlns:mc="http://schemas.openxmlformats.org/markup-compatibility/2006">
+    <mc:Choice xmlns:c14="http://schemas.microsoft.com/office/drawing/2007/8/2/chart" Requires="c14">
+      <c14:style val="102"/>
+    </mc:Choice>
+    <mc:Fallback>
+      <c:style val="2"/>
+    </mc:Fallback>
+  </mc:AlternateContent>
   <c:chart>
     <c:autoTitleDeleted val="1"/>
     <c:plotArea>
@@ -391,9 +549,9 @@
           <c:layoutTarget val="inner"/>
           <c:xMode val="edge"/>
           <c:yMode val="edge"/>
-          <c:x val="0"/>
+          <c:x val="2.1114864864864864E-2"/>
           <c:y val="0"/>
-          <c:w val="1"/>
+          <c:w val="0.97888513513513509"/>
           <c:h val="1"/>
         </c:manualLayout>
       </c:layout>
@@ -417,11 +575,88 @@
           </c:tx>
           <c:spPr>
             <a:solidFill>
-              <a:srgbClr val="0F5B7F"/>
+              <a:srgbClr val="002060"/>
             </a:solidFill>
-            <a:effectLst/>
+            <a:ln>
+              <a:noFill/>
+            </a:ln>
+            <a:effectLst>
+              <a:outerShdw blurRad="76200" dir="18900000" sy="23000" kx="-1200000" algn="bl" rotWithShape="0">
+                <a:prstClr val="black">
+                  <a:alpha val="20000"/>
+                </a:prstClr>
+              </a:outerShdw>
+            </a:effectLst>
+            <a:scene3d>
+              <a:camera prst="orthographicFront"/>
+              <a:lightRig rig="threePt" dir="t"/>
+            </a:scene3d>
+            <a:sp3d>
+              <a:bevelT w="190500" h="38100"/>
+            </a:sp3d>
           </c:spPr>
           <c:invertIfNegative val="0"/>
+          <c:dLbls>
+            <c:spPr>
+              <a:noFill/>
+              <a:ln>
+                <a:noFill/>
+              </a:ln>
+              <a:effectLst/>
+            </c:spPr>
+            <c:txPr>
+              <a:bodyPr rot="0" spcFirstLastPara="1" vertOverflow="ellipsis" vert="horz" wrap="square" lIns="38100" tIns="19050" rIns="38100" bIns="19050" anchor="ctr" anchorCtr="1">
+                <a:spAutoFit/>
+              </a:bodyPr>
+              <a:lstStyle/>
+              <a:p>
+                <a:pPr>
+                  <a:defRPr sz="1330" b="1" i="0" u="none" strike="noStrike" kern="1200" baseline="0">
+                    <a:solidFill>
+                      <a:schemeClr val="lt1"/>
+                    </a:solidFill>
+                    <a:effectLst>
+                      <a:outerShdw blurRad="38100" dist="38100" dir="2700000" algn="tl">
+                        <a:srgbClr val="000000">
+                          <a:alpha val="43137"/>
+                        </a:srgbClr>
+                      </a:outerShdw>
+                    </a:effectLst>
+                    <a:latin typeface="+mn-lt"/>
+                    <a:ea typeface="+mn-ea"/>
+                    <a:cs typeface="+mn-cs"/>
+                  </a:defRPr>
+                </a:pPr>
+                <a:endParaRPr lang="fr-FR"/>
+              </a:p>
+            </c:txPr>
+            <c:dLblPos val="inEnd"/>
+            <c:showLegendKey val="0"/>
+            <c:showVal val="1"/>
+            <c:showCatName val="0"/>
+            <c:showSerName val="0"/>
+            <c:showPercent val="0"/>
+            <c:showBubbleSize val="0"/>
+            <c:showLeaderLines val="0"/>
+            <c:extLst>
+              <c:ext xmlns:c15="http://schemas.microsoft.com/office/drawing/2012/chart" uri="{CE6537A1-D6FC-4f65-9D91-7224C49458BB}">
+                <c15:showLeaderLines val="1"/>
+                <c15:leaderLines>
+                  <c:spPr>
+                    <a:ln w="9525">
+                      <a:solidFill>
+                        <a:schemeClr val="dk1">
+                          <a:lumMod val="50000"/>
+                          <a:lumOff val="50000"/>
+                        </a:schemeClr>
+                      </a:solidFill>
+                    </a:ln>
+                    <a:effectLst/>
+                  </c:spPr>
+                </c15:leaderLines>
+              </c:ext>
+            </c:extLst>
+          </c:dLbls>
           <c:cat>
             <c:strRef>
               <c:f>Sheet1!$A$2:$A$5</c:f>
@@ -470,14 +705,15 @@
           </c:extLst>
         </c:ser>
         <c:dLbls>
+          <c:dLblPos val="inEnd"/>
           <c:showLegendKey val="0"/>
-          <c:showVal val="0"/>
+          <c:showVal val="1"/>
           <c:showCatName val="0"/>
           <c:showSerName val="0"/>
           <c:showPercent val="0"/>
           <c:showBubbleSize val="0"/>
         </c:dLbls>
-        <c:gapWidth val="150"/>
+        <c:gapWidth val="41"/>
         <c:axId val="2094734554"/>
         <c:axId val="2094734552"/>
       </c:barChart>
@@ -489,28 +725,32 @@
         <c:delete val="0"/>
         <c:axPos val="b"/>
         <c:numFmt formatCode="General" sourceLinked="1"/>
-        <c:majorTickMark val="out"/>
+        <c:majorTickMark val="none"/>
         <c:minorTickMark val="none"/>
         <c:tickLblPos val="low"/>
         <c:spPr>
-          <a:ln w="12700" cap="flat">
-            <a:solidFill>
-              <a:srgbClr val="888888"/>
-            </a:solidFill>
-            <a:prstDash val="solid"/>
-            <a:round/>
+          <a:noFill/>
+          <a:ln>
+            <a:noFill/>
           </a:ln>
+          <a:effectLst/>
         </c:spPr>
         <c:txPr>
-          <a:bodyPr/>
+          <a:bodyPr rot="-60000000" spcFirstLastPara="1" vertOverflow="ellipsis" vert="horz" wrap="square" anchor="ctr" anchorCtr="1"/>
           <a:lstStyle/>
           <a:p>
             <a:pPr>
-              <a:defRPr sz="800" b="0" i="0" u="none" strike="noStrike">
-                <a:solidFill>
-                  <a:srgbClr val="17252A"/>
-                </a:solidFill>
-                <a:latin typeface="Aptos"/>
+              <a:defRPr sz="1197" b="0" i="0" u="none" strike="noStrike" kern="1200" baseline="0">
+                <a:solidFill>
+                  <a:schemeClr val="dk1">
+                    <a:lumMod val="65000"/>
+                    <a:lumOff val="35000"/>
+                  </a:schemeClr>
+                </a:solidFill>
+                <a:effectLst/>
+                <a:latin typeface="+mn-lt"/>
+                <a:ea typeface="+mn-ea"/>
+                <a:cs typeface="+mn-cs"/>
               </a:defRPr>
             </a:pPr>
             <a:endParaRPr lang="fr-FR"/>
@@ -529,57 +769,75 @@
           <c:orientation val="minMax"/>
           <c:min val="0"/>
         </c:scaling>
-        <c:delete val="0"/>
+        <c:delete val="1"/>
         <c:axPos val="l"/>
-        <c:majorGridlines>
+        <c:title>
+          <c:tx>
+            <c:rich>
+              <a:bodyPr rot="-5400000" spcFirstLastPara="1" vertOverflow="ellipsis" vert="horz" wrap="square" anchor="ctr" anchorCtr="1"/>
+              <a:lstStyle/>
+              <a:p>
+                <a:pPr>
+                  <a:defRPr sz="1197" b="1" i="0" u="none" strike="noStrike" kern="1200" baseline="0">
+                    <a:solidFill>
+                      <a:schemeClr val="dk1">
+                        <a:lumMod val="65000"/>
+                        <a:lumOff val="35000"/>
+                      </a:schemeClr>
+                    </a:solidFill>
+                    <a:latin typeface="+mn-lt"/>
+                    <a:ea typeface="+mn-ea"/>
+                    <a:cs typeface="+mn-cs"/>
+                  </a:defRPr>
+                </a:pPr>
+                <a:r>
+                  <a:rPr lang="fr-FR" dirty="0"/>
+                  <a:t>Effectifs</a:t>
+                </a:r>
+              </a:p>
+            </c:rich>
+          </c:tx>
+          <c:overlay val="0"/>
           <c:spPr>
-            <a:ln w="12700" cap="flat">
-              <a:solidFill>
-                <a:srgbClr val="888888"/>
-              </a:solidFill>
-              <a:prstDash val="solid"/>
-              <a:round/>
+            <a:noFill/>
+            <a:ln>
+              <a:noFill/>
             </a:ln>
+            <a:effectLst/>
           </c:spPr>
-        </c:majorGridlines>
+          <c:txPr>
+            <a:bodyPr rot="-5400000" spcFirstLastPara="1" vertOverflow="ellipsis" vert="horz" wrap="square" anchor="ctr" anchorCtr="1"/>
+            <a:lstStyle/>
+            <a:p>
+              <a:pPr>
+                <a:defRPr sz="1197" b="1" i="0" u="none" strike="noStrike" kern="1200" baseline="0">
+                  <a:solidFill>
+                    <a:schemeClr val="dk1">
+                      <a:lumMod val="65000"/>
+                      <a:lumOff val="35000"/>
+                    </a:schemeClr>
+                  </a:solidFill>
+                  <a:latin typeface="+mn-lt"/>
+                  <a:ea typeface="+mn-ea"/>
+                  <a:cs typeface="+mn-cs"/>
+                </a:defRPr>
+              </a:pPr>
+              <a:endParaRPr lang="fr-FR"/>
+            </a:p>
+          </c:txPr>
+        </c:title>
         <c:numFmt formatCode="General" sourceLinked="0"/>
-        <c:majorTickMark val="out"/>
+        <c:majorTickMark val="none"/>
         <c:minorTickMark val="none"/>
         <c:tickLblPos val="nextTo"/>
-        <c:spPr>
-          <a:ln w="12700" cap="flat">
-            <a:solidFill>
-              <a:srgbClr val="888888"/>
-            </a:solidFill>
-            <a:prstDash val="solid"/>
-            <a:round/>
-          </a:ln>
-        </c:spPr>
-        <c:txPr>
-          <a:bodyPr/>
-          <a:lstStyle/>
-          <a:p>
-            <a:pPr>
-              <a:defRPr sz="700" b="0" i="0" u="none" strike="noStrike">
-                <a:solidFill>
-                  <a:srgbClr val="607D8B"/>
-                </a:solidFill>
-                <a:latin typeface="Aptos"/>
-              </a:defRPr>
-            </a:pPr>
-            <a:endParaRPr lang="fr-FR"/>
-          </a:p>
-        </c:txPr>
         <c:crossAx val="2094734554"/>
         <c:crosses val="autoZero"/>
         <c:crossBetween val="between"/>
       </c:valAx>
       <c:spPr>
         <a:noFill/>
-        <a:ln w="12700" cap="flat">
-          <a:solidFill>
-            <a:srgbClr val="FFFFFF"/>
-          </a:solidFill>
+        <a:ln>
+          <a:noFill/>
         </a:ln>
         <a:effectLst/>
       </c:spPr>
@@ -589,13 +847,45 @@
     <c:showDLblsOverMax val="1"/>
   </c:chart>
   <c:spPr>
-    <a:noFill/>
-    <a:ln>
-      <a:noFill/>
+    <a:gradFill flip="none" rotWithShape="1">
+      <a:gsLst>
+        <a:gs pos="0">
+          <a:schemeClr val="lt1"/>
+        </a:gs>
+        <a:gs pos="68000">
+          <a:schemeClr val="lt1">
+            <a:lumMod val="85000"/>
+          </a:schemeClr>
+        </a:gs>
+        <a:gs pos="100000">
+          <a:schemeClr val="lt1"/>
+        </a:gs>
+      </a:gsLst>
+      <a:lin ang="5400000" scaled="1"/>
+      <a:tileRect/>
+    </a:gradFill>
+    <a:ln w="9525" cap="flat" cmpd="sng" algn="ctr">
+      <a:solidFill>
+        <a:schemeClr val="dk1">
+          <a:lumMod val="15000"/>
+          <a:lumOff val="85000"/>
+        </a:schemeClr>
+      </a:solidFill>
+      <a:round/>
     </a:ln>
     <a:effectLst/>
   </c:spPr>
-  <c:externalData r:id="rId1">
+  <c:txPr>
+    <a:bodyPr/>
+    <a:lstStyle/>
+    <a:p>
+      <a:pPr>
+        <a:defRPr/>
+      </a:pPr>
+      <a:endParaRPr lang="fr-FR"/>
+    </a:p>
+  </c:txPr>
+  <c:externalData r:id="rId3">
     <c:autoUpdate val="0"/>
   </c:externalData>
 </c:chartSpace>
@@ -606,7 +896,14 @@
   <c:date1904 val="0"/>
   <c:lang val="fr-FR"/>
   <c:roundedCorners val="1"/>
-  <c:style val="2"/>
+  <mc:AlternateContent xmlns:mc="http://schemas.openxmlformats.org/markup-compatibility/2006">
+    <mc:Choice xmlns:c14="http://schemas.microsoft.com/office/drawing/2007/8/2/chart" Requires="c14">
+      <c14:style val="102"/>
+    </mc:Choice>
+    <mc:Fallback>
+      <c:style val="2"/>
+    </mc:Fallback>
+  </mc:AlternateContent>
   <c:chart>
     <c:autoTitleDeleted val="1"/>
     <c:plotArea>
@@ -615,9 +912,9 @@
           <c:layoutTarget val="inner"/>
           <c:xMode val="edge"/>
           <c:yMode val="edge"/>
-          <c:x val="0"/>
+          <c:x val="2.2974101921470341E-2"/>
           <c:y val="0"/>
-          <c:w val="1"/>
+          <c:w val="0.97702589807852969"/>
           <c:h val="1"/>
         </c:manualLayout>
       </c:layout>
@@ -640,12 +937,99 @@
             </c:strRef>
           </c:tx>
           <c:spPr>
-            <a:solidFill>
-              <a:srgbClr val="2E7D32"/>
-            </a:solidFill>
-            <a:effectLst/>
+            <a:gradFill>
+              <a:gsLst>
+                <a:gs pos="0">
+                  <a:schemeClr val="accent1"/>
+                </a:gs>
+                <a:gs pos="100000">
+                  <a:schemeClr val="accent1">
+                    <a:lumMod val="84000"/>
+                  </a:schemeClr>
+                </a:gs>
+              </a:gsLst>
+              <a:lin ang="5400000" scaled="1"/>
+            </a:gradFill>
+            <a:ln>
+              <a:noFill/>
+            </a:ln>
+            <a:effectLst>
+              <a:outerShdw blurRad="76200" dir="18900000" sy="23000" kx="-1200000" algn="bl" rotWithShape="0">
+                <a:prstClr val="black">
+                  <a:alpha val="20000"/>
+                </a:prstClr>
+              </a:outerShdw>
+            </a:effectLst>
+            <a:scene3d>
+              <a:camera prst="orthographicFront"/>
+              <a:lightRig rig="threePt" dir="t"/>
+            </a:scene3d>
+            <a:sp3d>
+              <a:bevelT w="190500" h="38100"/>
+            </a:sp3d>
           </c:spPr>
           <c:invertIfNegative val="0"/>
+          <c:dLbls>
+            <c:spPr>
+              <a:noFill/>
+              <a:ln>
+                <a:noFill/>
+              </a:ln>
+              <a:effectLst/>
+            </c:spPr>
+            <c:txPr>
+              <a:bodyPr rot="0" spcFirstLastPara="1" vertOverflow="ellipsis" vert="horz" wrap="square" lIns="38100" tIns="19050" rIns="38100" bIns="19050" anchor="ctr" anchorCtr="1">
+                <a:spAutoFit/>
+              </a:bodyPr>
+              <a:lstStyle/>
+              <a:p>
+                <a:pPr>
+                  <a:defRPr sz="1330" b="1" i="0" u="none" strike="noStrike" kern="1200" baseline="0">
+                    <a:solidFill>
+                      <a:schemeClr val="lt1"/>
+                    </a:solidFill>
+                    <a:effectLst>
+                      <a:outerShdw blurRad="38100" dist="38100" dir="2700000" algn="tl">
+                        <a:srgbClr val="000000">
+                          <a:alpha val="43137"/>
+                        </a:srgbClr>
+                      </a:outerShdw>
+                    </a:effectLst>
+                    <a:latin typeface="+mn-lt"/>
+                    <a:ea typeface="+mn-ea"/>
+                    <a:cs typeface="+mn-cs"/>
+                  </a:defRPr>
+                </a:pPr>
+                <a:endParaRPr lang="fr-FR"/>
+              </a:p>
+            </c:txPr>
+            <c:dLblPos val="inEnd"/>
+            <c:showLegendKey val="0"/>
+            <c:showVal val="1"/>
+            <c:showCatName val="0"/>
+            <c:showSerName val="0"/>
+            <c:showPercent val="0"/>
+            <c:showBubbleSize val="0"/>
+            <c:showLeaderLines val="0"/>
+            <c:extLst>
+              <c:ext xmlns:c15="http://schemas.microsoft.com/office/drawing/2012/chart" uri="{CE6537A1-D6FC-4f65-9D91-7224C49458BB}">
+                <c15:showLeaderLines val="1"/>
+                <c15:leaderLines>
+                  <c:spPr>
+                    <a:ln w="9525">
+                      <a:solidFill>
+                        <a:schemeClr val="dk1">
+                          <a:lumMod val="50000"/>
+                          <a:lumOff val="50000"/>
+                        </a:schemeClr>
+                      </a:solidFill>
+                    </a:ln>
+                    <a:effectLst/>
+                  </c:spPr>
+                </c15:leaderLines>
+              </c:ext>
+            </c:extLst>
+          </c:dLbls>
           <c:cat>
             <c:strRef>
               <c:f>Sheet1!$A$2:$A$7</c:f>
@@ -706,14 +1090,15 @@
           </c:extLst>
         </c:ser>
         <c:dLbls>
+          <c:dLblPos val="inEnd"/>
           <c:showLegendKey val="0"/>
-          <c:showVal val="0"/>
+          <c:showVal val="1"/>
           <c:showCatName val="0"/>
           <c:showSerName val="0"/>
           <c:showPercent val="0"/>
           <c:showBubbleSize val="0"/>
         </c:dLbls>
-        <c:gapWidth val="150"/>
+        <c:gapWidth val="41"/>
         <c:axId val="2094734554"/>
         <c:axId val="2094734552"/>
       </c:barChart>
@@ -725,28 +1110,32 @@
         <c:delete val="0"/>
         <c:axPos val="b"/>
         <c:numFmt formatCode="General" sourceLinked="1"/>
-        <c:majorTickMark val="out"/>
+        <c:majorTickMark val="none"/>
         <c:minorTickMark val="none"/>
         <c:tickLblPos val="low"/>
         <c:spPr>
-          <a:ln w="12700" cap="flat">
-            <a:solidFill>
-              <a:srgbClr val="888888"/>
-            </a:solidFill>
-            <a:prstDash val="solid"/>
-            <a:round/>
+          <a:noFill/>
+          <a:ln>
+            <a:noFill/>
           </a:ln>
+          <a:effectLst/>
         </c:spPr>
         <c:txPr>
-          <a:bodyPr/>
+          <a:bodyPr rot="-60000000" spcFirstLastPara="1" vertOverflow="ellipsis" vert="horz" wrap="square" anchor="ctr" anchorCtr="1"/>
           <a:lstStyle/>
           <a:p>
             <a:pPr>
-              <a:defRPr sz="800" b="0" i="0" u="none" strike="noStrike">
-                <a:solidFill>
-                  <a:srgbClr val="17252A"/>
-                </a:solidFill>
-                <a:latin typeface="Aptos"/>
+              <a:defRPr sz="1197" b="0" i="0" u="none" strike="noStrike" kern="1200" baseline="0">
+                <a:solidFill>
+                  <a:schemeClr val="dk1">
+                    <a:lumMod val="65000"/>
+                    <a:lumOff val="35000"/>
+                  </a:schemeClr>
+                </a:solidFill>
+                <a:effectLst/>
+                <a:latin typeface="+mn-lt"/>
+                <a:ea typeface="+mn-ea"/>
+                <a:cs typeface="+mn-cs"/>
               </a:defRPr>
             </a:pPr>
             <a:endParaRPr lang="fr-FR"/>
@@ -765,57 +1154,50 @@
           <c:orientation val="minMax"/>
           <c:min val="0"/>
         </c:scaling>
-        <c:delete val="0"/>
+        <c:delete val="1"/>
         <c:axPos val="l"/>
-        <c:majorGridlines>
+        <c:title>
+          <c:overlay val="0"/>
           <c:spPr>
-            <a:ln w="12700" cap="flat">
-              <a:solidFill>
-                <a:srgbClr val="888888"/>
-              </a:solidFill>
-              <a:prstDash val="solid"/>
-              <a:round/>
+            <a:noFill/>
+            <a:ln>
+              <a:noFill/>
             </a:ln>
+            <a:effectLst/>
           </c:spPr>
-        </c:majorGridlines>
+          <c:txPr>
+            <a:bodyPr rot="-5400000" spcFirstLastPara="1" vertOverflow="ellipsis" vert="horz" wrap="square" anchor="ctr" anchorCtr="1"/>
+            <a:lstStyle/>
+            <a:p>
+              <a:pPr>
+                <a:defRPr sz="1197" b="1" i="0" u="none" strike="noStrike" kern="1200" baseline="0">
+                  <a:solidFill>
+                    <a:schemeClr val="dk1">
+                      <a:lumMod val="65000"/>
+                      <a:lumOff val="35000"/>
+                    </a:schemeClr>
+                  </a:solidFill>
+                  <a:latin typeface="+mn-lt"/>
+                  <a:ea typeface="+mn-ea"/>
+                  <a:cs typeface="+mn-cs"/>
+                </a:defRPr>
+              </a:pPr>
+              <a:endParaRPr lang="fr-FR"/>
+            </a:p>
+          </c:txPr>
+        </c:title>
         <c:numFmt formatCode="General" sourceLinked="0"/>
-        <c:majorTickMark val="out"/>
+        <c:majorTickMark val="none"/>
         <c:minorTickMark val="none"/>
         <c:tickLblPos val="nextTo"/>
-        <c:spPr>
-          <a:ln w="12700" cap="flat">
-            <a:solidFill>
-              <a:srgbClr val="888888"/>
-            </a:solidFill>
-            <a:prstDash val="solid"/>
-            <a:round/>
-          </a:ln>
-        </c:spPr>
-        <c:txPr>
-          <a:bodyPr/>
-          <a:lstStyle/>
-          <a:p>
-            <a:pPr>
-              <a:defRPr sz="700" b="0" i="0" u="none" strike="noStrike">
-                <a:solidFill>
-                  <a:srgbClr val="607D8B"/>
-                </a:solidFill>
-                <a:latin typeface="Aptos"/>
-              </a:defRPr>
-            </a:pPr>
-            <a:endParaRPr lang="fr-FR"/>
-          </a:p>
-        </c:txPr>
         <c:crossAx val="2094734554"/>
         <c:crosses val="autoZero"/>
         <c:crossBetween val="between"/>
       </c:valAx>
       <c:spPr>
         <a:noFill/>
-        <a:ln w="12700" cap="flat">
-          <a:solidFill>
-            <a:srgbClr val="FFFFFF"/>
-          </a:solidFill>
+        <a:ln>
+          <a:noFill/>
         </a:ln>
         <a:effectLst/>
       </c:spPr>
@@ -825,16 +1207,1869 @@
     <c:showDLblsOverMax val="1"/>
   </c:chart>
   <c:spPr>
-    <a:noFill/>
-    <a:ln>
-      <a:noFill/>
+    <a:gradFill flip="none" rotWithShape="1">
+      <a:gsLst>
+        <a:gs pos="0">
+          <a:schemeClr val="lt1"/>
+        </a:gs>
+        <a:gs pos="68000">
+          <a:schemeClr val="lt1">
+            <a:lumMod val="85000"/>
+          </a:schemeClr>
+        </a:gs>
+        <a:gs pos="100000">
+          <a:schemeClr val="lt1"/>
+        </a:gs>
+      </a:gsLst>
+      <a:lin ang="5400000" scaled="1"/>
+      <a:tileRect/>
+    </a:gradFill>
+    <a:ln w="9525" cap="flat" cmpd="sng" algn="ctr">
+      <a:solidFill>
+        <a:schemeClr val="dk1">
+          <a:lumMod val="15000"/>
+          <a:lumOff val="85000"/>
+        </a:schemeClr>
+      </a:solidFill>
+      <a:round/>
     </a:ln>
     <a:effectLst/>
   </c:spPr>
-  <c:externalData r:id="rId1">
+  <c:txPr>
+    <a:bodyPr/>
+    <a:lstStyle/>
+    <a:p>
+      <a:pPr>
+        <a:defRPr/>
+      </a:pPr>
+      <a:endParaRPr lang="fr-FR"/>
+    </a:p>
+  </c:txPr>
+  <c:externalData r:id="rId3">
     <c:autoUpdate val="0"/>
   </c:externalData>
 </c:chartSpace>
+</file>
+
+<file path=ppt/charts/colors1.xml><?xml version="1.0" encoding="utf-8"?>
+<cs:colorStyle xmlns:cs="http://schemas.microsoft.com/office/drawing/2012/chartStyle" xmlns:a="http://schemas.openxmlformats.org/drawingml/2006/main" meth="cycle" id="10">
+  <a:schemeClr val="accent1"/>
+  <a:schemeClr val="accent2"/>
+  <a:schemeClr val="accent3"/>
+  <a:schemeClr val="accent4"/>
+  <a:schemeClr val="accent5"/>
+  <a:schemeClr val="accent6"/>
+  <cs:variation/>
+  <cs:variation>
+    <a:lumMod val="60000"/>
+  </cs:variation>
+  <cs:variation>
+    <a:lumMod val="80000"/>
+    <a:lumOff val="20000"/>
+  </cs:variation>
+  <cs:variation>
+    <a:lumMod val="80000"/>
+  </cs:variation>
+  <cs:variation>
+    <a:lumMod val="60000"/>
+    <a:lumOff val="40000"/>
+  </cs:variation>
+  <cs:variation>
+    <a:lumMod val="50000"/>
+  </cs:variation>
+  <cs:variation>
+    <a:lumMod val="70000"/>
+    <a:lumOff val="30000"/>
+  </cs:variation>
+  <cs:variation>
+    <a:lumMod val="70000"/>
+  </cs:variation>
+  <cs:variation>
+    <a:lumMod val="50000"/>
+    <a:lumOff val="50000"/>
+  </cs:variation>
+</cs:colorStyle>
+</file>
+
+<file path=ppt/charts/colors2.xml><?xml version="1.0" encoding="utf-8"?>
+<cs:colorStyle xmlns:cs="http://schemas.microsoft.com/office/drawing/2012/chartStyle" xmlns:a="http://schemas.openxmlformats.org/drawingml/2006/main" meth="cycle" id="10">
+  <a:schemeClr val="accent1"/>
+  <a:schemeClr val="accent2"/>
+  <a:schemeClr val="accent3"/>
+  <a:schemeClr val="accent4"/>
+  <a:schemeClr val="accent5"/>
+  <a:schemeClr val="accent6"/>
+  <cs:variation/>
+  <cs:variation>
+    <a:lumMod val="60000"/>
+  </cs:variation>
+  <cs:variation>
+    <a:lumMod val="80000"/>
+    <a:lumOff val="20000"/>
+  </cs:variation>
+  <cs:variation>
+    <a:lumMod val="80000"/>
+  </cs:variation>
+  <cs:variation>
+    <a:lumMod val="60000"/>
+    <a:lumOff val="40000"/>
+  </cs:variation>
+  <cs:variation>
+    <a:lumMod val="50000"/>
+  </cs:variation>
+  <cs:variation>
+    <a:lumMod val="70000"/>
+    <a:lumOff val="30000"/>
+  </cs:variation>
+  <cs:variation>
+    <a:lumMod val="70000"/>
+  </cs:variation>
+  <cs:variation>
+    <a:lumMod val="50000"/>
+    <a:lumOff val="50000"/>
+  </cs:variation>
+</cs:colorStyle>
+</file>
+
+<file path=ppt/charts/colors3.xml><?xml version="1.0" encoding="utf-8"?>
+<cs:colorStyle xmlns:cs="http://schemas.microsoft.com/office/drawing/2012/chartStyle" xmlns:a="http://schemas.openxmlformats.org/drawingml/2006/main" meth="cycle" id="10">
+  <a:schemeClr val="accent1"/>
+  <a:schemeClr val="accent2"/>
+  <a:schemeClr val="accent3"/>
+  <a:schemeClr val="accent4"/>
+  <a:schemeClr val="accent5"/>
+  <a:schemeClr val="accent6"/>
+  <cs:variation/>
+  <cs:variation>
+    <a:lumMod val="60000"/>
+  </cs:variation>
+  <cs:variation>
+    <a:lumMod val="80000"/>
+    <a:lumOff val="20000"/>
+  </cs:variation>
+  <cs:variation>
+    <a:lumMod val="80000"/>
+  </cs:variation>
+  <cs:variation>
+    <a:lumMod val="60000"/>
+    <a:lumOff val="40000"/>
+  </cs:variation>
+  <cs:variation>
+    <a:lumMod val="50000"/>
+  </cs:variation>
+  <cs:variation>
+    <a:lumMod val="70000"/>
+    <a:lumOff val="30000"/>
+  </cs:variation>
+  <cs:variation>
+    <a:lumMod val="70000"/>
+  </cs:variation>
+  <cs:variation>
+    <a:lumMod val="50000"/>
+    <a:lumOff val="50000"/>
+  </cs:variation>
+</cs:colorStyle>
+</file>
+
+<file path=ppt/charts/style1.xml><?xml version="1.0" encoding="utf-8"?>
+<cs:chartStyle xmlns:cs="http://schemas.microsoft.com/office/drawing/2012/chartStyle" xmlns:a="http://schemas.openxmlformats.org/drawingml/2006/main" id="204">
+  <cs:axisTitle>
+    <cs:lnRef idx="0"/>
+    <cs:fillRef idx="0"/>
+    <cs:effectRef idx="0"/>
+    <cs:fontRef idx="minor">
+      <a:schemeClr val="dk1">
+        <a:lumMod val="65000"/>
+        <a:lumOff val="35000"/>
+      </a:schemeClr>
+    </cs:fontRef>
+    <cs:defRPr sz="1197" b="1" kern="1200"/>
+  </cs:axisTitle>
+  <cs:categoryAxis>
+    <cs:lnRef idx="0"/>
+    <cs:fillRef idx="0"/>
+    <cs:effectRef idx="0"/>
+    <cs:fontRef idx="minor">
+      <a:schemeClr val="dk1">
+        <a:lumMod val="65000"/>
+        <a:lumOff val="35000"/>
+      </a:schemeClr>
+    </cs:fontRef>
+    <cs:defRPr sz="1197" kern="1200">
+      <a:effectLst/>
+    </cs:defRPr>
+  </cs:categoryAxis>
+  <cs:chartArea>
+    <cs:lnRef idx="0"/>
+    <cs:fillRef idx="0"/>
+    <cs:effectRef idx="0"/>
+    <cs:fontRef idx="minor">
+      <a:schemeClr val="dk1"/>
+    </cs:fontRef>
+    <cs:spPr>
+      <a:gradFill flip="none" rotWithShape="1">
+        <a:gsLst>
+          <a:gs pos="0">
+            <a:schemeClr val="lt1"/>
+          </a:gs>
+          <a:gs pos="68000">
+            <a:schemeClr val="lt1">
+              <a:lumMod val="85000"/>
+            </a:schemeClr>
+          </a:gs>
+          <a:gs pos="100000">
+            <a:schemeClr val="lt1"/>
+          </a:gs>
+        </a:gsLst>
+        <a:lin ang="5400000" scaled="1"/>
+        <a:tileRect/>
+      </a:gradFill>
+      <a:ln w="9525" cap="flat" cmpd="sng" algn="ctr">
+        <a:solidFill>
+          <a:schemeClr val="dk1">
+            <a:lumMod val="15000"/>
+            <a:lumOff val="85000"/>
+          </a:schemeClr>
+        </a:solidFill>
+        <a:round/>
+      </a:ln>
+    </cs:spPr>
+    <cs:defRPr sz="1330" kern="1200"/>
+  </cs:chartArea>
+  <cs:dataLabel>
+    <cs:lnRef idx="0"/>
+    <cs:fillRef idx="0"/>
+    <cs:effectRef idx="0"/>
+    <cs:fontRef idx="minor">
+      <a:schemeClr val="lt1"/>
+    </cs:fontRef>
+    <cs:spPr/>
+    <cs:defRPr sz="1330" b="1" i="0" u="none" strike="noStrike" kern="1200" baseline="0"/>
+  </cs:dataLabel>
+  <cs:dataLabelCallout>
+    <cs:lnRef idx="0"/>
+    <cs:fillRef idx="0"/>
+    <cs:effectRef idx="0"/>
+    <cs:fontRef idx="minor">
+      <a:schemeClr val="lt1"/>
+    </cs:fontRef>
+    <cs:spPr>
+      <a:solidFill>
+        <a:schemeClr val="dk1">
+          <a:lumMod val="65000"/>
+          <a:lumOff val="35000"/>
+          <a:alpha val="75000"/>
+        </a:schemeClr>
+      </a:solidFill>
+    </cs:spPr>
+    <cs:defRPr sz="1330" b="1" kern="1200"/>
+    <cs:bodyPr rot="0" spcFirstLastPara="1" vertOverflow="clip" horzOverflow="clip" vert="horz" wrap="square" lIns="36576" tIns="18288" rIns="36576" bIns="18288" anchor="ctr" anchorCtr="1">
+      <a:spAutoFit/>
+    </cs:bodyPr>
+  </cs:dataLabelCallout>
+  <cs:dataPoint>
+    <cs:lnRef idx="0">
+      <cs:styleClr val="auto"/>
+    </cs:lnRef>
+    <cs:fillRef idx="0">
+      <cs:styleClr val="auto"/>
+    </cs:fillRef>
+    <cs:effectRef idx="0"/>
+    <cs:fontRef idx="minor">
+      <a:schemeClr val="dk1"/>
+    </cs:fontRef>
+    <cs:spPr>
+      <a:gradFill>
+        <a:gsLst>
+          <a:gs pos="0">
+            <a:schemeClr val="phClr"/>
+          </a:gs>
+          <a:gs pos="100000">
+            <a:schemeClr val="phClr">
+              <a:lumMod val="84000"/>
+            </a:schemeClr>
+          </a:gs>
+        </a:gsLst>
+        <a:lin ang="5400000" scaled="1"/>
+      </a:gradFill>
+      <a:effectLst>
+        <a:outerShdw blurRad="76200" dir="18900000" sy="23000" kx="-1200000" algn="bl" rotWithShape="0">
+          <a:prstClr val="black">
+            <a:alpha val="20000"/>
+          </a:prstClr>
+        </a:outerShdw>
+      </a:effectLst>
+    </cs:spPr>
+  </cs:dataPoint>
+  <cs:dataPoint3D>
+    <cs:lnRef idx="0"/>
+    <cs:fillRef idx="0">
+      <cs:styleClr val="auto"/>
+    </cs:fillRef>
+    <cs:effectRef idx="0"/>
+    <cs:fontRef idx="minor">
+      <a:schemeClr val="dk1"/>
+    </cs:fontRef>
+    <cs:spPr>
+      <a:gradFill>
+        <a:gsLst>
+          <a:gs pos="0">
+            <a:schemeClr val="phClr"/>
+          </a:gs>
+          <a:gs pos="100000">
+            <a:schemeClr val="phClr">
+              <a:lumMod val="84000"/>
+            </a:schemeClr>
+          </a:gs>
+        </a:gsLst>
+        <a:lin ang="5400000" scaled="1"/>
+      </a:gradFill>
+      <a:effectLst>
+        <a:outerShdw blurRad="76200" dir="18900000" sy="23000" kx="-1200000" algn="bl" rotWithShape="0">
+          <a:prstClr val="black">
+            <a:alpha val="20000"/>
+          </a:prstClr>
+        </a:outerShdw>
+      </a:effectLst>
+    </cs:spPr>
+  </cs:dataPoint3D>
+  <cs:dataPointLine>
+    <cs:lnRef idx="0">
+      <cs:styleClr val="auto"/>
+    </cs:lnRef>
+    <cs:fillRef idx="0"/>
+    <cs:effectRef idx="0"/>
+    <cs:fontRef idx="minor">
+      <a:schemeClr val="dk1"/>
+    </cs:fontRef>
+    <cs:spPr>
+      <a:ln w="28575" cap="rnd">
+        <a:gradFill>
+          <a:gsLst>
+            <a:gs pos="0">
+              <a:schemeClr val="phClr"/>
+            </a:gs>
+            <a:gs pos="100000">
+              <a:schemeClr val="phClr">
+                <a:lumMod val="84000"/>
+              </a:schemeClr>
+            </a:gs>
+          </a:gsLst>
+          <a:lin ang="5400000" scaled="1"/>
+        </a:gradFill>
+        <a:round/>
+      </a:ln>
+    </cs:spPr>
+  </cs:dataPointLine>
+  <cs:dataPointMarker>
+    <cs:lnRef idx="0"/>
+    <cs:fillRef idx="0">
+      <cs:styleClr val="auto"/>
+    </cs:fillRef>
+    <cs:effectRef idx="0"/>
+    <cs:fontRef idx="minor">
+      <a:schemeClr val="dk1"/>
+    </cs:fontRef>
+    <cs:spPr>
+      <a:gradFill>
+        <a:gsLst>
+          <a:gs pos="0">
+            <a:schemeClr val="phClr"/>
+          </a:gs>
+          <a:gs pos="100000">
+            <a:schemeClr val="phClr">
+              <a:lumMod val="84000"/>
+            </a:schemeClr>
+          </a:gs>
+        </a:gsLst>
+        <a:lin ang="5400000" scaled="1"/>
+      </a:gradFill>
+      <a:effectLst>
+        <a:outerShdw blurRad="76200" dir="18900000" sy="23000" kx="-1200000" algn="bl" rotWithShape="0">
+          <a:prstClr val="black">
+            <a:alpha val="20000"/>
+          </a:prstClr>
+        </a:outerShdw>
+      </a:effectLst>
+    </cs:spPr>
+  </cs:dataPointMarker>
+  <cs:dataPointMarkerLayout symbol="circle" size="6"/>
+  <cs:dataPointWireframe>
+    <cs:lnRef idx="0">
+      <cs:styleClr val="auto"/>
+    </cs:lnRef>
+    <cs:fillRef idx="0"/>
+    <cs:effectRef idx="0"/>
+    <cs:fontRef idx="minor">
+      <a:schemeClr val="dk1"/>
+    </cs:fontRef>
+    <cs:spPr>
+      <a:ln w="9525" cap="rnd">
+        <a:solidFill>
+          <a:schemeClr val="phClr"/>
+        </a:solidFill>
+        <a:round/>
+      </a:ln>
+    </cs:spPr>
+  </cs:dataPointWireframe>
+  <cs:dataTable>
+    <cs:lnRef idx="0"/>
+    <cs:fillRef idx="0"/>
+    <cs:effectRef idx="0"/>
+    <cs:fontRef idx="minor">
+      <a:schemeClr val="dk1">
+        <a:lumMod val="65000"/>
+        <a:lumOff val="35000"/>
+      </a:schemeClr>
+    </cs:fontRef>
+    <cs:spPr>
+      <a:ln w="9525">
+        <a:solidFill>
+          <a:schemeClr val="dk1">
+            <a:lumMod val="15000"/>
+            <a:lumOff val="85000"/>
+          </a:schemeClr>
+        </a:solidFill>
+      </a:ln>
+    </cs:spPr>
+    <cs:defRPr sz="1197" kern="1200"/>
+  </cs:dataTable>
+  <cs:downBar>
+    <cs:lnRef idx="0"/>
+    <cs:fillRef idx="0"/>
+    <cs:effectRef idx="0"/>
+    <cs:fontRef idx="minor">
+      <a:schemeClr val="dk1"/>
+    </cs:fontRef>
+    <cs:spPr>
+      <a:solidFill>
+        <a:schemeClr val="dk1">
+          <a:lumMod val="35000"/>
+          <a:lumOff val="65000"/>
+        </a:schemeClr>
+      </a:solidFill>
+      <a:ln w="9525">
+        <a:solidFill>
+          <a:schemeClr val="dk1">
+            <a:lumMod val="50000"/>
+            <a:lumOff val="50000"/>
+          </a:schemeClr>
+        </a:solidFill>
+      </a:ln>
+    </cs:spPr>
+  </cs:downBar>
+  <cs:dropLine>
+    <cs:lnRef idx="0"/>
+    <cs:fillRef idx="0"/>
+    <cs:effectRef idx="0"/>
+    <cs:fontRef idx="minor">
+      <a:schemeClr val="dk1"/>
+    </cs:fontRef>
+    <cs:spPr>
+      <a:ln w="9525">
+        <a:solidFill>
+          <a:schemeClr val="dk1">
+            <a:lumMod val="50000"/>
+            <a:lumOff val="50000"/>
+          </a:schemeClr>
+        </a:solidFill>
+        <a:round/>
+      </a:ln>
+    </cs:spPr>
+  </cs:dropLine>
+  <cs:errorBar>
+    <cs:lnRef idx="0"/>
+    <cs:fillRef idx="0"/>
+    <cs:effectRef idx="0"/>
+    <cs:fontRef idx="minor">
+      <a:schemeClr val="dk1"/>
+    </cs:fontRef>
+    <cs:spPr>
+      <a:ln w="9525">
+        <a:solidFill>
+          <a:schemeClr val="dk1">
+            <a:lumMod val="50000"/>
+            <a:lumOff val="50000"/>
+          </a:schemeClr>
+        </a:solidFill>
+        <a:round/>
+      </a:ln>
+    </cs:spPr>
+  </cs:errorBar>
+  <cs:floor>
+    <cs:lnRef idx="0"/>
+    <cs:fillRef idx="0"/>
+    <cs:effectRef idx="0"/>
+    <cs:fontRef idx="minor">
+      <a:schemeClr val="dk1"/>
+    </cs:fontRef>
+  </cs:floor>
+  <cs:gridlineMajor>
+    <cs:lnRef idx="0"/>
+    <cs:fillRef idx="0"/>
+    <cs:effectRef idx="0"/>
+    <cs:fontRef idx="minor">
+      <a:schemeClr val="dk1"/>
+    </cs:fontRef>
+    <cs:spPr>
+      <a:ln w="9525" cap="flat" cmpd="sng" algn="ctr">
+        <a:solidFill>
+          <a:schemeClr val="dk1">
+            <a:lumMod val="15000"/>
+            <a:lumOff val="85000"/>
+          </a:schemeClr>
+        </a:solidFill>
+        <a:round/>
+      </a:ln>
+    </cs:spPr>
+  </cs:gridlineMajor>
+  <cs:gridlineMinor>
+    <cs:lnRef idx="0"/>
+    <cs:fillRef idx="0"/>
+    <cs:effectRef idx="0"/>
+    <cs:fontRef idx="minor">
+      <a:schemeClr val="dk1"/>
+    </cs:fontRef>
+    <cs:spPr>
+      <a:ln>
+        <a:solidFill>
+          <a:schemeClr val="dk1">
+            <a:lumMod val="5000"/>
+            <a:lumOff val="95000"/>
+          </a:schemeClr>
+        </a:solidFill>
+      </a:ln>
+    </cs:spPr>
+  </cs:gridlineMinor>
+  <cs:hiLoLine>
+    <cs:lnRef idx="0"/>
+    <cs:fillRef idx="0"/>
+    <cs:effectRef idx="0"/>
+    <cs:fontRef idx="minor">
+      <a:schemeClr val="dk1"/>
+    </cs:fontRef>
+    <cs:spPr>
+      <a:ln w="9525">
+        <a:solidFill>
+          <a:schemeClr val="dk1">
+            <a:lumMod val="50000"/>
+            <a:lumOff val="50000"/>
+          </a:schemeClr>
+        </a:solidFill>
+        <a:round/>
+      </a:ln>
+    </cs:spPr>
+  </cs:hiLoLine>
+  <cs:leaderLine>
+    <cs:lnRef idx="0"/>
+    <cs:fillRef idx="0"/>
+    <cs:effectRef idx="0"/>
+    <cs:fontRef idx="minor">
+      <a:schemeClr val="dk1"/>
+    </cs:fontRef>
+    <cs:spPr>
+      <a:ln w="9525">
+        <a:solidFill>
+          <a:schemeClr val="dk1">
+            <a:lumMod val="50000"/>
+            <a:lumOff val="50000"/>
+          </a:schemeClr>
+        </a:solidFill>
+      </a:ln>
+    </cs:spPr>
+  </cs:leaderLine>
+  <cs:legend>
+    <cs:lnRef idx="0"/>
+    <cs:fillRef idx="0"/>
+    <cs:effectRef idx="0"/>
+    <cs:fontRef idx="minor">
+      <a:schemeClr val="dk1">
+        <a:lumMod val="65000"/>
+        <a:lumOff val="35000"/>
+      </a:schemeClr>
+    </cs:fontRef>
+    <cs:defRPr sz="1197" kern="1200"/>
+  </cs:legend>
+  <cs:plotArea>
+    <cs:lnRef idx="0"/>
+    <cs:fillRef idx="0"/>
+    <cs:effectRef idx="0"/>
+    <cs:fontRef idx="minor">
+      <a:schemeClr val="dk1"/>
+    </cs:fontRef>
+  </cs:plotArea>
+  <cs:plotArea3D>
+    <cs:lnRef idx="0"/>
+    <cs:fillRef idx="0"/>
+    <cs:effectRef idx="0"/>
+    <cs:fontRef idx="minor">
+      <a:schemeClr val="dk1"/>
+    </cs:fontRef>
+  </cs:plotArea3D>
+  <cs:seriesAxis>
+    <cs:lnRef idx="0"/>
+    <cs:fillRef idx="0"/>
+    <cs:effectRef idx="0"/>
+    <cs:fontRef idx="minor">
+      <a:schemeClr val="dk1">
+        <a:lumMod val="65000"/>
+        <a:lumOff val="35000"/>
+      </a:schemeClr>
+    </cs:fontRef>
+    <cs:spPr>
+      <a:ln w="9525" cap="flat" cmpd="sng" algn="ctr">
+        <a:solidFill>
+          <a:schemeClr val="dk1">
+            <a:lumMod val="15000"/>
+            <a:lumOff val="85000"/>
+          </a:schemeClr>
+        </a:solidFill>
+        <a:round/>
+      </a:ln>
+    </cs:spPr>
+    <cs:defRPr sz="1197" kern="1200"/>
+  </cs:seriesAxis>
+  <cs:seriesLine>
+    <cs:lnRef idx="0"/>
+    <cs:fillRef idx="0"/>
+    <cs:effectRef idx="0"/>
+    <cs:fontRef idx="minor">
+      <a:schemeClr val="dk1"/>
+    </cs:fontRef>
+    <cs:spPr>
+      <a:ln w="9525">
+        <a:solidFill>
+          <a:schemeClr val="dk1">
+            <a:lumMod val="50000"/>
+            <a:lumOff val="50000"/>
+          </a:schemeClr>
+        </a:solidFill>
+        <a:round/>
+      </a:ln>
+    </cs:spPr>
+  </cs:seriesLine>
+  <cs:title>
+    <cs:lnRef idx="0"/>
+    <cs:fillRef idx="0"/>
+    <cs:effectRef idx="0"/>
+    <cs:fontRef idx="minor">
+      <a:schemeClr val="dk1">
+        <a:lumMod val="65000"/>
+        <a:lumOff val="35000"/>
+      </a:schemeClr>
+    </cs:fontRef>
+    <cs:defRPr kern="1200">
+      <a:effectLst/>
+    </cs:defRPr>
+  </cs:title>
+  <cs:trendline>
+    <cs:lnRef idx="0">
+      <cs:styleClr val="auto"/>
+    </cs:lnRef>
+    <cs:fillRef idx="0"/>
+    <cs:effectRef idx="0"/>
+    <cs:fontRef idx="minor">
+      <a:schemeClr val="dk1"/>
+    </cs:fontRef>
+    <cs:spPr>
+      <a:ln w="19050" cap="rnd">
+        <a:solidFill>
+          <a:schemeClr val="phClr"/>
+        </a:solidFill>
+        <a:prstDash val="sysDash"/>
+      </a:ln>
+    </cs:spPr>
+  </cs:trendline>
+  <cs:trendlineLabel>
+    <cs:lnRef idx="0"/>
+    <cs:fillRef idx="0"/>
+    <cs:effectRef idx="0"/>
+    <cs:fontRef idx="minor">
+      <a:schemeClr val="dk1">
+        <a:lumMod val="65000"/>
+        <a:lumOff val="35000"/>
+      </a:schemeClr>
+    </cs:fontRef>
+    <cs:defRPr sz="1197" kern="1200"/>
+  </cs:trendlineLabel>
+  <cs:upBar>
+    <cs:lnRef idx="0"/>
+    <cs:fillRef idx="0"/>
+    <cs:effectRef idx="0"/>
+    <cs:fontRef idx="minor">
+      <a:schemeClr val="dk1"/>
+    </cs:fontRef>
+    <cs:spPr>
+      <a:solidFill>
+        <a:schemeClr val="lt1">
+          <a:lumMod val="95000"/>
+        </a:schemeClr>
+      </a:solidFill>
+      <a:ln w="9525">
+        <a:solidFill>
+          <a:schemeClr val="dk1">
+            <a:lumMod val="15000"/>
+            <a:lumOff val="85000"/>
+          </a:schemeClr>
+        </a:solidFill>
+      </a:ln>
+    </cs:spPr>
+  </cs:upBar>
+  <cs:valueAxis>
+    <cs:lnRef idx="0"/>
+    <cs:fillRef idx="0"/>
+    <cs:effectRef idx="0"/>
+    <cs:fontRef idx="minor">
+      <a:schemeClr val="dk1">
+        <a:lumMod val="65000"/>
+        <a:lumOff val="35000"/>
+      </a:schemeClr>
+    </cs:fontRef>
+    <cs:defRPr sz="1197" kern="1200"/>
+  </cs:valueAxis>
+  <cs:wall>
+    <cs:lnRef idx="0"/>
+    <cs:fillRef idx="0"/>
+    <cs:effectRef idx="0"/>
+    <cs:fontRef idx="minor">
+      <a:schemeClr val="dk1"/>
+    </cs:fontRef>
+  </cs:wall>
+</cs:chartStyle>
+</file>
+
+<file path=ppt/charts/style2.xml><?xml version="1.0" encoding="utf-8"?>
+<cs:chartStyle xmlns:cs="http://schemas.microsoft.com/office/drawing/2012/chartStyle" xmlns:a="http://schemas.openxmlformats.org/drawingml/2006/main" id="204">
+  <cs:axisTitle>
+    <cs:lnRef idx="0"/>
+    <cs:fillRef idx="0"/>
+    <cs:effectRef idx="0"/>
+    <cs:fontRef idx="minor">
+      <a:schemeClr val="dk1">
+        <a:lumMod val="65000"/>
+        <a:lumOff val="35000"/>
+      </a:schemeClr>
+    </cs:fontRef>
+    <cs:defRPr sz="1197" b="1" kern="1200"/>
+  </cs:axisTitle>
+  <cs:categoryAxis>
+    <cs:lnRef idx="0"/>
+    <cs:fillRef idx="0"/>
+    <cs:effectRef idx="0"/>
+    <cs:fontRef idx="minor">
+      <a:schemeClr val="dk1">
+        <a:lumMod val="65000"/>
+        <a:lumOff val="35000"/>
+      </a:schemeClr>
+    </cs:fontRef>
+    <cs:defRPr sz="1197" kern="1200">
+      <a:effectLst/>
+    </cs:defRPr>
+  </cs:categoryAxis>
+  <cs:chartArea>
+    <cs:lnRef idx="0"/>
+    <cs:fillRef idx="0"/>
+    <cs:effectRef idx="0"/>
+    <cs:fontRef idx="minor">
+      <a:schemeClr val="dk1"/>
+    </cs:fontRef>
+    <cs:spPr>
+      <a:gradFill flip="none" rotWithShape="1">
+        <a:gsLst>
+          <a:gs pos="0">
+            <a:schemeClr val="lt1"/>
+          </a:gs>
+          <a:gs pos="68000">
+            <a:schemeClr val="lt1">
+              <a:lumMod val="85000"/>
+            </a:schemeClr>
+          </a:gs>
+          <a:gs pos="100000">
+            <a:schemeClr val="lt1"/>
+          </a:gs>
+        </a:gsLst>
+        <a:lin ang="5400000" scaled="1"/>
+        <a:tileRect/>
+      </a:gradFill>
+      <a:ln w="9525" cap="flat" cmpd="sng" algn="ctr">
+        <a:solidFill>
+          <a:schemeClr val="dk1">
+            <a:lumMod val="15000"/>
+            <a:lumOff val="85000"/>
+          </a:schemeClr>
+        </a:solidFill>
+        <a:round/>
+      </a:ln>
+    </cs:spPr>
+    <cs:defRPr sz="1330" kern="1200"/>
+  </cs:chartArea>
+  <cs:dataLabel>
+    <cs:lnRef idx="0"/>
+    <cs:fillRef idx="0"/>
+    <cs:effectRef idx="0"/>
+    <cs:fontRef idx="minor">
+      <a:schemeClr val="lt1"/>
+    </cs:fontRef>
+    <cs:spPr/>
+    <cs:defRPr sz="1330" b="1" i="0" u="none" strike="noStrike" kern="1200" baseline="0"/>
+  </cs:dataLabel>
+  <cs:dataLabelCallout>
+    <cs:lnRef idx="0"/>
+    <cs:fillRef idx="0"/>
+    <cs:effectRef idx="0"/>
+    <cs:fontRef idx="minor">
+      <a:schemeClr val="lt1"/>
+    </cs:fontRef>
+    <cs:spPr>
+      <a:solidFill>
+        <a:schemeClr val="dk1">
+          <a:lumMod val="65000"/>
+          <a:lumOff val="35000"/>
+          <a:alpha val="75000"/>
+        </a:schemeClr>
+      </a:solidFill>
+    </cs:spPr>
+    <cs:defRPr sz="1330" b="1" kern="1200"/>
+    <cs:bodyPr rot="0" spcFirstLastPara="1" vertOverflow="clip" horzOverflow="clip" vert="horz" wrap="square" lIns="36576" tIns="18288" rIns="36576" bIns="18288" anchor="ctr" anchorCtr="1">
+      <a:spAutoFit/>
+    </cs:bodyPr>
+  </cs:dataLabelCallout>
+  <cs:dataPoint>
+    <cs:lnRef idx="0">
+      <cs:styleClr val="auto"/>
+    </cs:lnRef>
+    <cs:fillRef idx="0">
+      <cs:styleClr val="auto"/>
+    </cs:fillRef>
+    <cs:effectRef idx="0"/>
+    <cs:fontRef idx="minor">
+      <a:schemeClr val="dk1"/>
+    </cs:fontRef>
+    <cs:spPr>
+      <a:gradFill>
+        <a:gsLst>
+          <a:gs pos="0">
+            <a:schemeClr val="phClr"/>
+          </a:gs>
+          <a:gs pos="100000">
+            <a:schemeClr val="phClr">
+              <a:lumMod val="84000"/>
+            </a:schemeClr>
+          </a:gs>
+        </a:gsLst>
+        <a:lin ang="5400000" scaled="1"/>
+      </a:gradFill>
+      <a:effectLst>
+        <a:outerShdw blurRad="76200" dir="18900000" sy="23000" kx="-1200000" algn="bl" rotWithShape="0">
+          <a:prstClr val="black">
+            <a:alpha val="20000"/>
+          </a:prstClr>
+        </a:outerShdw>
+      </a:effectLst>
+    </cs:spPr>
+  </cs:dataPoint>
+  <cs:dataPoint3D>
+    <cs:lnRef idx="0"/>
+    <cs:fillRef idx="0">
+      <cs:styleClr val="auto"/>
+    </cs:fillRef>
+    <cs:effectRef idx="0"/>
+    <cs:fontRef idx="minor">
+      <a:schemeClr val="dk1"/>
+    </cs:fontRef>
+    <cs:spPr>
+      <a:gradFill>
+        <a:gsLst>
+          <a:gs pos="0">
+            <a:schemeClr val="phClr"/>
+          </a:gs>
+          <a:gs pos="100000">
+            <a:schemeClr val="phClr">
+              <a:lumMod val="84000"/>
+            </a:schemeClr>
+          </a:gs>
+        </a:gsLst>
+        <a:lin ang="5400000" scaled="1"/>
+      </a:gradFill>
+      <a:effectLst>
+        <a:outerShdw blurRad="76200" dir="18900000" sy="23000" kx="-1200000" algn="bl" rotWithShape="0">
+          <a:prstClr val="black">
+            <a:alpha val="20000"/>
+          </a:prstClr>
+        </a:outerShdw>
+      </a:effectLst>
+    </cs:spPr>
+  </cs:dataPoint3D>
+  <cs:dataPointLine>
+    <cs:lnRef idx="0">
+      <cs:styleClr val="auto"/>
+    </cs:lnRef>
+    <cs:fillRef idx="0"/>
+    <cs:effectRef idx="0"/>
+    <cs:fontRef idx="minor">
+      <a:schemeClr val="dk1"/>
+    </cs:fontRef>
+    <cs:spPr>
+      <a:ln w="28575" cap="rnd">
+        <a:gradFill>
+          <a:gsLst>
+            <a:gs pos="0">
+              <a:schemeClr val="phClr"/>
+            </a:gs>
+            <a:gs pos="100000">
+              <a:schemeClr val="phClr">
+                <a:lumMod val="84000"/>
+              </a:schemeClr>
+            </a:gs>
+          </a:gsLst>
+          <a:lin ang="5400000" scaled="1"/>
+        </a:gradFill>
+        <a:round/>
+      </a:ln>
+    </cs:spPr>
+  </cs:dataPointLine>
+  <cs:dataPointMarker>
+    <cs:lnRef idx="0"/>
+    <cs:fillRef idx="0">
+      <cs:styleClr val="auto"/>
+    </cs:fillRef>
+    <cs:effectRef idx="0"/>
+    <cs:fontRef idx="minor">
+      <a:schemeClr val="dk1"/>
+    </cs:fontRef>
+    <cs:spPr>
+      <a:gradFill>
+        <a:gsLst>
+          <a:gs pos="0">
+            <a:schemeClr val="phClr"/>
+          </a:gs>
+          <a:gs pos="100000">
+            <a:schemeClr val="phClr">
+              <a:lumMod val="84000"/>
+            </a:schemeClr>
+          </a:gs>
+        </a:gsLst>
+        <a:lin ang="5400000" scaled="1"/>
+      </a:gradFill>
+      <a:effectLst>
+        <a:outerShdw blurRad="76200" dir="18900000" sy="23000" kx="-1200000" algn="bl" rotWithShape="0">
+          <a:prstClr val="black">
+            <a:alpha val="20000"/>
+          </a:prstClr>
+        </a:outerShdw>
+      </a:effectLst>
+    </cs:spPr>
+  </cs:dataPointMarker>
+  <cs:dataPointMarkerLayout symbol="circle" size="6"/>
+  <cs:dataPointWireframe>
+    <cs:lnRef idx="0">
+      <cs:styleClr val="auto"/>
+    </cs:lnRef>
+    <cs:fillRef idx="0"/>
+    <cs:effectRef idx="0"/>
+    <cs:fontRef idx="minor">
+      <a:schemeClr val="dk1"/>
+    </cs:fontRef>
+    <cs:spPr>
+      <a:ln w="9525" cap="rnd">
+        <a:solidFill>
+          <a:schemeClr val="phClr"/>
+        </a:solidFill>
+        <a:round/>
+      </a:ln>
+    </cs:spPr>
+  </cs:dataPointWireframe>
+  <cs:dataTable>
+    <cs:lnRef idx="0"/>
+    <cs:fillRef idx="0"/>
+    <cs:effectRef idx="0"/>
+    <cs:fontRef idx="minor">
+      <a:schemeClr val="dk1">
+        <a:lumMod val="65000"/>
+        <a:lumOff val="35000"/>
+      </a:schemeClr>
+    </cs:fontRef>
+    <cs:spPr>
+      <a:ln w="9525">
+        <a:solidFill>
+          <a:schemeClr val="dk1">
+            <a:lumMod val="15000"/>
+            <a:lumOff val="85000"/>
+          </a:schemeClr>
+        </a:solidFill>
+      </a:ln>
+    </cs:spPr>
+    <cs:defRPr sz="1197" kern="1200"/>
+  </cs:dataTable>
+  <cs:downBar>
+    <cs:lnRef idx="0"/>
+    <cs:fillRef idx="0"/>
+    <cs:effectRef idx="0"/>
+    <cs:fontRef idx="minor">
+      <a:schemeClr val="dk1"/>
+    </cs:fontRef>
+    <cs:spPr>
+      <a:solidFill>
+        <a:schemeClr val="dk1">
+          <a:lumMod val="35000"/>
+          <a:lumOff val="65000"/>
+        </a:schemeClr>
+      </a:solidFill>
+      <a:ln w="9525">
+        <a:solidFill>
+          <a:schemeClr val="dk1">
+            <a:lumMod val="50000"/>
+            <a:lumOff val="50000"/>
+          </a:schemeClr>
+        </a:solidFill>
+      </a:ln>
+    </cs:spPr>
+  </cs:downBar>
+  <cs:dropLine>
+    <cs:lnRef idx="0"/>
+    <cs:fillRef idx="0"/>
+    <cs:effectRef idx="0"/>
+    <cs:fontRef idx="minor">
+      <a:schemeClr val="dk1"/>
+    </cs:fontRef>
+    <cs:spPr>
+      <a:ln w="9525">
+        <a:solidFill>
+          <a:schemeClr val="dk1">
+            <a:lumMod val="50000"/>
+            <a:lumOff val="50000"/>
+          </a:schemeClr>
+        </a:solidFill>
+        <a:round/>
+      </a:ln>
+    </cs:spPr>
+  </cs:dropLine>
+  <cs:errorBar>
+    <cs:lnRef idx="0"/>
+    <cs:fillRef idx="0"/>
+    <cs:effectRef idx="0"/>
+    <cs:fontRef idx="minor">
+      <a:schemeClr val="dk1"/>
+    </cs:fontRef>
+    <cs:spPr>
+      <a:ln w="9525">
+        <a:solidFill>
+          <a:schemeClr val="dk1">
+            <a:lumMod val="50000"/>
+            <a:lumOff val="50000"/>
+          </a:schemeClr>
+        </a:solidFill>
+        <a:round/>
+      </a:ln>
+    </cs:spPr>
+  </cs:errorBar>
+  <cs:floor>
+    <cs:lnRef idx="0"/>
+    <cs:fillRef idx="0"/>
+    <cs:effectRef idx="0"/>
+    <cs:fontRef idx="minor">
+      <a:schemeClr val="dk1"/>
+    </cs:fontRef>
+  </cs:floor>
+  <cs:gridlineMajor>
+    <cs:lnRef idx="0"/>
+    <cs:fillRef idx="0"/>
+    <cs:effectRef idx="0"/>
+    <cs:fontRef idx="minor">
+      <a:schemeClr val="dk1"/>
+    </cs:fontRef>
+    <cs:spPr>
+      <a:ln w="9525" cap="flat" cmpd="sng" algn="ctr">
+        <a:solidFill>
+          <a:schemeClr val="dk1">
+            <a:lumMod val="15000"/>
+            <a:lumOff val="85000"/>
+          </a:schemeClr>
+        </a:solidFill>
+        <a:round/>
+      </a:ln>
+    </cs:spPr>
+  </cs:gridlineMajor>
+  <cs:gridlineMinor>
+    <cs:lnRef idx="0"/>
+    <cs:fillRef idx="0"/>
+    <cs:effectRef idx="0"/>
+    <cs:fontRef idx="minor">
+      <a:schemeClr val="dk1"/>
+    </cs:fontRef>
+    <cs:spPr>
+      <a:ln>
+        <a:solidFill>
+          <a:schemeClr val="dk1">
+            <a:lumMod val="5000"/>
+            <a:lumOff val="95000"/>
+          </a:schemeClr>
+        </a:solidFill>
+      </a:ln>
+    </cs:spPr>
+  </cs:gridlineMinor>
+  <cs:hiLoLine>
+    <cs:lnRef idx="0"/>
+    <cs:fillRef idx="0"/>
+    <cs:effectRef idx="0"/>
+    <cs:fontRef idx="minor">
+      <a:schemeClr val="dk1"/>
+    </cs:fontRef>
+    <cs:spPr>
+      <a:ln w="9525">
+        <a:solidFill>
+          <a:schemeClr val="dk1">
+            <a:lumMod val="50000"/>
+            <a:lumOff val="50000"/>
+          </a:schemeClr>
+        </a:solidFill>
+        <a:round/>
+      </a:ln>
+    </cs:spPr>
+  </cs:hiLoLine>
+  <cs:leaderLine>
+    <cs:lnRef idx="0"/>
+    <cs:fillRef idx="0"/>
+    <cs:effectRef idx="0"/>
+    <cs:fontRef idx="minor">
+      <a:schemeClr val="dk1"/>
+    </cs:fontRef>
+    <cs:spPr>
+      <a:ln w="9525">
+        <a:solidFill>
+          <a:schemeClr val="dk1">
+            <a:lumMod val="50000"/>
+            <a:lumOff val="50000"/>
+          </a:schemeClr>
+        </a:solidFill>
+      </a:ln>
+    </cs:spPr>
+  </cs:leaderLine>
+  <cs:legend>
+    <cs:lnRef idx="0"/>
+    <cs:fillRef idx="0"/>
+    <cs:effectRef idx="0"/>
+    <cs:fontRef idx="minor">
+      <a:schemeClr val="dk1">
+        <a:lumMod val="65000"/>
+        <a:lumOff val="35000"/>
+      </a:schemeClr>
+    </cs:fontRef>
+    <cs:defRPr sz="1197" kern="1200"/>
+  </cs:legend>
+  <cs:plotArea>
+    <cs:lnRef idx="0"/>
+    <cs:fillRef idx="0"/>
+    <cs:effectRef idx="0"/>
+    <cs:fontRef idx="minor">
+      <a:schemeClr val="dk1"/>
+    </cs:fontRef>
+  </cs:plotArea>
+  <cs:plotArea3D>
+    <cs:lnRef idx="0"/>
+    <cs:fillRef idx="0"/>
+    <cs:effectRef idx="0"/>
+    <cs:fontRef idx="minor">
+      <a:schemeClr val="dk1"/>
+    </cs:fontRef>
+  </cs:plotArea3D>
+  <cs:seriesAxis>
+    <cs:lnRef idx="0"/>
+    <cs:fillRef idx="0"/>
+    <cs:effectRef idx="0"/>
+    <cs:fontRef idx="minor">
+      <a:schemeClr val="dk1">
+        <a:lumMod val="65000"/>
+        <a:lumOff val="35000"/>
+      </a:schemeClr>
+    </cs:fontRef>
+    <cs:spPr>
+      <a:ln w="9525" cap="flat" cmpd="sng" algn="ctr">
+        <a:solidFill>
+          <a:schemeClr val="dk1">
+            <a:lumMod val="15000"/>
+            <a:lumOff val="85000"/>
+          </a:schemeClr>
+        </a:solidFill>
+        <a:round/>
+      </a:ln>
+    </cs:spPr>
+    <cs:defRPr sz="1197" kern="1200"/>
+  </cs:seriesAxis>
+  <cs:seriesLine>
+    <cs:lnRef idx="0"/>
+    <cs:fillRef idx="0"/>
+    <cs:effectRef idx="0"/>
+    <cs:fontRef idx="minor">
+      <a:schemeClr val="dk1"/>
+    </cs:fontRef>
+    <cs:spPr>
+      <a:ln w="9525">
+        <a:solidFill>
+          <a:schemeClr val="dk1">
+            <a:lumMod val="50000"/>
+            <a:lumOff val="50000"/>
+          </a:schemeClr>
+        </a:solidFill>
+        <a:round/>
+      </a:ln>
+    </cs:spPr>
+  </cs:seriesLine>
+  <cs:title>
+    <cs:lnRef idx="0"/>
+    <cs:fillRef idx="0"/>
+    <cs:effectRef idx="0"/>
+    <cs:fontRef idx="minor">
+      <a:schemeClr val="dk1">
+        <a:lumMod val="65000"/>
+        <a:lumOff val="35000"/>
+      </a:schemeClr>
+    </cs:fontRef>
+    <cs:defRPr kern="1200">
+      <a:effectLst/>
+    </cs:defRPr>
+  </cs:title>
+  <cs:trendline>
+    <cs:lnRef idx="0">
+      <cs:styleClr val="auto"/>
+    </cs:lnRef>
+    <cs:fillRef idx="0"/>
+    <cs:effectRef idx="0"/>
+    <cs:fontRef idx="minor">
+      <a:schemeClr val="dk1"/>
+    </cs:fontRef>
+    <cs:spPr>
+      <a:ln w="19050" cap="rnd">
+        <a:solidFill>
+          <a:schemeClr val="phClr"/>
+        </a:solidFill>
+        <a:prstDash val="sysDash"/>
+      </a:ln>
+    </cs:spPr>
+  </cs:trendline>
+  <cs:trendlineLabel>
+    <cs:lnRef idx="0"/>
+    <cs:fillRef idx="0"/>
+    <cs:effectRef idx="0"/>
+    <cs:fontRef idx="minor">
+      <a:schemeClr val="dk1">
+        <a:lumMod val="65000"/>
+        <a:lumOff val="35000"/>
+      </a:schemeClr>
+    </cs:fontRef>
+    <cs:defRPr sz="1197" kern="1200"/>
+  </cs:trendlineLabel>
+  <cs:upBar>
+    <cs:lnRef idx="0"/>
+    <cs:fillRef idx="0"/>
+    <cs:effectRef idx="0"/>
+    <cs:fontRef idx="minor">
+      <a:schemeClr val="dk1"/>
+    </cs:fontRef>
+    <cs:spPr>
+      <a:solidFill>
+        <a:schemeClr val="lt1">
+          <a:lumMod val="95000"/>
+        </a:schemeClr>
+      </a:solidFill>
+      <a:ln w="9525">
+        <a:solidFill>
+          <a:schemeClr val="dk1">
+            <a:lumMod val="15000"/>
+            <a:lumOff val="85000"/>
+          </a:schemeClr>
+        </a:solidFill>
+      </a:ln>
+    </cs:spPr>
+  </cs:upBar>
+  <cs:valueAxis>
+    <cs:lnRef idx="0"/>
+    <cs:fillRef idx="0"/>
+    <cs:effectRef idx="0"/>
+    <cs:fontRef idx="minor">
+      <a:schemeClr val="dk1">
+        <a:lumMod val="65000"/>
+        <a:lumOff val="35000"/>
+      </a:schemeClr>
+    </cs:fontRef>
+    <cs:defRPr sz="1197" kern="1200"/>
+  </cs:valueAxis>
+  <cs:wall>
+    <cs:lnRef idx="0"/>
+    <cs:fillRef idx="0"/>
+    <cs:effectRef idx="0"/>
+    <cs:fontRef idx="minor">
+      <a:schemeClr val="dk1"/>
+    </cs:fontRef>
+  </cs:wall>
+</cs:chartStyle>
+</file>
+
+<file path=ppt/charts/style3.xml><?xml version="1.0" encoding="utf-8"?>
+<cs:chartStyle xmlns:cs="http://schemas.microsoft.com/office/drawing/2012/chartStyle" xmlns:a="http://schemas.openxmlformats.org/drawingml/2006/main" id="204">
+  <cs:axisTitle>
+    <cs:lnRef idx="0"/>
+    <cs:fillRef idx="0"/>
+    <cs:effectRef idx="0"/>
+    <cs:fontRef idx="minor">
+      <a:schemeClr val="dk1">
+        <a:lumMod val="65000"/>
+        <a:lumOff val="35000"/>
+      </a:schemeClr>
+    </cs:fontRef>
+    <cs:defRPr sz="1197" b="1" kern="1200"/>
+  </cs:axisTitle>
+  <cs:categoryAxis>
+    <cs:lnRef idx="0"/>
+    <cs:fillRef idx="0"/>
+    <cs:effectRef idx="0"/>
+    <cs:fontRef idx="minor">
+      <a:schemeClr val="dk1">
+        <a:lumMod val="65000"/>
+        <a:lumOff val="35000"/>
+      </a:schemeClr>
+    </cs:fontRef>
+    <cs:defRPr sz="1197" kern="1200">
+      <a:effectLst/>
+    </cs:defRPr>
+  </cs:categoryAxis>
+  <cs:chartArea>
+    <cs:lnRef idx="0"/>
+    <cs:fillRef idx="0"/>
+    <cs:effectRef idx="0"/>
+    <cs:fontRef idx="minor">
+      <a:schemeClr val="dk1"/>
+    </cs:fontRef>
+    <cs:spPr>
+      <a:gradFill flip="none" rotWithShape="1">
+        <a:gsLst>
+          <a:gs pos="0">
+            <a:schemeClr val="lt1"/>
+          </a:gs>
+          <a:gs pos="68000">
+            <a:schemeClr val="lt1">
+              <a:lumMod val="85000"/>
+            </a:schemeClr>
+          </a:gs>
+          <a:gs pos="100000">
+            <a:schemeClr val="lt1"/>
+          </a:gs>
+        </a:gsLst>
+        <a:lin ang="5400000" scaled="1"/>
+        <a:tileRect/>
+      </a:gradFill>
+      <a:ln w="9525" cap="flat" cmpd="sng" algn="ctr">
+        <a:solidFill>
+          <a:schemeClr val="dk1">
+            <a:lumMod val="15000"/>
+            <a:lumOff val="85000"/>
+          </a:schemeClr>
+        </a:solidFill>
+        <a:round/>
+      </a:ln>
+    </cs:spPr>
+    <cs:defRPr sz="1330" kern="1200"/>
+  </cs:chartArea>
+  <cs:dataLabel>
+    <cs:lnRef idx="0"/>
+    <cs:fillRef idx="0"/>
+    <cs:effectRef idx="0"/>
+    <cs:fontRef idx="minor">
+      <a:schemeClr val="lt1"/>
+    </cs:fontRef>
+    <cs:spPr/>
+    <cs:defRPr sz="1330" b="1" i="0" u="none" strike="noStrike" kern="1200" baseline="0"/>
+  </cs:dataLabel>
+  <cs:dataLabelCallout>
+    <cs:lnRef idx="0"/>
+    <cs:fillRef idx="0"/>
+    <cs:effectRef idx="0"/>
+    <cs:fontRef idx="minor">
+      <a:schemeClr val="lt1"/>
+    </cs:fontRef>
+    <cs:spPr>
+      <a:solidFill>
+        <a:schemeClr val="dk1">
+          <a:lumMod val="65000"/>
+          <a:lumOff val="35000"/>
+          <a:alpha val="75000"/>
+        </a:schemeClr>
+      </a:solidFill>
+    </cs:spPr>
+    <cs:defRPr sz="1330" b="1" kern="1200"/>
+    <cs:bodyPr rot="0" spcFirstLastPara="1" vertOverflow="clip" horzOverflow="clip" vert="horz" wrap="square" lIns="36576" tIns="18288" rIns="36576" bIns="18288" anchor="ctr" anchorCtr="1">
+      <a:spAutoFit/>
+    </cs:bodyPr>
+  </cs:dataLabelCallout>
+  <cs:dataPoint>
+    <cs:lnRef idx="0">
+      <cs:styleClr val="auto"/>
+    </cs:lnRef>
+    <cs:fillRef idx="0">
+      <cs:styleClr val="auto"/>
+    </cs:fillRef>
+    <cs:effectRef idx="0"/>
+    <cs:fontRef idx="minor">
+      <a:schemeClr val="dk1"/>
+    </cs:fontRef>
+    <cs:spPr>
+      <a:gradFill>
+        <a:gsLst>
+          <a:gs pos="0">
+            <a:schemeClr val="phClr"/>
+          </a:gs>
+          <a:gs pos="100000">
+            <a:schemeClr val="phClr">
+              <a:lumMod val="84000"/>
+            </a:schemeClr>
+          </a:gs>
+        </a:gsLst>
+        <a:lin ang="5400000" scaled="1"/>
+      </a:gradFill>
+      <a:effectLst>
+        <a:outerShdw blurRad="76200" dir="18900000" sy="23000" kx="-1200000" algn="bl" rotWithShape="0">
+          <a:prstClr val="black">
+            <a:alpha val="20000"/>
+          </a:prstClr>
+        </a:outerShdw>
+      </a:effectLst>
+    </cs:spPr>
+  </cs:dataPoint>
+  <cs:dataPoint3D>
+    <cs:lnRef idx="0"/>
+    <cs:fillRef idx="0">
+      <cs:styleClr val="auto"/>
+    </cs:fillRef>
+    <cs:effectRef idx="0"/>
+    <cs:fontRef idx="minor">
+      <a:schemeClr val="dk1"/>
+    </cs:fontRef>
+    <cs:spPr>
+      <a:gradFill>
+        <a:gsLst>
+          <a:gs pos="0">
+            <a:schemeClr val="phClr"/>
+          </a:gs>
+          <a:gs pos="100000">
+            <a:schemeClr val="phClr">
+              <a:lumMod val="84000"/>
+            </a:schemeClr>
+          </a:gs>
+        </a:gsLst>
+        <a:lin ang="5400000" scaled="1"/>
+      </a:gradFill>
+      <a:effectLst>
+        <a:outerShdw blurRad="76200" dir="18900000" sy="23000" kx="-1200000" algn="bl" rotWithShape="0">
+          <a:prstClr val="black">
+            <a:alpha val="20000"/>
+          </a:prstClr>
+        </a:outerShdw>
+      </a:effectLst>
+    </cs:spPr>
+  </cs:dataPoint3D>
+  <cs:dataPointLine>
+    <cs:lnRef idx="0">
+      <cs:styleClr val="auto"/>
+    </cs:lnRef>
+    <cs:fillRef idx="0"/>
+    <cs:effectRef idx="0"/>
+    <cs:fontRef idx="minor">
+      <a:schemeClr val="dk1"/>
+    </cs:fontRef>
+    <cs:spPr>
+      <a:ln w="28575" cap="rnd">
+        <a:gradFill>
+          <a:gsLst>
+            <a:gs pos="0">
+              <a:schemeClr val="phClr"/>
+            </a:gs>
+            <a:gs pos="100000">
+              <a:schemeClr val="phClr">
+                <a:lumMod val="84000"/>
+              </a:schemeClr>
+            </a:gs>
+          </a:gsLst>
+          <a:lin ang="5400000" scaled="1"/>
+        </a:gradFill>
+        <a:round/>
+      </a:ln>
+    </cs:spPr>
+  </cs:dataPointLine>
+  <cs:dataPointMarker>
+    <cs:lnRef idx="0"/>
+    <cs:fillRef idx="0">
+      <cs:styleClr val="auto"/>
+    </cs:fillRef>
+    <cs:effectRef idx="0"/>
+    <cs:fontRef idx="minor">
+      <a:schemeClr val="dk1"/>
+    </cs:fontRef>
+    <cs:spPr>
+      <a:gradFill>
+        <a:gsLst>
+          <a:gs pos="0">
+            <a:schemeClr val="phClr"/>
+          </a:gs>
+          <a:gs pos="100000">
+            <a:schemeClr val="phClr">
+              <a:lumMod val="84000"/>
+            </a:schemeClr>
+          </a:gs>
+        </a:gsLst>
+        <a:lin ang="5400000" scaled="1"/>
+      </a:gradFill>
+      <a:effectLst>
+        <a:outerShdw blurRad="76200" dir="18900000" sy="23000" kx="-1200000" algn="bl" rotWithShape="0">
+          <a:prstClr val="black">
+            <a:alpha val="20000"/>
+          </a:prstClr>
+        </a:outerShdw>
+      </a:effectLst>
+    </cs:spPr>
+  </cs:dataPointMarker>
+  <cs:dataPointMarkerLayout symbol="circle" size="6"/>
+  <cs:dataPointWireframe>
+    <cs:lnRef idx="0">
+      <cs:styleClr val="auto"/>
+    </cs:lnRef>
+    <cs:fillRef idx="0"/>
+    <cs:effectRef idx="0"/>
+    <cs:fontRef idx="minor">
+      <a:schemeClr val="dk1"/>
+    </cs:fontRef>
+    <cs:spPr>
+      <a:ln w="9525" cap="rnd">
+        <a:solidFill>
+          <a:schemeClr val="phClr"/>
+        </a:solidFill>
+        <a:round/>
+      </a:ln>
+    </cs:spPr>
+  </cs:dataPointWireframe>
+  <cs:dataTable>
+    <cs:lnRef idx="0"/>
+    <cs:fillRef idx="0"/>
+    <cs:effectRef idx="0"/>
+    <cs:fontRef idx="minor">
+      <a:schemeClr val="dk1">
+        <a:lumMod val="65000"/>
+        <a:lumOff val="35000"/>
+      </a:schemeClr>
+    </cs:fontRef>
+    <cs:spPr>
+      <a:ln w="9525">
+        <a:solidFill>
+          <a:schemeClr val="dk1">
+            <a:lumMod val="15000"/>
+            <a:lumOff val="85000"/>
+          </a:schemeClr>
+        </a:solidFill>
+      </a:ln>
+    </cs:spPr>
+    <cs:defRPr sz="1197" kern="1200"/>
+  </cs:dataTable>
+  <cs:downBar>
+    <cs:lnRef idx="0"/>
+    <cs:fillRef idx="0"/>
+    <cs:effectRef idx="0"/>
+    <cs:fontRef idx="minor">
+      <a:schemeClr val="dk1"/>
+    </cs:fontRef>
+    <cs:spPr>
+      <a:solidFill>
+        <a:schemeClr val="dk1">
+          <a:lumMod val="35000"/>
+          <a:lumOff val="65000"/>
+        </a:schemeClr>
+      </a:solidFill>
+      <a:ln w="9525">
+        <a:solidFill>
+          <a:schemeClr val="dk1">
+            <a:lumMod val="50000"/>
+            <a:lumOff val="50000"/>
+          </a:schemeClr>
+        </a:solidFill>
+      </a:ln>
+    </cs:spPr>
+  </cs:downBar>
+  <cs:dropLine>
+    <cs:lnRef idx="0"/>
+    <cs:fillRef idx="0"/>
+    <cs:effectRef idx="0"/>
+    <cs:fontRef idx="minor">
+      <a:schemeClr val="dk1"/>
+    </cs:fontRef>
+    <cs:spPr>
+      <a:ln w="9525">
+        <a:solidFill>
+          <a:schemeClr val="dk1">
+            <a:lumMod val="50000"/>
+            <a:lumOff val="50000"/>
+          </a:schemeClr>
+        </a:solidFill>
+        <a:round/>
+      </a:ln>
+    </cs:spPr>
+  </cs:dropLine>
+  <cs:errorBar>
+    <cs:lnRef idx="0"/>
+    <cs:fillRef idx="0"/>
+    <cs:effectRef idx="0"/>
+    <cs:fontRef idx="minor">
+      <a:schemeClr val="dk1"/>
+    </cs:fontRef>
+    <cs:spPr>
+      <a:ln w="9525">
+        <a:solidFill>
+          <a:schemeClr val="dk1">
+            <a:lumMod val="50000"/>
+            <a:lumOff val="50000"/>
+          </a:schemeClr>
+        </a:solidFill>
+        <a:round/>
+      </a:ln>
+    </cs:spPr>
+  </cs:errorBar>
+  <cs:floor>
+    <cs:lnRef idx="0"/>
+    <cs:fillRef idx="0"/>
+    <cs:effectRef idx="0"/>
+    <cs:fontRef idx="minor">
+      <a:schemeClr val="dk1"/>
+    </cs:fontRef>
+  </cs:floor>
+  <cs:gridlineMajor>
+    <cs:lnRef idx="0"/>
+    <cs:fillRef idx="0"/>
+    <cs:effectRef idx="0"/>
+    <cs:fontRef idx="minor">
+      <a:schemeClr val="dk1"/>
+    </cs:fontRef>
+    <cs:spPr>
+      <a:ln w="9525" cap="flat" cmpd="sng" algn="ctr">
+        <a:solidFill>
+          <a:schemeClr val="dk1">
+            <a:lumMod val="15000"/>
+            <a:lumOff val="85000"/>
+          </a:schemeClr>
+        </a:solidFill>
+        <a:round/>
+      </a:ln>
+    </cs:spPr>
+  </cs:gridlineMajor>
+  <cs:gridlineMinor>
+    <cs:lnRef idx="0"/>
+    <cs:fillRef idx="0"/>
+    <cs:effectRef idx="0"/>
+    <cs:fontRef idx="minor">
+      <a:schemeClr val="dk1"/>
+    </cs:fontRef>
+    <cs:spPr>
+      <a:ln>
+        <a:solidFill>
+          <a:schemeClr val="dk1">
+            <a:lumMod val="5000"/>
+            <a:lumOff val="95000"/>
+          </a:schemeClr>
+        </a:solidFill>
+      </a:ln>
+    </cs:spPr>
+  </cs:gridlineMinor>
+  <cs:hiLoLine>
+    <cs:lnRef idx="0"/>
+    <cs:fillRef idx="0"/>
+    <cs:effectRef idx="0"/>
+    <cs:fontRef idx="minor">
+      <a:schemeClr val="dk1"/>
+    </cs:fontRef>
+    <cs:spPr>
+      <a:ln w="9525">
+        <a:solidFill>
+          <a:schemeClr val="dk1">
+            <a:lumMod val="50000"/>
+            <a:lumOff val="50000"/>
+          </a:schemeClr>
+        </a:solidFill>
+        <a:round/>
+      </a:ln>
+    </cs:spPr>
+  </cs:hiLoLine>
+  <cs:leaderLine>
+    <cs:lnRef idx="0"/>
+    <cs:fillRef idx="0"/>
+    <cs:effectRef idx="0"/>
+    <cs:fontRef idx="minor">
+      <a:schemeClr val="dk1"/>
+    </cs:fontRef>
+    <cs:spPr>
+      <a:ln w="9525">
+        <a:solidFill>
+          <a:schemeClr val="dk1">
+            <a:lumMod val="50000"/>
+            <a:lumOff val="50000"/>
+          </a:schemeClr>
+        </a:solidFill>
+      </a:ln>
+    </cs:spPr>
+  </cs:leaderLine>
+  <cs:legend>
+    <cs:lnRef idx="0"/>
+    <cs:fillRef idx="0"/>
+    <cs:effectRef idx="0"/>
+    <cs:fontRef idx="minor">
+      <a:schemeClr val="dk1">
+        <a:lumMod val="65000"/>
+        <a:lumOff val="35000"/>
+      </a:schemeClr>
+    </cs:fontRef>
+    <cs:defRPr sz="1197" kern="1200"/>
+  </cs:legend>
+  <cs:plotArea>
+    <cs:lnRef idx="0"/>
+    <cs:fillRef idx="0"/>
+    <cs:effectRef idx="0"/>
+    <cs:fontRef idx="minor">
+      <a:schemeClr val="dk1"/>
+    </cs:fontRef>
+  </cs:plotArea>
+  <cs:plotArea3D>
+    <cs:lnRef idx="0"/>
+    <cs:fillRef idx="0"/>
+    <cs:effectRef idx="0"/>
+    <cs:fontRef idx="minor">
+      <a:schemeClr val="dk1"/>
+    </cs:fontRef>
+  </cs:plotArea3D>
+  <cs:seriesAxis>
+    <cs:lnRef idx="0"/>
+    <cs:fillRef idx="0"/>
+    <cs:effectRef idx="0"/>
+    <cs:fontRef idx="minor">
+      <a:schemeClr val="dk1">
+        <a:lumMod val="65000"/>
+        <a:lumOff val="35000"/>
+      </a:schemeClr>
+    </cs:fontRef>
+    <cs:spPr>
+      <a:ln w="9525" cap="flat" cmpd="sng" algn="ctr">
+        <a:solidFill>
+          <a:schemeClr val="dk1">
+            <a:lumMod val="15000"/>
+            <a:lumOff val="85000"/>
+          </a:schemeClr>
+        </a:solidFill>
+        <a:round/>
+      </a:ln>
+    </cs:spPr>
+    <cs:defRPr sz="1197" kern="1200"/>
+  </cs:seriesAxis>
+  <cs:seriesLine>
+    <cs:lnRef idx="0"/>
+    <cs:fillRef idx="0"/>
+    <cs:effectRef idx="0"/>
+    <cs:fontRef idx="minor">
+      <a:schemeClr val="dk1"/>
+    </cs:fontRef>
+    <cs:spPr>
+      <a:ln w="9525">
+        <a:solidFill>
+          <a:schemeClr val="dk1">
+            <a:lumMod val="50000"/>
+            <a:lumOff val="50000"/>
+          </a:schemeClr>
+        </a:solidFill>
+        <a:round/>
+      </a:ln>
+    </cs:spPr>
+  </cs:seriesLine>
+  <cs:title>
+    <cs:lnRef idx="0"/>
+    <cs:fillRef idx="0"/>
+    <cs:effectRef idx="0"/>
+    <cs:fontRef idx="minor">
+      <a:schemeClr val="dk1">
+        <a:lumMod val="65000"/>
+        <a:lumOff val="35000"/>
+      </a:schemeClr>
+    </cs:fontRef>
+    <cs:defRPr kern="1200">
+      <a:effectLst/>
+    </cs:defRPr>
+  </cs:title>
+  <cs:trendline>
+    <cs:lnRef idx="0">
+      <cs:styleClr val="auto"/>
+    </cs:lnRef>
+    <cs:fillRef idx="0"/>
+    <cs:effectRef idx="0"/>
+    <cs:fontRef idx="minor">
+      <a:schemeClr val="dk1"/>
+    </cs:fontRef>
+    <cs:spPr>
+      <a:ln w="19050" cap="rnd">
+        <a:solidFill>
+          <a:schemeClr val="phClr"/>
+        </a:solidFill>
+        <a:prstDash val="sysDash"/>
+      </a:ln>
+    </cs:spPr>
+  </cs:trendline>
+  <cs:trendlineLabel>
+    <cs:lnRef idx="0"/>
+    <cs:fillRef idx="0"/>
+    <cs:effectRef idx="0"/>
+    <cs:fontRef idx="minor">
+      <a:schemeClr val="dk1">
+        <a:lumMod val="65000"/>
+        <a:lumOff val="35000"/>
+      </a:schemeClr>
+    </cs:fontRef>
+    <cs:defRPr sz="1197" kern="1200"/>
+  </cs:trendlineLabel>
+  <cs:upBar>
+    <cs:lnRef idx="0"/>
+    <cs:fillRef idx="0"/>
+    <cs:effectRef idx="0"/>
+    <cs:fontRef idx="minor">
+      <a:schemeClr val="dk1"/>
+    </cs:fontRef>
+    <cs:spPr>
+      <a:solidFill>
+        <a:schemeClr val="lt1">
+          <a:lumMod val="95000"/>
+        </a:schemeClr>
+      </a:solidFill>
+      <a:ln w="9525">
+        <a:solidFill>
+          <a:schemeClr val="dk1">
+            <a:lumMod val="15000"/>
+            <a:lumOff val="85000"/>
+          </a:schemeClr>
+        </a:solidFill>
+      </a:ln>
+    </cs:spPr>
+  </cs:upBar>
+  <cs:valueAxis>
+    <cs:lnRef idx="0"/>
+    <cs:fillRef idx="0"/>
+    <cs:effectRef idx="0"/>
+    <cs:fontRef idx="minor">
+      <a:schemeClr val="dk1">
+        <a:lumMod val="65000"/>
+        <a:lumOff val="35000"/>
+      </a:schemeClr>
+    </cs:fontRef>
+    <cs:defRPr sz="1197" kern="1200"/>
+  </cs:valueAxis>
+  <cs:wall>
+    <cs:lnRef idx="0"/>
+    <cs:fillRef idx="0"/>
+    <cs:effectRef idx="0"/>
+    <cs:fontRef idx="minor">
+      <a:schemeClr val="dk1"/>
+    </cs:fontRef>
+  </cs:wall>
+</cs:chartStyle>
 </file>
 
 <file path=ppt/notesMasters/notesMaster1.xml><?xml version="1.0" encoding="utf-8"?>
@@ -3218,56 +5453,6 @@
       </p:sp>
       <p:sp>
         <p:nvSpPr>
-          <p:cNvPr id="12" name="Shape 9"/>
-          <p:cNvSpPr/>
-          <p:nvPr/>
-        </p:nvSpPr>
-        <p:spPr>
-          <a:xfrm>
-            <a:off x="7406640" y="1143000"/>
-            <a:ext cx="4114800" cy="4114800"/>
-          </a:xfrm>
-          <a:prstGeom prst="arc">
-            <a:avLst/>
-          </a:prstGeom>
-          <a:noFill/>
-          <a:ln w="20320">
-            <a:solidFill>
-              <a:srgbClr val="E20044">
-                <a:alpha val="90000"/>
-              </a:srgbClr>
-            </a:solidFill>
-            <a:prstDash val="solid"/>
-          </a:ln>
-        </p:spPr>
-      </p:sp>
-      <p:sp>
-        <p:nvSpPr>
-          <p:cNvPr id="13" name="Shape 10"/>
-          <p:cNvSpPr/>
-          <p:nvPr/>
-        </p:nvSpPr>
-        <p:spPr>
-          <a:xfrm>
-            <a:off x="7863840" y="1554480"/>
-            <a:ext cx="3200400" cy="3200400"/>
-          </a:xfrm>
-          <a:prstGeom prst="arc">
-            <a:avLst/>
-          </a:prstGeom>
-          <a:noFill/>
-          <a:ln w="17780">
-            <a:solidFill>
-              <a:srgbClr val="2E7D32">
-                <a:alpha val="90000"/>
-              </a:srgbClr>
-            </a:solidFill>
-            <a:prstDash val="solid"/>
-          </a:ln>
-        </p:spPr>
-      </p:sp>
-      <p:sp>
-        <p:nvSpPr>
           <p:cNvPr id="14" name="Text 11"/>
           <p:cNvSpPr/>
           <p:nvPr/>
@@ -3446,29 +5631,6 @@
           </a:p>
         </p:txBody>
       </p:sp>
-      <p:sp>
-        <p:nvSpPr>
-          <p:cNvPr id="4" name="Shape 2"/>
-          <p:cNvSpPr/>
-          <p:nvPr/>
-        </p:nvSpPr>
-        <p:spPr>
-          <a:xfrm>
-            <a:off x="502920" y="1060704"/>
-            <a:ext cx="11155680" cy="0"/>
-          </a:xfrm>
-          <a:prstGeom prst="line">
-            <a:avLst/>
-          </a:prstGeom>
-          <a:noFill/>
-          <a:ln w="12700">
-            <a:solidFill>
-              <a:srgbClr val="DCE4EA"/>
-            </a:solidFill>
-            <a:prstDash val="solid"/>
-          </a:ln>
-        </p:spPr>
-      </p:sp>
       <p:pic>
         <p:nvPicPr>
           <p:cNvPr id="5" name="Image 0" descr="/mnt/data/assets_spdp/logo_icon.png"/>
@@ -3595,7 +5757,7 @@
         </p:nvSpPr>
         <p:spPr>
           <a:xfrm>
-            <a:off x="685800" y="1325880"/>
+            <a:off x="709397" y="1801957"/>
             <a:ext cx="5074920" cy="2194560"/>
           </a:xfrm>
           <a:prstGeom prst="roundRect">
@@ -3629,7 +5791,7 @@
         </p:nvSpPr>
         <p:spPr>
           <a:xfrm>
-            <a:off x="850392" y="1490472"/>
+            <a:off x="873989" y="1966549"/>
             <a:ext cx="4745736" cy="1865376"/>
           </a:xfrm>
           <a:prstGeom prst="rect">
@@ -3956,7 +6118,7 @@
         </p:nvSpPr>
         <p:spPr>
           <a:xfrm>
-            <a:off x="6172200" y="1325880"/>
+            <a:off x="6195797" y="1801957"/>
             <a:ext cx="4800600" cy="2560320"/>
           </a:xfrm>
           <a:prstGeom prst="roundRect">
@@ -3990,7 +6152,7 @@
         </p:nvSpPr>
         <p:spPr>
           <a:xfrm>
-            <a:off x="685800" y="3931920"/>
+            <a:off x="709397" y="4672878"/>
             <a:ext cx="10287000" cy="1097280"/>
           </a:xfrm>
           <a:prstGeom prst="roundRect">
@@ -4024,7 +6186,7 @@
         </p:nvSpPr>
         <p:spPr>
           <a:xfrm>
-            <a:off x="960120" y="4069080"/>
+            <a:off x="983717" y="4810038"/>
             <a:ext cx="2651760" cy="868680"/>
           </a:xfrm>
           <a:prstGeom prst="rect">
@@ -4060,7 +6222,7 @@
         </p:nvSpPr>
         <p:spPr>
           <a:xfrm>
-            <a:off x="3566160" y="4443984"/>
+            <a:off x="3688077" y="5096454"/>
             <a:ext cx="1645920" cy="301752"/>
           </a:xfrm>
           <a:prstGeom prst="roundRect">
@@ -4089,7 +6251,7 @@
         </p:nvSpPr>
         <p:spPr>
           <a:xfrm>
-            <a:off x="3639312" y="4480560"/>
+            <a:off x="3761229" y="5133030"/>
             <a:ext cx="1499616" cy="228600"/>
           </a:xfrm>
           <a:prstGeom prst="rect">
@@ -4106,14 +6268,14 @@
               <a:buNone/>
             </a:pPr>
             <a:r>
-              <a:rPr lang="en-US" sz="850" b="1" dirty="0">
+              <a:rPr lang="en-US" sz="1000" b="1" dirty="0">
                 <a:solidFill>
                   <a:srgbClr val="FFFFFF"/>
                 </a:solidFill>
               </a:rPr>
               <a:t>1. Question métier</a:t>
             </a:r>
-            <a:endParaRPr lang="en-US" sz="850" dirty="0"/>
+            <a:endParaRPr lang="en-US" sz="1000" dirty="0"/>
           </a:p>
         </p:txBody>
       </p:sp>
@@ -4125,7 +6287,7 @@
         </p:nvSpPr>
         <p:spPr>
           <a:xfrm>
-            <a:off x="5394960" y="4443984"/>
+            <a:off x="5516877" y="5096454"/>
             <a:ext cx="1325880" cy="301752"/>
           </a:xfrm>
           <a:prstGeom prst="roundRect">
@@ -4154,7 +6316,7 @@
         </p:nvSpPr>
         <p:spPr>
           <a:xfrm>
-            <a:off x="5468112" y="4480560"/>
+            <a:off x="5590029" y="5133030"/>
             <a:ext cx="1179576" cy="228600"/>
           </a:xfrm>
           <a:prstGeom prst="rect">
@@ -4171,14 +6333,14 @@
               <a:buNone/>
             </a:pPr>
             <a:r>
-              <a:rPr lang="en-US" sz="850" b="1" dirty="0">
+              <a:rPr lang="en-US" sz="1000" b="1" dirty="0">
                 <a:solidFill>
                   <a:srgbClr val="FFFFFF"/>
                 </a:solidFill>
               </a:rPr>
               <a:t>2. Requête SQL</a:t>
             </a:r>
-            <a:endParaRPr lang="en-US" sz="850" dirty="0"/>
+            <a:endParaRPr lang="en-US" sz="1000" dirty="0"/>
           </a:p>
         </p:txBody>
       </p:sp>
@@ -4190,7 +6352,7 @@
         </p:nvSpPr>
         <p:spPr>
           <a:xfrm>
-            <a:off x="6903720" y="4443984"/>
+            <a:off x="7025637" y="5096454"/>
             <a:ext cx="1051560" cy="301752"/>
           </a:xfrm>
           <a:prstGeom prst="roundRect">
@@ -4219,7 +6381,7 @@
         </p:nvSpPr>
         <p:spPr>
           <a:xfrm>
-            <a:off x="6976872" y="4480560"/>
+            <a:off x="7098789" y="5133030"/>
             <a:ext cx="905256" cy="228600"/>
           </a:xfrm>
           <a:prstGeom prst="rect">
@@ -4236,14 +6398,14 @@
               <a:buNone/>
             </a:pPr>
             <a:r>
-              <a:rPr lang="en-US" sz="850" b="1" dirty="0">
+              <a:rPr lang="en-US" sz="1000" b="1" dirty="0">
                 <a:solidFill>
                   <a:srgbClr val="FFFFFF"/>
                 </a:solidFill>
               </a:rPr>
               <a:t>3. Résultat</a:t>
             </a:r>
-            <a:endParaRPr lang="en-US" sz="850" dirty="0"/>
+            <a:endParaRPr lang="en-US" sz="1000" dirty="0"/>
           </a:p>
         </p:txBody>
       </p:sp>
@@ -4255,7 +6417,7 @@
         </p:nvSpPr>
         <p:spPr>
           <a:xfrm>
-            <a:off x="8138160" y="4443984"/>
+            <a:off x="8260077" y="5096454"/>
             <a:ext cx="1536192" cy="301752"/>
           </a:xfrm>
           <a:prstGeom prst="roundRect">
@@ -4284,7 +6446,7 @@
         </p:nvSpPr>
         <p:spPr>
           <a:xfrm>
-            <a:off x="8211312" y="4480560"/>
+            <a:off x="8333229" y="5133030"/>
             <a:ext cx="1389888" cy="228600"/>
           </a:xfrm>
           <a:prstGeom prst="rect">
@@ -4301,14 +6463,14 @@
               <a:buNone/>
             </a:pPr>
             <a:r>
-              <a:rPr lang="en-US" sz="850" b="1" dirty="0">
+              <a:rPr lang="en-US" sz="1000" b="1" dirty="0">
                 <a:solidFill>
                   <a:srgbClr val="111820"/>
                 </a:solidFill>
               </a:rPr>
               <a:t>4. Interprétation</a:t>
             </a:r>
-            <a:endParaRPr lang="en-US" sz="850" dirty="0"/>
+            <a:endParaRPr lang="en-US" sz="1000" dirty="0"/>
           </a:p>
         </p:txBody>
       </p:sp>
@@ -4334,7 +6496,7 @@
         </p:blipFill>
         <p:spPr>
           <a:xfrm>
-            <a:off x="6675680" y="1408177"/>
+            <a:off x="6699277" y="1884254"/>
             <a:ext cx="3705551" cy="2397264"/>
           </a:xfrm>
           <a:prstGeom prst="rect">
@@ -4342,6 +6504,42 @@
           </a:prstGeom>
         </p:spPr>
       </p:pic>
+      <p:sp>
+        <p:nvSpPr>
+          <p:cNvPr id="12" name="Shape 2">
+            <a:extLst>
+              <a:ext uri="{FF2B5EF4-FFF2-40B4-BE49-F238E27FC236}">
+                <a16:creationId xmlns:a16="http://schemas.microsoft.com/office/drawing/2014/main" id="{EE0FC178-C81A-CE0A-E1F7-71ADF1C4C1A3}"/>
+              </a:ext>
+            </a:extLst>
+          </p:cNvPr>
+          <p:cNvSpPr/>
+          <p:nvPr/>
+        </p:nvSpPr>
+        <p:spPr>
+          <a:xfrm>
+            <a:off x="502920" y="1124712"/>
+            <a:ext cx="2148840" cy="0"/>
+          </a:xfrm>
+          <a:prstGeom prst="line">
+            <a:avLst/>
+          </a:prstGeom>
+          <a:noFill/>
+          <a:ln w="38100">
+            <a:solidFill>
+              <a:srgbClr val="E20044"/>
+            </a:solidFill>
+            <a:prstDash val="solid"/>
+          </a:ln>
+        </p:spPr>
+        <p:txBody>
+          <a:bodyPr/>
+          <a:lstStyle/>
+          <a:p>
+            <a:endParaRPr/>
+          </a:p>
+        </p:txBody>
+      </p:sp>
     </p:spTree>
   </p:cSld>
   <p:clrMapOvr>
@@ -4450,29 +6648,6 @@
           </a:p>
         </p:txBody>
       </p:sp>
-      <p:sp>
-        <p:nvSpPr>
-          <p:cNvPr id="4" name="Shape 2"/>
-          <p:cNvSpPr/>
-          <p:nvPr/>
-        </p:nvSpPr>
-        <p:spPr>
-          <a:xfrm>
-            <a:off x="502920" y="1060704"/>
-            <a:ext cx="11155680" cy="0"/>
-          </a:xfrm>
-          <a:prstGeom prst="line">
-            <a:avLst/>
-          </a:prstGeom>
-          <a:noFill/>
-          <a:ln w="12700">
-            <a:solidFill>
-              <a:srgbClr val="DCE4EA"/>
-            </a:solidFill>
-            <a:prstDash val="solid"/>
-          </a:ln>
-        </p:spPr>
-      </p:sp>
       <p:pic>
         <p:nvPicPr>
           <p:cNvPr id="5" name="Image 0" descr="/mnt/data/assets_spdp/logo_icon.png"/>
@@ -4595,11 +6770,17 @@
         <p:nvGraphicFramePr>
           <p:cNvPr id="9" name="Chart 0"/>
           <p:cNvGraphicFramePr/>
-          <p:nvPr/>
+          <p:nvPr>
+            <p:extLst>
+              <p:ext uri="{D42A27DB-BD31-4B8C-83A1-F6EECF244321}">
+                <p14:modId xmlns:p14="http://schemas.microsoft.com/office/powerpoint/2010/main" val="470538488"/>
+              </p:ext>
+            </p:extLst>
+          </p:nvPr>
         </p:nvGraphicFramePr>
         <p:xfrm>
-          <a:off x="731520" y="1371600"/>
-          <a:ext cx="6400800" cy="3840480"/>
+          <a:off x="530352" y="1682496"/>
+          <a:ext cx="6900376" cy="3840480"/>
         </p:xfrm>
         <a:graphic>
           <a:graphicData uri="http://schemas.openxmlformats.org/drawingml/2006/chart">
@@ -4615,7 +6796,7 @@
         </p:nvSpPr>
         <p:spPr>
           <a:xfrm>
-            <a:off x="7543800" y="1371600"/>
+            <a:off x="7887928" y="1682496"/>
             <a:ext cx="3611880" cy="3840480"/>
           </a:xfrm>
           <a:prstGeom prst="roundRect">
@@ -4649,7 +6830,7 @@
         </p:nvSpPr>
         <p:spPr>
           <a:xfrm>
-            <a:off x="7818120" y="1691640"/>
+            <a:off x="8162248" y="2002536"/>
             <a:ext cx="1828800" cy="256032"/>
           </a:xfrm>
           <a:prstGeom prst="rect">
@@ -4685,7 +6866,7 @@
         </p:nvSpPr>
         <p:spPr>
           <a:xfrm>
-            <a:off x="7818120" y="2148840"/>
+            <a:off x="8162248" y="2459736"/>
             <a:ext cx="2926080" cy="640080"/>
           </a:xfrm>
           <a:prstGeom prst="rect">
@@ -4723,7 +6904,7 @@
         </p:nvSpPr>
         <p:spPr>
           <a:xfrm>
-            <a:off x="7818120" y="2971800"/>
+            <a:off x="8162248" y="3282696"/>
             <a:ext cx="2743200" cy="0"/>
           </a:xfrm>
           <a:prstGeom prst="line">
@@ -4746,7 +6927,7 @@
         </p:nvSpPr>
         <p:spPr>
           <a:xfrm>
-            <a:off x="7818120" y="3246120"/>
+            <a:off x="8162248" y="3557016"/>
             <a:ext cx="2880360" cy="1143000"/>
           </a:xfrm>
           <a:prstGeom prst="rect">
@@ -4801,6 +6982,42 @@
               <a:t>Base pour croiser avec les xG ou le temps de jeu.</a:t>
             </a:r>
             <a:endParaRPr lang="en-US" sz="1250" dirty="0"/>
+          </a:p>
+        </p:txBody>
+      </p:sp>
+      <p:sp>
+        <p:nvSpPr>
+          <p:cNvPr id="15" name="Shape 2">
+            <a:extLst>
+              <a:ext uri="{FF2B5EF4-FFF2-40B4-BE49-F238E27FC236}">
+                <a16:creationId xmlns:a16="http://schemas.microsoft.com/office/drawing/2014/main" id="{99ED4508-F759-60CD-DF03-5AA9B4C1E21C}"/>
+              </a:ext>
+            </a:extLst>
+          </p:cNvPr>
+          <p:cNvSpPr/>
+          <p:nvPr/>
+        </p:nvSpPr>
+        <p:spPr>
+          <a:xfrm>
+            <a:off x="502920" y="1124712"/>
+            <a:ext cx="2148840" cy="0"/>
+          </a:xfrm>
+          <a:prstGeom prst="line">
+            <a:avLst/>
+          </a:prstGeom>
+          <a:noFill/>
+          <a:ln w="38100">
+            <a:solidFill>
+              <a:srgbClr val="E20044"/>
+            </a:solidFill>
+            <a:prstDash val="solid"/>
+          </a:ln>
+        </p:spPr>
+        <p:txBody>
+          <a:bodyPr/>
+          <a:lstStyle/>
+          <a:p>
+            <a:endParaRPr/>
           </a:p>
         </p:txBody>
       </p:sp>
@@ -4912,29 +7129,6 @@
           </a:p>
         </p:txBody>
       </p:sp>
-      <p:sp>
-        <p:nvSpPr>
-          <p:cNvPr id="4" name="Shape 2"/>
-          <p:cNvSpPr/>
-          <p:nvPr/>
-        </p:nvSpPr>
-        <p:spPr>
-          <a:xfrm>
-            <a:off x="502920" y="1060704"/>
-            <a:ext cx="11155680" cy="0"/>
-          </a:xfrm>
-          <a:prstGeom prst="line">
-            <a:avLst/>
-          </a:prstGeom>
-          <a:noFill/>
-          <a:ln w="12700">
-            <a:solidFill>
-              <a:srgbClr val="DCE4EA"/>
-            </a:solidFill>
-            <a:prstDash val="solid"/>
-          </a:ln>
-        </p:spPr>
-      </p:sp>
       <p:pic>
         <p:nvPicPr>
           <p:cNvPr id="5" name="Image 0" descr="/mnt/data/assets_spdp/logo_icon.png"/>
@@ -5057,11 +7251,17 @@
         <p:nvGraphicFramePr>
           <p:cNvPr id="9" name="Chart 0"/>
           <p:cNvGraphicFramePr/>
-          <p:nvPr/>
+          <p:nvPr>
+            <p:extLst>
+              <p:ext uri="{D42A27DB-BD31-4B8C-83A1-F6EECF244321}">
+                <p14:modId xmlns:p14="http://schemas.microsoft.com/office/powerpoint/2010/main" val="1400724172"/>
+              </p:ext>
+            </p:extLst>
+          </p:nvPr>
         </p:nvGraphicFramePr>
         <p:xfrm>
-          <a:off x="822960" y="1371600"/>
-          <a:ext cx="5120640" cy="3566160"/>
+          <a:off x="530352" y="1668238"/>
+          <a:ext cx="5413248" cy="3566160"/>
         </p:xfrm>
         <a:graphic>
           <a:graphicData uri="http://schemas.openxmlformats.org/drawingml/2006/chart">
@@ -5077,7 +7277,7 @@
         </p:nvSpPr>
         <p:spPr>
           <a:xfrm>
-            <a:off x="6446520" y="1371600"/>
+            <a:off x="6446520" y="1668238"/>
             <a:ext cx="4617720" cy="3566160"/>
           </a:xfrm>
           <a:prstGeom prst="roundRect">
@@ -5111,7 +7311,7 @@
         </p:nvSpPr>
         <p:spPr>
           <a:xfrm>
-            <a:off x="6720840" y="1664208"/>
+            <a:off x="6720840" y="1960846"/>
             <a:ext cx="2743200" cy="274320"/>
           </a:xfrm>
           <a:prstGeom prst="rect">
@@ -5147,7 +7347,7 @@
         </p:nvSpPr>
         <p:spPr>
           <a:xfrm>
-            <a:off x="6720840" y="2103120"/>
+            <a:off x="6720840" y="2399758"/>
             <a:ext cx="3886200" cy="1188720"/>
           </a:xfrm>
           <a:prstGeom prst="rect">
@@ -5213,7 +7413,7 @@
         </p:nvSpPr>
         <p:spPr>
           <a:xfrm>
-            <a:off x="6720840" y="3584448"/>
+            <a:off x="6720840" y="3881086"/>
             <a:ext cx="3703320" cy="438912"/>
           </a:xfrm>
           <a:prstGeom prst="rect">
@@ -5240,6 +7440,42 @@
               <a:t>La répartition aide à contextualiser les moyennes par poste et à éviter les lectures biaisées.</a:t>
             </a:r>
             <a:endParaRPr lang="en-US" sz="1250" dirty="0"/>
+          </a:p>
+        </p:txBody>
+      </p:sp>
+      <p:sp>
+        <p:nvSpPr>
+          <p:cNvPr id="14" name="Shape 2">
+            <a:extLst>
+              <a:ext uri="{FF2B5EF4-FFF2-40B4-BE49-F238E27FC236}">
+                <a16:creationId xmlns:a16="http://schemas.microsoft.com/office/drawing/2014/main" id="{74E4D820-696F-2BD2-7E37-0D79459EC7EB}"/>
+              </a:ext>
+            </a:extLst>
+          </p:cNvPr>
+          <p:cNvSpPr/>
+          <p:nvPr/>
+        </p:nvSpPr>
+        <p:spPr>
+          <a:xfrm>
+            <a:off x="502920" y="1124712"/>
+            <a:ext cx="2148840" cy="0"/>
+          </a:xfrm>
+          <a:prstGeom prst="line">
+            <a:avLst/>
+          </a:prstGeom>
+          <a:noFill/>
+          <a:ln w="38100">
+            <a:solidFill>
+              <a:srgbClr val="E20044"/>
+            </a:solidFill>
+            <a:prstDash val="solid"/>
+          </a:ln>
+        </p:spPr>
+        <p:txBody>
+          <a:bodyPr/>
+          <a:lstStyle/>
+          <a:p>
+            <a:endParaRPr/>
           </a:p>
         </p:txBody>
       </p:sp>
@@ -5351,29 +7587,6 @@
           </a:p>
         </p:txBody>
       </p:sp>
-      <p:sp>
-        <p:nvSpPr>
-          <p:cNvPr id="4" name="Shape 2"/>
-          <p:cNvSpPr/>
-          <p:nvPr/>
-        </p:nvSpPr>
-        <p:spPr>
-          <a:xfrm>
-            <a:off x="502920" y="1060704"/>
-            <a:ext cx="11155680" cy="0"/>
-          </a:xfrm>
-          <a:prstGeom prst="line">
-            <a:avLst/>
-          </a:prstGeom>
-          <a:noFill/>
-          <a:ln w="12700">
-            <a:solidFill>
-              <a:srgbClr val="DCE4EA"/>
-            </a:solidFill>
-            <a:prstDash val="solid"/>
-          </a:ln>
-        </p:spPr>
-      </p:sp>
       <p:pic>
         <p:nvPicPr>
           <p:cNvPr id="5" name="Image 0" descr="/mnt/data/assets_spdp/logo_icon.png"/>
@@ -5496,11 +7709,17 @@
         <p:nvGraphicFramePr>
           <p:cNvPr id="9" name="Chart 0"/>
           <p:cNvGraphicFramePr/>
-          <p:nvPr/>
+          <p:nvPr>
+            <p:extLst>
+              <p:ext uri="{D42A27DB-BD31-4B8C-83A1-F6EECF244321}">
+                <p14:modId xmlns:p14="http://schemas.microsoft.com/office/powerpoint/2010/main" val="4027340809"/>
+              </p:ext>
+            </p:extLst>
+          </p:nvPr>
         </p:nvGraphicFramePr>
         <p:xfrm>
-          <a:off x="731520" y="1371600"/>
-          <a:ext cx="5852160" cy="3474720"/>
+          <a:off x="502920" y="1636775"/>
+          <a:ext cx="6080760" cy="3474720"/>
         </p:xfrm>
         <a:graphic>
           <a:graphicData uri="http://schemas.openxmlformats.org/drawingml/2006/chart">
@@ -5516,7 +7735,7 @@
         </p:nvSpPr>
         <p:spPr>
           <a:xfrm>
-            <a:off x="6995160" y="1371600"/>
+            <a:off x="6995160" y="1636775"/>
             <a:ext cx="4251960" cy="3474720"/>
           </a:xfrm>
           <a:prstGeom prst="roundRect">
@@ -5550,7 +7769,7 @@
         </p:nvSpPr>
         <p:spPr>
           <a:xfrm>
-            <a:off x="7269480" y="1645920"/>
+            <a:off x="7269480" y="1911095"/>
             <a:ext cx="2926080" cy="274320"/>
           </a:xfrm>
           <a:prstGeom prst="rect">
@@ -5586,7 +7805,7 @@
         </p:nvSpPr>
         <p:spPr>
           <a:xfrm>
-            <a:off x="7269480" y="2057400"/>
+            <a:off x="7269480" y="2322575"/>
             <a:ext cx="3474720" cy="1143000"/>
           </a:xfrm>
           <a:prstGeom prst="rect">
@@ -5652,7 +7871,7 @@
         </p:nvSpPr>
         <p:spPr>
           <a:xfrm>
-            <a:off x="7269480" y="3520440"/>
+            <a:off x="7269480" y="3785615"/>
             <a:ext cx="3429000" cy="384048"/>
           </a:xfrm>
           <a:prstGeom prst="rect">
@@ -5679,6 +7898,42 @@
               <a:t>La combinaison de ces métriques est plus robuste qu’un simple classement par buts.</a:t>
             </a:r>
             <a:endParaRPr lang="en-US" sz="1250" dirty="0"/>
+          </a:p>
+        </p:txBody>
+      </p:sp>
+      <p:sp>
+        <p:nvSpPr>
+          <p:cNvPr id="14" name="Shape 2">
+            <a:extLst>
+              <a:ext uri="{FF2B5EF4-FFF2-40B4-BE49-F238E27FC236}">
+                <a16:creationId xmlns:a16="http://schemas.microsoft.com/office/drawing/2014/main" id="{C282823D-3538-B48F-DEC5-4232EDF11D58}"/>
+              </a:ext>
+            </a:extLst>
+          </p:cNvPr>
+          <p:cNvSpPr/>
+          <p:nvPr/>
+        </p:nvSpPr>
+        <p:spPr>
+          <a:xfrm>
+            <a:off x="502920" y="1124712"/>
+            <a:ext cx="2148840" cy="0"/>
+          </a:xfrm>
+          <a:prstGeom prst="line">
+            <a:avLst/>
+          </a:prstGeom>
+          <a:noFill/>
+          <a:ln w="38100">
+            <a:solidFill>
+              <a:srgbClr val="E20044"/>
+            </a:solidFill>
+            <a:prstDash val="solid"/>
+          </a:ln>
+        </p:spPr>
+        <p:txBody>
+          <a:bodyPr/>
+          <a:lstStyle/>
+          <a:p>
+            <a:endParaRPr/>
           </a:p>
         </p:txBody>
       </p:sp>
@@ -5790,29 +8045,6 @@
           </a:p>
         </p:txBody>
       </p:sp>
-      <p:sp>
-        <p:nvSpPr>
-          <p:cNvPr id="4" name="Shape 2"/>
-          <p:cNvSpPr/>
-          <p:nvPr/>
-        </p:nvSpPr>
-        <p:spPr>
-          <a:xfrm>
-            <a:off x="502920" y="1060704"/>
-            <a:ext cx="11155680" cy="0"/>
-          </a:xfrm>
-          <a:prstGeom prst="line">
-            <a:avLst/>
-          </a:prstGeom>
-          <a:noFill/>
-          <a:ln w="12700">
-            <a:solidFill>
-              <a:srgbClr val="DCE4EA"/>
-            </a:solidFill>
-            <a:prstDash val="solid"/>
-          </a:ln>
-        </p:spPr>
-      </p:sp>
       <p:pic>
         <p:nvPicPr>
           <p:cNvPr id="5" name="Image 0" descr="/mnt/data/assets_spdp/logo_icon.png"/>
@@ -5939,7 +8171,7 @@
         </p:nvSpPr>
         <p:spPr>
           <a:xfrm>
-            <a:off x="868680" y="1463040"/>
+            <a:off x="868680" y="1696212"/>
             <a:ext cx="3154680" cy="3291840"/>
           </a:xfrm>
           <a:prstGeom prst="roundRect">
@@ -5973,8 +8205,8 @@
         </p:nvSpPr>
         <p:spPr>
           <a:xfrm>
-            <a:off x="1124712" y="1783080"/>
-            <a:ext cx="1417320" cy="320040"/>
+            <a:off x="1124712" y="2016252"/>
+            <a:ext cx="1417320" cy="360000"/>
           </a:xfrm>
           <a:prstGeom prst="roundRect">
             <a:avLst>
@@ -5993,6 +8225,13 @@
             <a:prstDash val="solid"/>
           </a:ln>
         </p:spPr>
+        <p:txBody>
+          <a:bodyPr/>
+          <a:lstStyle/>
+          <a:p>
+            <a:endParaRPr lang="fr-FR" dirty="0"/>
+          </a:p>
+        </p:txBody>
       </p:sp>
       <p:sp>
         <p:nvSpPr>
@@ -6002,8 +8241,8 @@
         </p:nvSpPr>
         <p:spPr>
           <a:xfrm>
-            <a:off x="1197864" y="1819656"/>
-            <a:ext cx="1271016" cy="246888"/>
+            <a:off x="1197864" y="2052828"/>
+            <a:ext cx="1271016" cy="323424"/>
           </a:xfrm>
           <a:prstGeom prst="rect">
             <a:avLst/>
@@ -6019,14 +8258,14 @@
               <a:buNone/>
             </a:pPr>
             <a:r>
-              <a:rPr lang="en-US" sz="850" b="1" dirty="0">
+              <a:rPr lang="en-US" sz="1200" b="1" dirty="0">
                 <a:solidFill>
                   <a:srgbClr val="FFFFFF"/>
                 </a:solidFill>
               </a:rPr>
               <a:t>Discipline</a:t>
             </a:r>
-            <a:endParaRPr lang="en-US" sz="850" dirty="0"/>
+            <a:endParaRPr lang="en-US" sz="1200" dirty="0"/>
           </a:p>
         </p:txBody>
       </p:sp>
@@ -6038,7 +8277,7 @@
         </p:nvSpPr>
         <p:spPr>
           <a:xfrm>
-            <a:off x="1143000" y="2423160"/>
+            <a:off x="1143000" y="2656332"/>
             <a:ext cx="2514600" cy="457200"/>
           </a:xfrm>
           <a:prstGeom prst="rect">
@@ -6076,7 +8315,7 @@
         </p:nvSpPr>
         <p:spPr>
           <a:xfrm>
-            <a:off x="1143000" y="3246120"/>
+            <a:off x="1143000" y="3479292"/>
             <a:ext cx="2514600" cy="457200"/>
           </a:xfrm>
           <a:prstGeom prst="rect">
@@ -6114,7 +8353,7 @@
         </p:nvSpPr>
         <p:spPr>
           <a:xfrm>
-            <a:off x="4572000" y="1463040"/>
+            <a:off x="4572000" y="1696212"/>
             <a:ext cx="3154680" cy="3291840"/>
           </a:xfrm>
           <a:prstGeom prst="roundRect">
@@ -6148,8 +8387,8 @@
         </p:nvSpPr>
         <p:spPr>
           <a:xfrm>
-            <a:off x="4828032" y="1783080"/>
-            <a:ext cx="1417320" cy="320040"/>
+            <a:off x="4828032" y="2016252"/>
+            <a:ext cx="1417320" cy="360000"/>
           </a:xfrm>
           <a:prstGeom prst="roundRect">
             <a:avLst>
@@ -6177,8 +8416,8 @@
         </p:nvSpPr>
         <p:spPr>
           <a:xfrm>
-            <a:off x="4901184" y="1819656"/>
-            <a:ext cx="1271016" cy="246888"/>
+            <a:off x="4901184" y="2052828"/>
+            <a:ext cx="1271016" cy="323424"/>
           </a:xfrm>
           <a:prstGeom prst="rect">
             <a:avLst/>
@@ -6194,14 +8433,14 @@
               <a:buNone/>
             </a:pPr>
             <a:r>
-              <a:rPr lang="en-US" sz="850" b="1" dirty="0">
+              <a:rPr lang="en-US" sz="1200" b="1" dirty="0">
                 <a:solidFill>
                   <a:srgbClr val="FFFFFF"/>
                 </a:solidFill>
               </a:rPr>
               <a:t>Temps de jeu</a:t>
             </a:r>
-            <a:endParaRPr lang="en-US" sz="850" dirty="0"/>
+            <a:endParaRPr lang="en-US" sz="1200" dirty="0"/>
           </a:p>
         </p:txBody>
       </p:sp>
@@ -6213,7 +8452,7 @@
         </p:nvSpPr>
         <p:spPr>
           <a:xfrm>
-            <a:off x="4846320" y="2423160"/>
+            <a:off x="4846320" y="2656332"/>
             <a:ext cx="2514600" cy="457200"/>
           </a:xfrm>
           <a:prstGeom prst="rect">
@@ -6251,7 +8490,7 @@
         </p:nvSpPr>
         <p:spPr>
           <a:xfrm>
-            <a:off x="4846320" y="3246120"/>
+            <a:off x="4846320" y="3479292"/>
             <a:ext cx="2514600" cy="457200"/>
           </a:xfrm>
           <a:prstGeom prst="rect">
@@ -6289,7 +8528,7 @@
         </p:nvSpPr>
         <p:spPr>
           <a:xfrm>
-            <a:off x="8275320" y="1463040"/>
+            <a:off x="8275320" y="1696212"/>
             <a:ext cx="3154680" cy="3291840"/>
           </a:xfrm>
           <a:prstGeom prst="roundRect">
@@ -6323,8 +8562,8 @@
         </p:nvSpPr>
         <p:spPr>
           <a:xfrm>
-            <a:off x="8531352" y="1783080"/>
-            <a:ext cx="1417320" cy="320040"/>
+            <a:off x="8531352" y="2016252"/>
+            <a:ext cx="1417320" cy="360000"/>
           </a:xfrm>
           <a:prstGeom prst="roundRect">
             <a:avLst>
@@ -6352,8 +8591,8 @@
         </p:nvSpPr>
         <p:spPr>
           <a:xfrm>
-            <a:off x="8604504" y="1819656"/>
-            <a:ext cx="1271016" cy="246888"/>
+            <a:off x="8604504" y="2052828"/>
+            <a:ext cx="1271016" cy="323424"/>
           </a:xfrm>
           <a:prstGeom prst="rect">
             <a:avLst/>
@@ -6369,14 +8608,14 @@
               <a:buNone/>
             </a:pPr>
             <a:r>
-              <a:rPr lang="en-US" sz="850" b="1" dirty="0">
+              <a:rPr lang="en-US" sz="1200" b="1" dirty="0">
                 <a:solidFill>
                   <a:srgbClr val="FFFFFF"/>
                 </a:solidFill>
               </a:rPr>
               <a:t>Penalties</a:t>
             </a:r>
-            <a:endParaRPr lang="en-US" sz="850" dirty="0"/>
+            <a:endParaRPr lang="en-US" sz="1200" dirty="0"/>
           </a:p>
         </p:txBody>
       </p:sp>
@@ -6388,7 +8627,7 @@
         </p:nvSpPr>
         <p:spPr>
           <a:xfrm>
-            <a:off x="8549640" y="2423160"/>
+            <a:off x="8549640" y="2656332"/>
             <a:ext cx="2514600" cy="457200"/>
           </a:xfrm>
           <a:prstGeom prst="rect">
@@ -6426,7 +8665,7 @@
         </p:nvSpPr>
         <p:spPr>
           <a:xfrm>
-            <a:off x="8549640" y="3246120"/>
+            <a:off x="8549640" y="3479292"/>
             <a:ext cx="2514600" cy="457200"/>
           </a:xfrm>
           <a:prstGeom prst="rect">
@@ -6464,7 +8703,7 @@
         </p:nvSpPr>
         <p:spPr>
           <a:xfrm>
-            <a:off x="960120" y="5257800"/>
+            <a:off x="960120" y="5490972"/>
             <a:ext cx="10149840" cy="384048"/>
           </a:xfrm>
           <a:prstGeom prst="rect">
@@ -6489,6 +8728,42 @@
               <a:t>Ces indicateurs replacent les chiffres dans leur contexte d’utilisation : un carton ou un but n’a pas le même poids selon le temps de jeu.</a:t>
             </a:r>
             <a:endParaRPr lang="en-US" sz="1400" dirty="0"/>
+          </a:p>
+        </p:txBody>
+      </p:sp>
+      <p:sp>
+        <p:nvSpPr>
+          <p:cNvPr id="25" name="Shape 2">
+            <a:extLst>
+              <a:ext uri="{FF2B5EF4-FFF2-40B4-BE49-F238E27FC236}">
+                <a16:creationId xmlns:a16="http://schemas.microsoft.com/office/drawing/2014/main" id="{A8B3C0F8-8DEA-813C-9B78-7FBF4B4879CA}"/>
+              </a:ext>
+            </a:extLst>
+          </p:cNvPr>
+          <p:cNvSpPr/>
+          <p:nvPr/>
+        </p:nvSpPr>
+        <p:spPr>
+          <a:xfrm>
+            <a:off x="502920" y="1124712"/>
+            <a:ext cx="2148840" cy="0"/>
+          </a:xfrm>
+          <a:prstGeom prst="line">
+            <a:avLst/>
+          </a:prstGeom>
+          <a:noFill/>
+          <a:ln w="38100">
+            <a:solidFill>
+              <a:srgbClr val="E20044"/>
+            </a:solidFill>
+            <a:prstDash val="solid"/>
+          </a:ln>
+        </p:spPr>
+        <p:txBody>
+          <a:bodyPr/>
+          <a:lstStyle/>
+          <a:p>
+            <a:endParaRPr/>
           </a:p>
         </p:txBody>
       </p:sp>
@@ -6600,29 +8875,6 @@
           </a:p>
         </p:txBody>
       </p:sp>
-      <p:sp>
-        <p:nvSpPr>
-          <p:cNvPr id="4" name="Shape 2"/>
-          <p:cNvSpPr/>
-          <p:nvPr/>
-        </p:nvSpPr>
-        <p:spPr>
-          <a:xfrm>
-            <a:off x="502920" y="1060704"/>
-            <a:ext cx="11155680" cy="0"/>
-          </a:xfrm>
-          <a:prstGeom prst="line">
-            <a:avLst/>
-          </a:prstGeom>
-          <a:noFill/>
-          <a:ln w="12700">
-            <a:solidFill>
-              <a:srgbClr val="DCE4EA"/>
-            </a:solidFill>
-            <a:prstDash val="solid"/>
-          </a:ln>
-        </p:spPr>
-      </p:sp>
       <p:pic>
         <p:nvPicPr>
           <p:cNvPr id="5" name="Image 0" descr="/mnt/data/assets_spdp/logo_icon.png"/>
@@ -6749,7 +9001,7 @@
         </p:nvSpPr>
         <p:spPr>
           <a:xfrm>
-            <a:off x="685800" y="1234440"/>
+            <a:off x="685800" y="1497516"/>
             <a:ext cx="4389120" cy="4343400"/>
           </a:xfrm>
           <a:prstGeom prst="roundRect">
@@ -6783,7 +9035,7 @@
         </p:nvSpPr>
         <p:spPr>
           <a:xfrm>
-            <a:off x="685800" y="5614416"/>
+            <a:off x="685800" y="5877492"/>
             <a:ext cx="4389120" cy="164592"/>
           </a:xfrm>
           <a:prstGeom prst="rect">
@@ -6819,7 +9071,7 @@
         </p:nvSpPr>
         <p:spPr>
           <a:xfrm>
-            <a:off x="5486400" y="1234440"/>
+            <a:off x="5486400" y="1497516"/>
             <a:ext cx="5394960" cy="4343400"/>
           </a:xfrm>
           <a:prstGeom prst="roundRect">
@@ -6853,7 +9105,7 @@
         </p:nvSpPr>
         <p:spPr>
           <a:xfrm>
-            <a:off x="5806440" y="1554480"/>
+            <a:off x="5806440" y="1817556"/>
             <a:ext cx="2926080" cy="274320"/>
           </a:xfrm>
           <a:prstGeom prst="rect">
@@ -6872,12 +9124,16 @@
             <a:r>
               <a:rPr lang="en-US" sz="1700" b="1" dirty="0">
                 <a:solidFill>
-                  <a:srgbClr val="17252A"/>
+                  <a:srgbClr val="E20044"/>
                 </a:solidFill>
               </a:rPr>
               <a:t>Apport de la requête</a:t>
             </a:r>
-            <a:endParaRPr lang="en-US" sz="1700" dirty="0"/>
+            <a:endParaRPr lang="en-US" sz="1700" dirty="0">
+              <a:solidFill>
+                <a:srgbClr val="E20044"/>
+              </a:solidFill>
+            </a:endParaRPr>
           </a:p>
         </p:txBody>
       </p:sp>
@@ -6889,7 +9145,7 @@
         </p:nvSpPr>
         <p:spPr>
           <a:xfrm>
-            <a:off x="5806440" y="2011680"/>
+            <a:off x="5806440" y="2274756"/>
             <a:ext cx="4206240" cy="1417320"/>
           </a:xfrm>
           <a:prstGeom prst="roundRect">
@@ -6923,7 +9179,7 @@
         </p:nvSpPr>
         <p:spPr>
           <a:xfrm>
-            <a:off x="5971032" y="2176272"/>
+            <a:off x="5971032" y="2439348"/>
             <a:ext cx="3877056" cy="1088136"/>
           </a:xfrm>
           <a:prstGeom prst="rect">
@@ -7032,7 +9288,7 @@
         </p:nvSpPr>
         <p:spPr>
           <a:xfrm>
-            <a:off x="5806440" y="3730752"/>
+            <a:off x="5806440" y="3993828"/>
             <a:ext cx="4480560" cy="1051560"/>
           </a:xfrm>
           <a:prstGeom prst="rect">
@@ -7047,6 +9303,16 @@
           </a:bodyPr>
           <a:lstStyle/>
           <a:p>
+            <a:pPr marL="285750" indent="-285750">
+              <a:lnSpc>
+                <a:spcPct val="150000"/>
+              </a:lnSpc>
+              <a:buClr>
+                <a:srgbClr val="E20044"/>
+              </a:buClr>
+              <a:buFont typeface="Wingdings" panose="05000000000000000000" pitchFamily="2" charset="2"/>
+              <a:buChar char="Ø"/>
+            </a:pPr>
             <a:r>
               <a:rPr lang="en-US" sz="1280" dirty="0">
                 <a:solidFill>
@@ -7061,6 +9327,16 @@
             <a:endParaRPr lang="en-US" sz="1280" dirty="0"/>
           </a:p>
           <a:p>
+            <a:pPr marL="285750" indent="-285750">
+              <a:lnSpc>
+                <a:spcPct val="150000"/>
+              </a:lnSpc>
+              <a:buClr>
+                <a:srgbClr val="E20044"/>
+              </a:buClr>
+              <a:buFont typeface="Wingdings" panose="05000000000000000000" pitchFamily="2" charset="2"/>
+              <a:buChar char="Ø"/>
+            </a:pPr>
             <a:r>
               <a:rPr lang="en-US" sz="1280" dirty="0">
                 <a:solidFill>
@@ -7075,6 +9351,16 @@
             <a:endParaRPr lang="en-US" sz="1280" dirty="0"/>
           </a:p>
           <a:p>
+            <a:pPr marL="285750" indent="-285750">
+              <a:lnSpc>
+                <a:spcPct val="150000"/>
+              </a:lnSpc>
+              <a:buClr>
+                <a:srgbClr val="E20044"/>
+              </a:buClr>
+              <a:buFont typeface="Wingdings" panose="05000000000000000000" pitchFamily="2" charset="2"/>
+              <a:buChar char="Ø"/>
+            </a:pPr>
             <a:r>
               <a:rPr lang="en-US" sz="1280" dirty="0">
                 <a:solidFill>
@@ -7112,7 +9398,7 @@
         </p:blipFill>
         <p:spPr>
           <a:xfrm>
-            <a:off x="793452" y="1380744"/>
+            <a:off x="793452" y="1643820"/>
             <a:ext cx="4144308" cy="2668742"/>
           </a:xfrm>
           <a:prstGeom prst="rect">
@@ -7142,7 +9428,7 @@
         </p:blipFill>
         <p:spPr>
           <a:xfrm>
-            <a:off x="793452" y="4247739"/>
+            <a:off x="793452" y="4510815"/>
             <a:ext cx="4144308" cy="1131847"/>
           </a:xfrm>
           <a:prstGeom prst="rect">
@@ -7150,6 +9436,42 @@
           </a:prstGeom>
         </p:spPr>
       </p:pic>
+      <p:sp>
+        <p:nvSpPr>
+          <p:cNvPr id="10" name="Shape 2">
+            <a:extLst>
+              <a:ext uri="{FF2B5EF4-FFF2-40B4-BE49-F238E27FC236}">
+                <a16:creationId xmlns:a16="http://schemas.microsoft.com/office/drawing/2014/main" id="{6DACF8DF-361B-9A96-0C60-56F28E2DFD16}"/>
+              </a:ext>
+            </a:extLst>
+          </p:cNvPr>
+          <p:cNvSpPr/>
+          <p:nvPr/>
+        </p:nvSpPr>
+        <p:spPr>
+          <a:xfrm>
+            <a:off x="502920" y="1124712"/>
+            <a:ext cx="2148840" cy="0"/>
+          </a:xfrm>
+          <a:prstGeom prst="line">
+            <a:avLst/>
+          </a:prstGeom>
+          <a:noFill/>
+          <a:ln w="38100">
+            <a:solidFill>
+              <a:srgbClr val="E20044"/>
+            </a:solidFill>
+            <a:prstDash val="solid"/>
+          </a:ln>
+        </p:spPr>
+        <p:txBody>
+          <a:bodyPr/>
+          <a:lstStyle/>
+          <a:p>
+            <a:endParaRPr/>
+          </a:p>
+        </p:txBody>
+      </p:sp>
     </p:spTree>
   </p:cSld>
   <p:clrMapOvr>
@@ -7258,29 +9580,6 @@
           </a:p>
         </p:txBody>
       </p:sp>
-      <p:sp>
-        <p:nvSpPr>
-          <p:cNvPr id="4" name="Shape 2"/>
-          <p:cNvSpPr/>
-          <p:nvPr/>
-        </p:nvSpPr>
-        <p:spPr>
-          <a:xfrm>
-            <a:off x="502920" y="1060704"/>
-            <a:ext cx="11155680" cy="0"/>
-          </a:xfrm>
-          <a:prstGeom prst="line">
-            <a:avLst/>
-          </a:prstGeom>
-          <a:noFill/>
-          <a:ln w="12700">
-            <a:solidFill>
-              <a:srgbClr val="DCE4EA"/>
-            </a:solidFill>
-            <a:prstDash val="solid"/>
-          </a:ln>
-        </p:spPr>
-      </p:sp>
       <p:pic>
         <p:nvPicPr>
           <p:cNvPr id="5" name="Image 0" descr="/mnt/data/assets_spdp/logo_icon.png"/>
@@ -7407,7 +9706,7 @@
         </p:nvSpPr>
         <p:spPr>
           <a:xfrm>
-            <a:off x="685800" y="1234440"/>
+            <a:off x="777240" y="1540764"/>
             <a:ext cx="3749040" cy="4343400"/>
           </a:xfrm>
           <a:prstGeom prst="roundRect">
@@ -7441,7 +9740,7 @@
         </p:nvSpPr>
         <p:spPr>
           <a:xfrm>
-            <a:off x="960120" y="1508760"/>
+            <a:off x="1051560" y="1815084"/>
             <a:ext cx="2103120" cy="274320"/>
           </a:xfrm>
           <a:prstGeom prst="rect">
@@ -7477,7 +9776,7 @@
         </p:nvSpPr>
         <p:spPr>
           <a:xfrm>
-            <a:off x="960120" y="1965960"/>
+            <a:off x="1051560" y="2272284"/>
             <a:ext cx="3063240" cy="1645920"/>
           </a:xfrm>
           <a:prstGeom prst="rect">
@@ -7591,7 +9890,7 @@
         </p:nvSpPr>
         <p:spPr>
           <a:xfrm>
-            <a:off x="960120" y="4160520"/>
+            <a:off x="1051560" y="4466844"/>
             <a:ext cx="2651760" cy="320040"/>
           </a:xfrm>
           <a:prstGeom prst="roundRect">
@@ -7620,7 +9919,7 @@
         </p:nvSpPr>
         <p:spPr>
           <a:xfrm>
-            <a:off x="1033272" y="4197096"/>
+            <a:off x="1124712" y="4503420"/>
             <a:ext cx="2505456" cy="246888"/>
           </a:xfrm>
           <a:prstGeom prst="rect">
@@ -7656,7 +9955,7 @@
         </p:nvSpPr>
         <p:spPr>
           <a:xfrm>
-            <a:off x="4800600" y="1234440"/>
+            <a:off x="4892040" y="1540764"/>
             <a:ext cx="6309360" cy="4343400"/>
           </a:xfrm>
           <a:prstGeom prst="roundRect">
@@ -7690,7 +9989,7 @@
         </p:nvSpPr>
         <p:spPr>
           <a:xfrm>
-            <a:off x="5074920" y="1627632"/>
+            <a:off x="5166360" y="1933956"/>
             <a:ext cx="1874520" cy="347472"/>
           </a:xfrm>
           <a:prstGeom prst="rect">
@@ -7715,7 +10014,7 @@
         </p:nvSpPr>
         <p:spPr>
           <a:xfrm>
-            <a:off x="5148072" y="1691640"/>
+            <a:off x="5239512" y="1997964"/>
             <a:ext cx="1728216" cy="274320"/>
           </a:xfrm>
           <a:prstGeom prst="rect">
@@ -7753,7 +10052,7 @@
         </p:nvSpPr>
         <p:spPr>
           <a:xfrm>
-            <a:off x="6949440" y="1627632"/>
+            <a:off x="7040880" y="1933956"/>
             <a:ext cx="1508760" cy="347472"/>
           </a:xfrm>
           <a:prstGeom prst="rect">
@@ -7778,7 +10077,7 @@
         </p:nvSpPr>
         <p:spPr>
           <a:xfrm>
-            <a:off x="7022592" y="1691640"/>
+            <a:off x="7114032" y="1997964"/>
             <a:ext cx="1362456" cy="274320"/>
           </a:xfrm>
           <a:prstGeom prst="rect">
@@ -7816,7 +10115,7 @@
         </p:nvSpPr>
         <p:spPr>
           <a:xfrm>
-            <a:off x="8458200" y="1627632"/>
+            <a:off x="8549640" y="1933956"/>
             <a:ext cx="1051560" cy="347472"/>
           </a:xfrm>
           <a:prstGeom prst="rect">
@@ -7841,7 +10140,7 @@
         </p:nvSpPr>
         <p:spPr>
           <a:xfrm>
-            <a:off x="8531352" y="1691640"/>
+            <a:off x="8622792" y="1997964"/>
             <a:ext cx="905256" cy="274320"/>
           </a:xfrm>
           <a:prstGeom prst="rect">
@@ -7879,7 +10178,7 @@
         </p:nvSpPr>
         <p:spPr>
           <a:xfrm>
-            <a:off x="9509760" y="1627632"/>
+            <a:off x="9601200" y="1933956"/>
             <a:ext cx="1051560" cy="347472"/>
           </a:xfrm>
           <a:prstGeom prst="rect">
@@ -7904,7 +10203,7 @@
         </p:nvSpPr>
         <p:spPr>
           <a:xfrm>
-            <a:off x="9582912" y="1691640"/>
+            <a:off x="9674352" y="1997964"/>
             <a:ext cx="905256" cy="274320"/>
           </a:xfrm>
           <a:prstGeom prst="rect">
@@ -7942,7 +10241,7 @@
         </p:nvSpPr>
         <p:spPr>
           <a:xfrm>
-            <a:off x="5074920" y="1975104"/>
+            <a:off x="5166360" y="2281428"/>
             <a:ext cx="1874520" cy="347472"/>
           </a:xfrm>
           <a:prstGeom prst="rect">
@@ -7967,7 +10266,7 @@
         </p:nvSpPr>
         <p:spPr>
           <a:xfrm>
-            <a:off x="5148072" y="2039112"/>
+            <a:off x="5239512" y="2345436"/>
             <a:ext cx="1728216" cy="274320"/>
           </a:xfrm>
           <a:prstGeom prst="rect">
@@ -8013,7 +10312,7 @@
         </p:nvSpPr>
         <p:spPr>
           <a:xfrm>
-            <a:off x="6949440" y="1975104"/>
+            <a:off x="7040880" y="2281428"/>
             <a:ext cx="1508760" cy="347472"/>
           </a:xfrm>
           <a:prstGeom prst="rect">
@@ -8038,7 +10337,7 @@
         </p:nvSpPr>
         <p:spPr>
           <a:xfrm>
-            <a:off x="7022592" y="2039112"/>
+            <a:off x="7114032" y="2345436"/>
             <a:ext cx="1362456" cy="274320"/>
           </a:xfrm>
           <a:prstGeom prst="rect">
@@ -8076,7 +10375,7 @@
         </p:nvSpPr>
         <p:spPr>
           <a:xfrm>
-            <a:off x="8458200" y="1975104"/>
+            <a:off x="8549640" y="2281428"/>
             <a:ext cx="1051560" cy="347472"/>
           </a:xfrm>
           <a:prstGeom prst="rect">
@@ -8108,7 +10407,7 @@
         </p:nvSpPr>
         <p:spPr>
           <a:xfrm>
-            <a:off x="8531352" y="2039112"/>
+            <a:off x="8622792" y="2345436"/>
             <a:ext cx="905256" cy="274320"/>
           </a:xfrm>
           <a:prstGeom prst="rect">
@@ -8146,7 +10445,7 @@
         </p:nvSpPr>
         <p:spPr>
           <a:xfrm>
-            <a:off x="9509760" y="1975104"/>
+            <a:off x="9601200" y="2281428"/>
             <a:ext cx="1051560" cy="347472"/>
           </a:xfrm>
           <a:prstGeom prst="rect">
@@ -8171,7 +10470,7 @@
         </p:nvSpPr>
         <p:spPr>
           <a:xfrm>
-            <a:off x="9582912" y="2039112"/>
+            <a:off x="9674352" y="2345436"/>
             <a:ext cx="905256" cy="274320"/>
           </a:xfrm>
           <a:prstGeom prst="rect">
@@ -8209,7 +10508,7 @@
         </p:nvSpPr>
         <p:spPr>
           <a:xfrm>
-            <a:off x="5074920" y="2322576"/>
+            <a:off x="5166360" y="2628900"/>
             <a:ext cx="1874520" cy="347472"/>
           </a:xfrm>
           <a:prstGeom prst="rect">
@@ -8249,7 +10548,7 @@
         </p:nvSpPr>
         <p:spPr>
           <a:xfrm>
-            <a:off x="5148072" y="2386584"/>
+            <a:off x="5239512" y="2692908"/>
             <a:ext cx="1728216" cy="274320"/>
           </a:xfrm>
           <a:prstGeom prst="rect">
@@ -8276,7 +10575,7 @@
         </p:nvSpPr>
         <p:spPr>
           <a:xfrm>
-            <a:off x="6949440" y="2322576"/>
+            <a:off x="7040880" y="2628900"/>
             <a:ext cx="1508760" cy="347472"/>
           </a:xfrm>
           <a:prstGeom prst="rect">
@@ -8301,7 +10600,7 @@
         </p:nvSpPr>
         <p:spPr>
           <a:xfrm>
-            <a:off x="7022592" y="2386584"/>
+            <a:off x="7114032" y="2692908"/>
             <a:ext cx="1362456" cy="274320"/>
           </a:xfrm>
           <a:prstGeom prst="rect">
@@ -8339,7 +10638,7 @@
         </p:nvSpPr>
         <p:spPr>
           <a:xfrm>
-            <a:off x="8458200" y="2322576"/>
+            <a:off x="8549640" y="2628900"/>
             <a:ext cx="1051560" cy="347472"/>
           </a:xfrm>
           <a:prstGeom prst="rect">
@@ -8364,7 +10663,7 @@
         </p:nvSpPr>
         <p:spPr>
           <a:xfrm>
-            <a:off x="8531352" y="2386584"/>
+            <a:off x="8622792" y="2692908"/>
             <a:ext cx="905256" cy="274320"/>
           </a:xfrm>
           <a:prstGeom prst="rect">
@@ -8402,7 +10701,7 @@
         </p:nvSpPr>
         <p:spPr>
           <a:xfrm>
-            <a:off x="9509760" y="2322576"/>
+            <a:off x="9601200" y="2628900"/>
             <a:ext cx="1051560" cy="347472"/>
           </a:xfrm>
           <a:prstGeom prst="rect">
@@ -8427,7 +10726,7 @@
         </p:nvSpPr>
         <p:spPr>
           <a:xfrm>
-            <a:off x="9582912" y="2386584"/>
+            <a:off x="9674352" y="2692908"/>
             <a:ext cx="905256" cy="274320"/>
           </a:xfrm>
           <a:prstGeom prst="rect">
@@ -8465,7 +10764,7 @@
         </p:nvSpPr>
         <p:spPr>
           <a:xfrm>
-            <a:off x="5074920" y="2670048"/>
+            <a:off x="5166360" y="2976372"/>
             <a:ext cx="1874520" cy="347472"/>
           </a:xfrm>
           <a:prstGeom prst="rect">
@@ -8490,7 +10789,7 @@
         </p:nvSpPr>
         <p:spPr>
           <a:xfrm>
-            <a:off x="5148072" y="2734056"/>
+            <a:off x="5239512" y="3040380"/>
             <a:ext cx="1728216" cy="274320"/>
           </a:xfrm>
           <a:prstGeom prst="rect">
@@ -8528,7 +10827,7 @@
         </p:nvSpPr>
         <p:spPr>
           <a:xfrm>
-            <a:off x="6949440" y="2670048"/>
+            <a:off x="7040880" y="2976372"/>
             <a:ext cx="1508760" cy="347472"/>
           </a:xfrm>
           <a:prstGeom prst="rect">
@@ -8553,7 +10852,7 @@
         </p:nvSpPr>
         <p:spPr>
           <a:xfrm>
-            <a:off x="7022592" y="2734056"/>
+            <a:off x="7114032" y="3040380"/>
             <a:ext cx="1362456" cy="274320"/>
           </a:xfrm>
           <a:prstGeom prst="rect">
@@ -8591,7 +10890,7 @@
         </p:nvSpPr>
         <p:spPr>
           <a:xfrm>
-            <a:off x="8458200" y="2670048"/>
+            <a:off x="8549640" y="2976372"/>
             <a:ext cx="1051560" cy="347472"/>
           </a:xfrm>
           <a:prstGeom prst="rect">
@@ -8623,7 +10922,7 @@
         </p:nvSpPr>
         <p:spPr>
           <a:xfrm>
-            <a:off x="8531352" y="2734056"/>
+            <a:off x="8622792" y="3040380"/>
             <a:ext cx="905256" cy="274320"/>
           </a:xfrm>
           <a:prstGeom prst="rect">
@@ -8661,7 +10960,7 @@
         </p:nvSpPr>
         <p:spPr>
           <a:xfrm>
-            <a:off x="9509760" y="2670048"/>
+            <a:off x="9601200" y="2976372"/>
             <a:ext cx="1051560" cy="347472"/>
           </a:xfrm>
           <a:prstGeom prst="rect">
@@ -8686,7 +10985,7 @@
         </p:nvSpPr>
         <p:spPr>
           <a:xfrm>
-            <a:off x="9582912" y="2734056"/>
+            <a:off x="9674352" y="3040380"/>
             <a:ext cx="905256" cy="274320"/>
           </a:xfrm>
           <a:prstGeom prst="rect">
@@ -8724,7 +11023,7 @@
         </p:nvSpPr>
         <p:spPr>
           <a:xfrm>
-            <a:off x="5074920" y="3017520"/>
+            <a:off x="5166360" y="3323844"/>
             <a:ext cx="1874520" cy="347472"/>
           </a:xfrm>
           <a:prstGeom prst="rect">
@@ -8749,7 +11048,7 @@
         </p:nvSpPr>
         <p:spPr>
           <a:xfrm>
-            <a:off x="5148072" y="3081528"/>
+            <a:off x="5239512" y="3387852"/>
             <a:ext cx="1728216" cy="274320"/>
           </a:xfrm>
           <a:prstGeom prst="rect">
@@ -8795,7 +11094,7 @@
         </p:nvSpPr>
         <p:spPr>
           <a:xfrm>
-            <a:off x="6949440" y="3017520"/>
+            <a:off x="7040880" y="3323844"/>
             <a:ext cx="1508760" cy="347472"/>
           </a:xfrm>
           <a:prstGeom prst="rect">
@@ -8820,7 +11119,7 @@
         </p:nvSpPr>
         <p:spPr>
           <a:xfrm>
-            <a:off x="7022592" y="3081528"/>
+            <a:off x="7114032" y="3387852"/>
             <a:ext cx="1362456" cy="274320"/>
           </a:xfrm>
           <a:prstGeom prst="rect">
@@ -8858,7 +11157,7 @@
         </p:nvSpPr>
         <p:spPr>
           <a:xfrm>
-            <a:off x="8458200" y="3017520"/>
+            <a:off x="8549640" y="3323844"/>
             <a:ext cx="1051560" cy="347472"/>
           </a:xfrm>
           <a:prstGeom prst="rect">
@@ -8883,7 +11182,7 @@
         </p:nvSpPr>
         <p:spPr>
           <a:xfrm>
-            <a:off x="8531352" y="3081528"/>
+            <a:off x="8622792" y="3387852"/>
             <a:ext cx="905256" cy="274320"/>
           </a:xfrm>
           <a:prstGeom prst="rect">
@@ -8921,7 +11220,7 @@
         </p:nvSpPr>
         <p:spPr>
           <a:xfrm>
-            <a:off x="9509760" y="3017520"/>
+            <a:off x="9601200" y="3323844"/>
             <a:ext cx="1051560" cy="347472"/>
           </a:xfrm>
           <a:prstGeom prst="rect">
@@ -8946,7 +11245,7 @@
         </p:nvSpPr>
         <p:spPr>
           <a:xfrm>
-            <a:off x="9582912" y="3081528"/>
+            <a:off x="9674352" y="3387852"/>
             <a:ext cx="905256" cy="274320"/>
           </a:xfrm>
           <a:prstGeom prst="rect">
@@ -8984,7 +11283,7 @@
         </p:nvSpPr>
         <p:spPr>
           <a:xfrm>
-            <a:off x="5074920" y="3364992"/>
+            <a:off x="5166360" y="3671316"/>
             <a:ext cx="1874520" cy="347472"/>
           </a:xfrm>
           <a:prstGeom prst="rect">
@@ -9009,7 +11308,7 @@
         </p:nvSpPr>
         <p:spPr>
           <a:xfrm>
-            <a:off x="5148072" y="3429000"/>
+            <a:off x="5239512" y="3735324"/>
             <a:ext cx="1728216" cy="274320"/>
           </a:xfrm>
           <a:prstGeom prst="rect">
@@ -9055,7 +11354,7 @@
         </p:nvSpPr>
         <p:spPr>
           <a:xfrm>
-            <a:off x="6949440" y="3364992"/>
+            <a:off x="7040880" y="3671316"/>
             <a:ext cx="1508760" cy="347472"/>
           </a:xfrm>
           <a:prstGeom prst="rect">
@@ -9080,7 +11379,7 @@
         </p:nvSpPr>
         <p:spPr>
           <a:xfrm>
-            <a:off x="7022592" y="3429000"/>
+            <a:off x="7114032" y="3735324"/>
             <a:ext cx="1362456" cy="274320"/>
           </a:xfrm>
           <a:prstGeom prst="rect">
@@ -9118,7 +11417,7 @@
         </p:nvSpPr>
         <p:spPr>
           <a:xfrm>
-            <a:off x="8458200" y="3364992"/>
+            <a:off x="8549640" y="3671316"/>
             <a:ext cx="1051560" cy="347472"/>
           </a:xfrm>
           <a:prstGeom prst="rect">
@@ -9143,7 +11442,7 @@
         </p:nvSpPr>
         <p:spPr>
           <a:xfrm>
-            <a:off x="8531352" y="3429000"/>
+            <a:off x="8622792" y="3735324"/>
             <a:ext cx="905256" cy="274320"/>
           </a:xfrm>
           <a:prstGeom prst="rect">
@@ -9181,7 +11480,7 @@
         </p:nvSpPr>
         <p:spPr>
           <a:xfrm>
-            <a:off x="9509760" y="3364992"/>
+            <a:off x="9601200" y="3671316"/>
             <a:ext cx="1051560" cy="347472"/>
           </a:xfrm>
           <a:prstGeom prst="rect">
@@ -9206,7 +11505,7 @@
         </p:nvSpPr>
         <p:spPr>
           <a:xfrm>
-            <a:off x="9582912" y="3429000"/>
+            <a:off x="9674352" y="3735324"/>
             <a:ext cx="905256" cy="274320"/>
           </a:xfrm>
           <a:prstGeom prst="rect">
@@ -9244,7 +11543,7 @@
         </p:nvSpPr>
         <p:spPr>
           <a:xfrm>
-            <a:off x="5074920" y="4160520"/>
+            <a:off x="5166360" y="4466844"/>
             <a:ext cx="5394960" cy="457200"/>
           </a:xfrm>
           <a:prstGeom prst="rect">
@@ -9263,14 +11562,58 @@
               <a:buNone/>
             </a:pPr>
             <a:r>
+              <a:rPr lang="en-US" sz="1230" b="1" dirty="0" err="1">
+                <a:solidFill>
+                  <a:srgbClr val="2E7D32"/>
+                </a:solidFill>
+              </a:rPr>
+              <a:t>Cette</a:t>
+            </a:r>
+            <a:r>
               <a:rPr lang="en-US" sz="1230" b="1" dirty="0">
                 <a:solidFill>
                   <a:srgbClr val="2E7D32"/>
                 </a:solidFill>
               </a:rPr>
-              <a:t>Message staff : cette shortlist n’est pas une décision finale, mais une liste priorisée à challenger par scouting vidéo et faisabilité contractuelle.</a:t>
+              <a:t> shortlist n’est pas une décision finale, mais une liste priorisée à challenger par scouting vidéo et faisabilité contractuelle.</a:t>
             </a:r>
             <a:endParaRPr lang="en-US" sz="1230" dirty="0"/>
+          </a:p>
+        </p:txBody>
+      </p:sp>
+      <p:sp>
+        <p:nvSpPr>
+          <p:cNvPr id="64" name="Shape 2">
+            <a:extLst>
+              <a:ext uri="{FF2B5EF4-FFF2-40B4-BE49-F238E27FC236}">
+                <a16:creationId xmlns:a16="http://schemas.microsoft.com/office/drawing/2014/main" id="{EE3102DE-5A80-9286-0B85-86C49089114F}"/>
+              </a:ext>
+            </a:extLst>
+          </p:cNvPr>
+          <p:cNvSpPr/>
+          <p:nvPr/>
+        </p:nvSpPr>
+        <p:spPr>
+          <a:xfrm>
+            <a:off x="502920" y="1124712"/>
+            <a:ext cx="2148840" cy="0"/>
+          </a:xfrm>
+          <a:prstGeom prst="line">
+            <a:avLst/>
+          </a:prstGeom>
+          <a:noFill/>
+          <a:ln w="38100">
+            <a:solidFill>
+              <a:srgbClr val="E20044"/>
+            </a:solidFill>
+            <a:prstDash val="solid"/>
+          </a:ln>
+        </p:spPr>
+        <p:txBody>
+          <a:bodyPr/>
+          <a:lstStyle/>
+          <a:p>
+            <a:endParaRPr/>
           </a:p>
         </p:txBody>
       </p:sp>
@@ -9382,29 +11725,6 @@
           </a:p>
         </p:txBody>
       </p:sp>
-      <p:sp>
-        <p:nvSpPr>
-          <p:cNvPr id="4" name="Shape 2"/>
-          <p:cNvSpPr/>
-          <p:nvPr/>
-        </p:nvSpPr>
-        <p:spPr>
-          <a:xfrm>
-            <a:off x="502920" y="1060704"/>
-            <a:ext cx="11155680" cy="0"/>
-          </a:xfrm>
-          <a:prstGeom prst="line">
-            <a:avLst/>
-          </a:prstGeom>
-          <a:noFill/>
-          <a:ln w="12700">
-            <a:solidFill>
-              <a:srgbClr val="DCE4EA"/>
-            </a:solidFill>
-            <a:prstDash val="solid"/>
-          </a:ln>
-        </p:spPr>
-      </p:sp>
       <p:pic>
         <p:nvPicPr>
           <p:cNvPr id="5" name="Image 0" descr="/mnt/data/assets_spdp/logo_icon.png"/>
@@ -10060,6 +12380,42 @@
               <a:t>Contrôles après import et documentation du dictionnaire.</a:t>
             </a:r>
             <a:endParaRPr lang="en-US" sz="1120" dirty="0"/>
+          </a:p>
+        </p:txBody>
+      </p:sp>
+      <p:sp>
+        <p:nvSpPr>
+          <p:cNvPr id="24" name="Shape 2">
+            <a:extLst>
+              <a:ext uri="{FF2B5EF4-FFF2-40B4-BE49-F238E27FC236}">
+                <a16:creationId xmlns:a16="http://schemas.microsoft.com/office/drawing/2014/main" id="{86154059-F7A3-144F-A873-3A9F7091A23A}"/>
+              </a:ext>
+            </a:extLst>
+          </p:cNvPr>
+          <p:cNvSpPr/>
+          <p:nvPr/>
+        </p:nvSpPr>
+        <p:spPr>
+          <a:xfrm>
+            <a:off x="502920" y="1124712"/>
+            <a:ext cx="2148840" cy="0"/>
+          </a:xfrm>
+          <a:prstGeom prst="line">
+            <a:avLst/>
+          </a:prstGeom>
+          <a:noFill/>
+          <a:ln w="38100">
+            <a:solidFill>
+              <a:srgbClr val="E20044"/>
+            </a:solidFill>
+            <a:prstDash val="solid"/>
+          </a:ln>
+        </p:spPr>
+        <p:txBody>
+          <a:bodyPr/>
+          <a:lstStyle/>
+          <a:p>
+            <a:endParaRPr/>
           </a:p>
         </p:txBody>
       </p:sp>
@@ -10171,29 +12527,6 @@
           </a:p>
         </p:txBody>
       </p:sp>
-      <p:sp>
-        <p:nvSpPr>
-          <p:cNvPr id="4" name="Shape 2"/>
-          <p:cNvSpPr/>
-          <p:nvPr/>
-        </p:nvSpPr>
-        <p:spPr>
-          <a:xfrm>
-            <a:off x="502920" y="1060704"/>
-            <a:ext cx="11155680" cy="0"/>
-          </a:xfrm>
-          <a:prstGeom prst="line">
-            <a:avLst/>
-          </a:prstGeom>
-          <a:noFill/>
-          <a:ln w="12700">
-            <a:solidFill>
-              <a:srgbClr val="DCE4EA"/>
-            </a:solidFill>
-            <a:prstDash val="solid"/>
-          </a:ln>
-        </p:spPr>
-      </p:sp>
       <p:pic>
         <p:nvPicPr>
           <p:cNvPr id="5" name="Image 0" descr="/mnt/data/assets_spdp/logo_icon.png"/>
@@ -10320,7 +12653,7 @@
         </p:nvSpPr>
         <p:spPr>
           <a:xfrm>
-            <a:off x="731520" y="1234440"/>
+            <a:off x="613533" y="1581911"/>
             <a:ext cx="5120640" cy="4114800"/>
           </a:xfrm>
           <a:prstGeom prst="roundRect">
@@ -10354,7 +12687,7 @@
         </p:nvSpPr>
         <p:spPr>
           <a:xfrm>
-            <a:off x="1005840" y="1517904"/>
+            <a:off x="887853" y="1865375"/>
             <a:ext cx="3383280" cy="274320"/>
           </a:xfrm>
           <a:prstGeom prst="rect">
@@ -10390,7 +12723,7 @@
         </p:nvSpPr>
         <p:spPr>
           <a:xfrm>
-            <a:off x="987552" y="2011680"/>
+            <a:off x="869565" y="2359151"/>
             <a:ext cx="256032" cy="256032"/>
           </a:xfrm>
           <a:prstGeom prst="ellipse">
@@ -10415,7 +12748,7 @@
         </p:nvSpPr>
         <p:spPr>
           <a:xfrm>
-            <a:off x="1353312" y="1993392"/>
+            <a:off x="1235325" y="2340863"/>
             <a:ext cx="3657600" cy="292608"/>
           </a:xfrm>
           <a:prstGeom prst="rect">
@@ -10451,7 +12784,7 @@
         </p:nvSpPr>
         <p:spPr>
           <a:xfrm>
-            <a:off x="987552" y="2514600"/>
+            <a:off x="869565" y="2862071"/>
             <a:ext cx="256032" cy="256032"/>
           </a:xfrm>
           <a:prstGeom prst="ellipse">
@@ -10476,7 +12809,7 @@
         </p:nvSpPr>
         <p:spPr>
           <a:xfrm>
-            <a:off x="1353312" y="2496312"/>
+            <a:off x="1235325" y="2843783"/>
             <a:ext cx="3657600" cy="292608"/>
           </a:xfrm>
           <a:prstGeom prst="rect">
@@ -10512,7 +12845,7 @@
         </p:nvSpPr>
         <p:spPr>
           <a:xfrm>
-            <a:off x="987552" y="3017520"/>
+            <a:off x="869565" y="3364991"/>
             <a:ext cx="256032" cy="256032"/>
           </a:xfrm>
           <a:prstGeom prst="ellipse">
@@ -10537,7 +12870,7 @@
         </p:nvSpPr>
         <p:spPr>
           <a:xfrm>
-            <a:off x="1353312" y="2999232"/>
+            <a:off x="1235325" y="3346703"/>
             <a:ext cx="3657600" cy="292608"/>
           </a:xfrm>
           <a:prstGeom prst="rect">
@@ -10573,7 +12906,7 @@
         </p:nvSpPr>
         <p:spPr>
           <a:xfrm>
-            <a:off x="987552" y="3520440"/>
+            <a:off x="869565" y="3867911"/>
             <a:ext cx="256032" cy="256032"/>
           </a:xfrm>
           <a:prstGeom prst="ellipse">
@@ -10598,7 +12931,7 @@
         </p:nvSpPr>
         <p:spPr>
           <a:xfrm>
-            <a:off x="1353312" y="3502152"/>
+            <a:off x="1235325" y="3849623"/>
             <a:ext cx="3657600" cy="292608"/>
           </a:xfrm>
           <a:prstGeom prst="rect">
@@ -10634,7 +12967,7 @@
         </p:nvSpPr>
         <p:spPr>
           <a:xfrm>
-            <a:off x="987552" y="4023360"/>
+            <a:off x="869565" y="4370831"/>
             <a:ext cx="256032" cy="256032"/>
           </a:xfrm>
           <a:prstGeom prst="ellipse">
@@ -10659,7 +12992,7 @@
         </p:nvSpPr>
         <p:spPr>
           <a:xfrm>
-            <a:off x="1353312" y="4005072"/>
+            <a:off x="1235325" y="4352543"/>
             <a:ext cx="3657600" cy="292608"/>
           </a:xfrm>
           <a:prstGeom prst="rect">
@@ -10695,7 +13028,7 @@
         </p:nvSpPr>
         <p:spPr>
           <a:xfrm>
-            <a:off x="6263640" y="1234440"/>
+            <a:off x="6145653" y="1581911"/>
             <a:ext cx="5120640" cy="4114800"/>
           </a:xfrm>
           <a:prstGeom prst="roundRect">
@@ -10729,7 +13062,7 @@
         </p:nvSpPr>
         <p:spPr>
           <a:xfrm>
-            <a:off x="6583680" y="1572768"/>
+            <a:off x="6465693" y="1920239"/>
             <a:ext cx="2103120" cy="320040"/>
           </a:xfrm>
           <a:prstGeom prst="rect">
@@ -10765,7 +13098,7 @@
         </p:nvSpPr>
         <p:spPr>
           <a:xfrm>
-            <a:off x="6583680" y="2057400"/>
+            <a:off x="6465693" y="2404871"/>
             <a:ext cx="4251960" cy="1737360"/>
           </a:xfrm>
           <a:prstGeom prst="rect">
@@ -10845,7 +13178,7 @@
         </p:nvSpPr>
         <p:spPr>
           <a:xfrm>
-            <a:off x="6583680" y="4160520"/>
+            <a:off x="6465693" y="4507991"/>
             <a:ext cx="3977640" cy="0"/>
           </a:xfrm>
           <a:prstGeom prst="line">
@@ -10870,7 +13203,7 @@
         </p:nvSpPr>
         <p:spPr>
           <a:xfrm>
-            <a:off x="6583680" y="4407408"/>
+            <a:off x="6465693" y="4754879"/>
             <a:ext cx="4160520" cy="411480"/>
           </a:xfrm>
           <a:prstGeom prst="rect">
@@ -10897,6 +13230,42 @@
               <a:t>La donnée ne remplace pas le jugement sportif : elle le rend plus objectif et mieux argumenté.</a:t>
             </a:r>
             <a:endParaRPr lang="en-US" sz="1300" dirty="0"/>
+          </a:p>
+        </p:txBody>
+      </p:sp>
+      <p:sp>
+        <p:nvSpPr>
+          <p:cNvPr id="26" name="Shape 2">
+            <a:extLst>
+              <a:ext uri="{FF2B5EF4-FFF2-40B4-BE49-F238E27FC236}">
+                <a16:creationId xmlns:a16="http://schemas.microsoft.com/office/drawing/2014/main" id="{CC2F7A5F-31A6-4DD8-A832-2F621E70D9AF}"/>
+              </a:ext>
+            </a:extLst>
+          </p:cNvPr>
+          <p:cNvSpPr/>
+          <p:nvPr/>
+        </p:nvSpPr>
+        <p:spPr>
+          <a:xfrm>
+            <a:off x="502920" y="1124712"/>
+            <a:ext cx="2148840" cy="0"/>
+          </a:xfrm>
+          <a:prstGeom prst="line">
+            <a:avLst/>
+          </a:prstGeom>
+          <a:noFill/>
+          <a:ln w="38100">
+            <a:solidFill>
+              <a:srgbClr val="E20044"/>
+            </a:solidFill>
+            <a:prstDash val="solid"/>
+          </a:ln>
+        </p:spPr>
+        <p:txBody>
+          <a:bodyPr/>
+          <a:lstStyle/>
+          <a:p>
+            <a:endParaRPr/>
           </a:p>
         </p:txBody>
       </p:sp>
@@ -11431,7 +13800,7 @@
         <p:spPr>
           <a:xfrm>
             <a:off x="640080" y="2514600"/>
-            <a:ext cx="5029200" cy="2423160"/>
+            <a:ext cx="5455920" cy="2423160"/>
           </a:xfrm>
           <a:prstGeom prst="roundRect">
             <a:avLst>
@@ -11488,7 +13857,11 @@
               </a:rPr>
               <a:t>Mission</a:t>
             </a:r>
-            <a:endParaRPr lang="en-US" sz="1200" dirty="0"/>
+            <a:endParaRPr lang="en-US" sz="1200" dirty="0">
+              <a:solidFill>
+                <a:srgbClr val="E20044"/>
+              </a:solidFill>
+            </a:endParaRPr>
           </a:p>
         </p:txBody>
       </p:sp>
@@ -11501,7 +13874,7 @@
         <p:spPr>
           <a:xfrm>
             <a:off x="868680" y="3063239"/>
-            <a:ext cx="4526280" cy="1732695"/>
+            <a:ext cx="5081744" cy="1732695"/>
           </a:xfrm>
           <a:prstGeom prst="rect">
             <a:avLst/>
@@ -11637,12 +14010,16 @@
             <a:r>
               <a:rPr lang="en-US" sz="1700" b="1" dirty="0">
                 <a:solidFill>
-                  <a:srgbClr val="17252A"/>
+                  <a:srgbClr val="E20044"/>
                 </a:solidFill>
               </a:rPr>
               <a:t>Valeur ajoutée BI</a:t>
             </a:r>
-            <a:endParaRPr lang="en-US" sz="1700" dirty="0"/>
+            <a:endParaRPr lang="en-US" sz="1700" dirty="0">
+              <a:solidFill>
+                <a:srgbClr val="E20044"/>
+              </a:solidFill>
+            </a:endParaRPr>
           </a:p>
         </p:txBody>
       </p:sp>
@@ -14544,8 +16921,8 @@
         </p:nvSpPr>
         <p:spPr>
           <a:xfrm>
-            <a:off x="609600" y="1408177"/>
-            <a:ext cx="10896600" cy="1677384"/>
+            <a:off x="502920" y="1447504"/>
+            <a:ext cx="11003280" cy="1875797"/>
           </a:xfrm>
           <a:prstGeom prst="roundRect">
             <a:avLst>
@@ -14578,7 +16955,7 @@
         </p:nvSpPr>
         <p:spPr>
           <a:xfrm>
-            <a:off x="502920" y="3199136"/>
+            <a:off x="502920" y="3387308"/>
             <a:ext cx="3139441" cy="164592"/>
           </a:xfrm>
           <a:prstGeom prst="rect">
@@ -14614,8 +16991,8 @@
         </p:nvSpPr>
         <p:spPr>
           <a:xfrm>
-            <a:off x="3693980" y="3530077"/>
-            <a:ext cx="4480560" cy="2568970"/>
+            <a:off x="6985820" y="3646092"/>
+            <a:ext cx="4480560" cy="2364261"/>
           </a:xfrm>
           <a:prstGeom prst="roundRect">
             <a:avLst>
@@ -14648,7 +17025,7 @@
         </p:nvSpPr>
         <p:spPr>
           <a:xfrm>
-            <a:off x="3968300" y="3630168"/>
+            <a:off x="7260140" y="3718245"/>
             <a:ext cx="3291840" cy="274320"/>
           </a:xfrm>
           <a:prstGeom prst="rect">
@@ -14684,7 +17061,7 @@
         </p:nvSpPr>
         <p:spPr>
           <a:xfrm>
-            <a:off x="3968300" y="4087368"/>
+            <a:off x="7260140" y="3998675"/>
             <a:ext cx="3840480" cy="1600200"/>
           </a:xfrm>
           <a:prstGeom prst="rect">
@@ -14764,7 +17141,7 @@
         </p:nvSpPr>
         <p:spPr>
           <a:xfrm>
-            <a:off x="3968300" y="5733288"/>
+            <a:off x="7260140" y="5644595"/>
             <a:ext cx="1170432" cy="292608"/>
           </a:xfrm>
           <a:prstGeom prst="roundRect">
@@ -14793,7 +17170,7 @@
         </p:nvSpPr>
         <p:spPr>
           <a:xfrm>
-            <a:off x="4041452" y="5769864"/>
+            <a:off x="7333292" y="5681171"/>
             <a:ext cx="1024128" cy="219456"/>
           </a:xfrm>
           <a:prstGeom prst="rect">
@@ -14829,7 +17206,7 @@
         </p:nvSpPr>
         <p:spPr>
           <a:xfrm>
-            <a:off x="5275892" y="5733288"/>
+            <a:off x="8567732" y="5644595"/>
             <a:ext cx="960120" cy="292608"/>
           </a:xfrm>
           <a:prstGeom prst="roundRect">
@@ -14858,7 +17235,7 @@
         </p:nvSpPr>
         <p:spPr>
           <a:xfrm>
-            <a:off x="5349044" y="5769864"/>
+            <a:off x="8640884" y="5681171"/>
             <a:ext cx="813816" cy="219456"/>
           </a:xfrm>
           <a:prstGeom prst="rect">
@@ -14894,7 +17271,7 @@
         </p:nvSpPr>
         <p:spPr>
           <a:xfrm>
-            <a:off x="6373172" y="5733288"/>
+            <a:off x="9665012" y="5644595"/>
             <a:ext cx="685800" cy="292608"/>
           </a:xfrm>
           <a:prstGeom prst="roundRect">
@@ -14923,7 +17300,7 @@
         </p:nvSpPr>
         <p:spPr>
           <a:xfrm>
-            <a:off x="6446324" y="5769864"/>
+            <a:off x="9738164" y="5681171"/>
             <a:ext cx="539496" cy="219456"/>
           </a:xfrm>
           <a:prstGeom prst="rect">
@@ -14973,8 +17350,8 @@
         </p:blipFill>
         <p:spPr>
           <a:xfrm>
-            <a:off x="685800" y="1522097"/>
-            <a:ext cx="10745380" cy="1484999"/>
+            <a:off x="666136" y="1640081"/>
+            <a:ext cx="10660625" cy="1484999"/>
           </a:xfrm>
           <a:prstGeom prst="rect">
             <a:avLst/>
@@ -15701,29 +18078,6 @@
           </a:p>
         </p:txBody>
       </p:sp>
-      <p:sp>
-        <p:nvSpPr>
-          <p:cNvPr id="4" name="Shape 2"/>
-          <p:cNvSpPr/>
-          <p:nvPr/>
-        </p:nvSpPr>
-        <p:spPr>
-          <a:xfrm>
-            <a:off x="502920" y="1060704"/>
-            <a:ext cx="11155680" cy="0"/>
-          </a:xfrm>
-          <a:prstGeom prst="line">
-            <a:avLst/>
-          </a:prstGeom>
-          <a:noFill/>
-          <a:ln w="12700">
-            <a:solidFill>
-              <a:srgbClr val="DCE4EA"/>
-            </a:solidFill>
-            <a:prstDash val="solid"/>
-          </a:ln>
-        </p:spPr>
-      </p:sp>
       <p:pic>
         <p:nvPicPr>
           <p:cNvPr id="5" name="Image 0" descr="/mnt/data/assets_spdp/logo_icon.png"/>
@@ -15850,7 +18204,7 @@
         </p:nvSpPr>
         <p:spPr>
           <a:xfrm>
-            <a:off x="685800" y="1234440"/>
+            <a:off x="685800" y="1686730"/>
             <a:ext cx="6492240" cy="4343400"/>
           </a:xfrm>
           <a:prstGeom prst="roundRect">
@@ -15884,7 +18238,7 @@
         </p:nvSpPr>
         <p:spPr>
           <a:xfrm>
-            <a:off x="960120" y="1481328"/>
+            <a:off x="960120" y="1894286"/>
             <a:ext cx="2468880" cy="237744"/>
           </a:xfrm>
           <a:prstGeom prst="rect">
@@ -15920,7 +18274,7 @@
         </p:nvSpPr>
         <p:spPr>
           <a:xfrm>
-            <a:off x="914400" y="1828800"/>
+            <a:off x="914400" y="2241758"/>
             <a:ext cx="2425958" cy="3337560"/>
           </a:xfrm>
           <a:prstGeom prst="rect">
@@ -15945,7 +18299,7 @@
         </p:nvSpPr>
         <p:spPr>
           <a:xfrm>
-            <a:off x="1111010" y="1993392"/>
+            <a:off x="1111010" y="2406350"/>
             <a:ext cx="2189227" cy="3073130"/>
           </a:xfrm>
           <a:prstGeom prst="rect">
@@ -16262,7 +18616,7 @@
         </p:nvSpPr>
         <p:spPr>
           <a:xfrm>
-            <a:off x="3685592" y="1828800"/>
+            <a:off x="3685592" y="2241758"/>
             <a:ext cx="3191070" cy="3337560"/>
           </a:xfrm>
           <a:prstGeom prst="rect">
@@ -16287,7 +18641,7 @@
         </p:nvSpPr>
         <p:spPr>
           <a:xfrm>
-            <a:off x="3757438" y="1929384"/>
+            <a:off x="3757438" y="2342342"/>
             <a:ext cx="3119224" cy="2606040"/>
           </a:xfrm>
           <a:prstGeom prst="rect">
@@ -16464,7 +18818,7 @@
         </p:nvSpPr>
         <p:spPr>
           <a:xfrm>
-            <a:off x="7635240" y="1463040"/>
+            <a:off x="7635240" y="1875998"/>
             <a:ext cx="1508760" cy="749808"/>
           </a:xfrm>
           <a:prstGeom prst="roundRect">
@@ -16491,7 +18845,7 @@
         </p:nvSpPr>
         <p:spPr>
           <a:xfrm>
-            <a:off x="7744968" y="1581912"/>
+            <a:off x="7744968" y="1994870"/>
             <a:ext cx="1289304" cy="310896"/>
           </a:xfrm>
           <a:prstGeom prst="rect">
@@ -16527,7 +18881,7 @@
         </p:nvSpPr>
         <p:spPr>
           <a:xfrm>
-            <a:off x="7744968" y="1929384"/>
+            <a:off x="7744968" y="2342342"/>
             <a:ext cx="1289304" cy="201168"/>
           </a:xfrm>
           <a:prstGeom prst="rect">
@@ -16563,7 +18917,7 @@
         </p:nvSpPr>
         <p:spPr>
           <a:xfrm>
-            <a:off x="9372600" y="1463040"/>
+            <a:off x="9372600" y="1875998"/>
             <a:ext cx="1508760" cy="749808"/>
           </a:xfrm>
           <a:prstGeom prst="roundRect">
@@ -16590,7 +18944,7 @@
         </p:nvSpPr>
         <p:spPr>
           <a:xfrm>
-            <a:off x="9482328" y="1581912"/>
+            <a:off x="9482328" y="1994870"/>
             <a:ext cx="1289304" cy="310896"/>
           </a:xfrm>
           <a:prstGeom prst="rect">
@@ -16626,7 +18980,7 @@
         </p:nvSpPr>
         <p:spPr>
           <a:xfrm>
-            <a:off x="9482328" y="1929384"/>
+            <a:off x="9482328" y="2342342"/>
             <a:ext cx="1289304" cy="201168"/>
           </a:xfrm>
           <a:prstGeom prst="rect">
@@ -16662,7 +19016,7 @@
         </p:nvSpPr>
         <p:spPr>
           <a:xfrm>
-            <a:off x="7635240" y="2514600"/>
+            <a:off x="7635240" y="2927558"/>
             <a:ext cx="1508760" cy="749808"/>
           </a:xfrm>
           <a:prstGeom prst="roundRect">
@@ -16689,7 +19043,7 @@
         </p:nvSpPr>
         <p:spPr>
           <a:xfrm>
-            <a:off x="7744968" y="2633472"/>
+            <a:off x="7744968" y="3046430"/>
             <a:ext cx="1289304" cy="310896"/>
           </a:xfrm>
           <a:prstGeom prst="rect">
@@ -16725,7 +19079,7 @@
         </p:nvSpPr>
         <p:spPr>
           <a:xfrm>
-            <a:off x="7744968" y="2980944"/>
+            <a:off x="7744968" y="3393902"/>
             <a:ext cx="1289304" cy="201168"/>
           </a:xfrm>
           <a:prstGeom prst="rect">
@@ -16761,7 +19115,7 @@
         </p:nvSpPr>
         <p:spPr>
           <a:xfrm>
-            <a:off x="9372600" y="2514600"/>
+            <a:off x="9372600" y="2927558"/>
             <a:ext cx="1508760" cy="749808"/>
           </a:xfrm>
           <a:prstGeom prst="roundRect">
@@ -16788,7 +19142,7 @@
         </p:nvSpPr>
         <p:spPr>
           <a:xfrm>
-            <a:off x="9482328" y="2633472"/>
+            <a:off x="9482328" y="3046430"/>
             <a:ext cx="1289304" cy="310896"/>
           </a:xfrm>
           <a:prstGeom prst="rect">
@@ -16824,7 +19178,7 @@
         </p:nvSpPr>
         <p:spPr>
           <a:xfrm>
-            <a:off x="9482328" y="2980944"/>
+            <a:off x="9482328" y="3393902"/>
             <a:ext cx="1289304" cy="201168"/>
           </a:xfrm>
           <a:prstGeom prst="rect">
@@ -16860,7 +19214,7 @@
         </p:nvSpPr>
         <p:spPr>
           <a:xfrm>
-            <a:off x="7635240" y="3657600"/>
+            <a:off x="7635240" y="4070558"/>
             <a:ext cx="3246120" cy="1097280"/>
           </a:xfrm>
           <a:prstGeom prst="roundRect">
@@ -16887,7 +19241,7 @@
         </p:nvSpPr>
         <p:spPr>
           <a:xfrm>
-            <a:off x="7882128" y="3950208"/>
+            <a:off x="7882128" y="4363166"/>
             <a:ext cx="2743200" cy="384048"/>
           </a:xfrm>
           <a:prstGeom prst="rect">
@@ -16939,7 +19293,7 @@
         </p:blipFill>
         <p:spPr>
           <a:xfrm>
-            <a:off x="940024" y="2427398"/>
+            <a:off x="940024" y="2840356"/>
             <a:ext cx="144000" cy="144000"/>
           </a:xfrm>
           <a:prstGeom prst="rect">
@@ -16977,7 +19331,7 @@
         </p:blipFill>
         <p:spPr>
           <a:xfrm>
-            <a:off x="1071440" y="2694791"/>
+            <a:off x="1071440" y="3107749"/>
             <a:ext cx="144000" cy="144000"/>
           </a:xfrm>
           <a:prstGeom prst="rect">
@@ -17007,7 +19361,7 @@
         </p:blipFill>
         <p:spPr>
           <a:xfrm>
-            <a:off x="1566428" y="3066674"/>
+            <a:off x="1566428" y="3479632"/>
             <a:ext cx="144000" cy="90000"/>
           </a:xfrm>
           <a:prstGeom prst="rect">
@@ -17037,7 +19391,7 @@
         </p:blipFill>
         <p:spPr>
           <a:xfrm>
-            <a:off x="1564780" y="3246464"/>
+            <a:off x="1564780" y="3659422"/>
             <a:ext cx="144000" cy="90000"/>
           </a:xfrm>
           <a:prstGeom prst="rect">
@@ -17067,7 +19421,7 @@
         </p:blipFill>
         <p:spPr>
           <a:xfrm>
-            <a:off x="1563132" y="3416729"/>
+            <a:off x="1563132" y="3829687"/>
             <a:ext cx="144000" cy="90000"/>
           </a:xfrm>
           <a:prstGeom prst="rect">
@@ -17097,7 +19451,7 @@
         </p:blipFill>
         <p:spPr>
           <a:xfrm>
-            <a:off x="1562007" y="3567944"/>
+            <a:off x="1562007" y="3980902"/>
             <a:ext cx="144000" cy="90000"/>
           </a:xfrm>
           <a:prstGeom prst="rect">
@@ -17127,7 +19481,7 @@
         </p:blipFill>
         <p:spPr>
           <a:xfrm>
-            <a:off x="1560882" y="3709634"/>
+            <a:off x="1560882" y="4122592"/>
             <a:ext cx="144000" cy="90000"/>
           </a:xfrm>
           <a:prstGeom prst="rect">
@@ -17157,7 +19511,7 @@
         </p:blipFill>
         <p:spPr>
           <a:xfrm>
-            <a:off x="1559757" y="3879899"/>
+            <a:off x="1559757" y="4292857"/>
             <a:ext cx="144000" cy="90000"/>
           </a:xfrm>
           <a:prstGeom prst="rect">
@@ -17187,7 +19541,7 @@
         </p:blipFill>
         <p:spPr>
           <a:xfrm>
-            <a:off x="1557586" y="4040639"/>
+            <a:off x="1557586" y="4453597"/>
             <a:ext cx="144000" cy="90000"/>
           </a:xfrm>
           <a:prstGeom prst="rect">
@@ -17217,7 +19571,7 @@
         </p:blipFill>
         <p:spPr>
           <a:xfrm>
-            <a:off x="1565986" y="4210904"/>
+            <a:off x="1565986" y="4623862"/>
             <a:ext cx="144000" cy="90000"/>
           </a:xfrm>
           <a:prstGeom prst="rect">
@@ -17247,7 +19601,7 @@
         </p:blipFill>
         <p:spPr>
           <a:xfrm>
-            <a:off x="1189036" y="2906622"/>
+            <a:off x="1189036" y="3319580"/>
             <a:ext cx="162000" cy="126000"/>
           </a:xfrm>
           <a:prstGeom prst="rect">
@@ -17277,7 +19631,7 @@
         </p:blipFill>
         <p:spPr>
           <a:xfrm>
-            <a:off x="1229640" y="4351640"/>
+            <a:off x="1229640" y="4764598"/>
             <a:ext cx="162000" cy="126000"/>
           </a:xfrm>
           <a:prstGeom prst="rect">
@@ -17307,7 +19661,7 @@
         </p:blipFill>
         <p:spPr>
           <a:xfrm>
-            <a:off x="1330680" y="4544949"/>
+            <a:off x="1330680" y="4957907"/>
             <a:ext cx="144000" cy="90000"/>
           </a:xfrm>
           <a:prstGeom prst="rect">
@@ -17343,7 +19697,7 @@
         </p:blipFill>
         <p:spPr>
           <a:xfrm>
-            <a:off x="1437032" y="4551243"/>
+            <a:off x="1437032" y="4964201"/>
             <a:ext cx="108000" cy="108000"/>
           </a:xfrm>
           <a:prstGeom prst="rect">
@@ -17351,6 +19705,42 @@
           </a:prstGeom>
         </p:spPr>
       </p:pic>
+      <p:sp>
+        <p:nvSpPr>
+          <p:cNvPr id="29" name="Shape 2">
+            <a:extLst>
+              <a:ext uri="{FF2B5EF4-FFF2-40B4-BE49-F238E27FC236}">
+                <a16:creationId xmlns:a16="http://schemas.microsoft.com/office/drawing/2014/main" id="{B820D202-FA1E-8C15-051B-80E526F9ED6B}"/>
+              </a:ext>
+            </a:extLst>
+          </p:cNvPr>
+          <p:cNvSpPr/>
+          <p:nvPr/>
+        </p:nvSpPr>
+        <p:spPr>
+          <a:xfrm>
+            <a:off x="502920" y="1124712"/>
+            <a:ext cx="2148840" cy="0"/>
+          </a:xfrm>
+          <a:prstGeom prst="line">
+            <a:avLst/>
+          </a:prstGeom>
+          <a:noFill/>
+          <a:ln w="38100">
+            <a:solidFill>
+              <a:srgbClr val="E20044"/>
+            </a:solidFill>
+            <a:prstDash val="solid"/>
+          </a:ln>
+        </p:spPr>
+        <p:txBody>
+          <a:bodyPr/>
+          <a:lstStyle/>
+          <a:p>
+            <a:endParaRPr/>
+          </a:p>
+        </p:txBody>
+      </p:sp>
     </p:spTree>
   </p:cSld>
   <p:clrMapOvr>
@@ -17459,29 +19849,6 @@
           </a:p>
         </p:txBody>
       </p:sp>
-      <p:sp>
-        <p:nvSpPr>
-          <p:cNvPr id="4" name="Shape 2"/>
-          <p:cNvSpPr/>
-          <p:nvPr/>
-        </p:nvSpPr>
-        <p:spPr>
-          <a:xfrm>
-            <a:off x="502920" y="1060704"/>
-            <a:ext cx="11155680" cy="0"/>
-          </a:xfrm>
-          <a:prstGeom prst="line">
-            <a:avLst/>
-          </a:prstGeom>
-          <a:noFill/>
-          <a:ln w="12700">
-            <a:solidFill>
-              <a:srgbClr val="DCE4EA"/>
-            </a:solidFill>
-            <a:prstDash val="solid"/>
-          </a:ln>
-        </p:spPr>
-      </p:sp>
       <p:pic>
         <p:nvPicPr>
           <p:cNvPr id="5" name="Image 0" descr="/mnt/data/assets_spdp/logo_icon.png"/>
@@ -17608,8 +19975,8 @@
         </p:nvSpPr>
         <p:spPr>
           <a:xfrm>
-            <a:off x="640080" y="1261872"/>
-            <a:ext cx="5166360" cy="3566160"/>
+            <a:off x="531925" y="1492439"/>
+            <a:ext cx="4847019" cy="4471417"/>
           </a:xfrm>
           <a:prstGeom prst="roundRect">
             <a:avLst>
@@ -17645,8 +20012,8 @@
         </p:nvSpPr>
         <p:spPr>
           <a:xfrm>
-            <a:off x="640080" y="4864608"/>
-            <a:ext cx="5166360" cy="164592"/>
+            <a:off x="531925" y="5963857"/>
+            <a:ext cx="4847020" cy="228598"/>
           </a:xfrm>
           <a:prstGeom prst="rect">
             <a:avLst/>
@@ -17681,8 +20048,8 @@
         </p:nvSpPr>
         <p:spPr>
           <a:xfrm>
-            <a:off x="6172200" y="1261872"/>
-            <a:ext cx="5257800" cy="3566160"/>
+            <a:off x="5698285" y="1492439"/>
+            <a:ext cx="5731715" cy="2022102"/>
           </a:xfrm>
           <a:prstGeom prst="roundRect">
             <a:avLst>
@@ -17709,160 +20076,6 @@
       </p:sp>
       <p:sp>
         <p:nvSpPr>
-          <p:cNvPr id="13" name="Text 9"/>
-          <p:cNvSpPr/>
-          <p:nvPr/>
-        </p:nvSpPr>
-        <p:spPr>
-          <a:xfrm>
-            <a:off x="6446520" y="1536192"/>
-            <a:ext cx="2743200" cy="274320"/>
-          </a:xfrm>
-          <a:prstGeom prst="rect">
-            <a:avLst/>
-          </a:prstGeom>
-          <a:noFill/>
-          <a:ln/>
-        </p:spPr>
-        <p:txBody>
-          <a:bodyPr wrap="square" lIns="0" tIns="0" rIns="0" bIns="0" rtlCol="0" anchor="ctr"/>
-          <a:lstStyle/>
-          <a:p>
-            <a:pPr marL="0" indent="0">
-              <a:buNone/>
-            </a:pPr>
-            <a:r>
-              <a:rPr lang="en-US" sz="1700" b="1" dirty="0">
-                <a:solidFill>
-                  <a:srgbClr val="17252A"/>
-                </a:solidFill>
-              </a:rPr>
-              <a:t>Contrôles réalisés</a:t>
-            </a:r>
-            <a:endParaRPr lang="en-US" sz="1700" dirty="0"/>
-          </a:p>
-        </p:txBody>
-      </p:sp>
-      <p:sp>
-        <p:nvSpPr>
-          <p:cNvPr id="14" name="Text 10"/>
-          <p:cNvSpPr/>
-          <p:nvPr/>
-        </p:nvSpPr>
-        <p:spPr>
-          <a:xfrm>
-            <a:off x="6446520" y="1965960"/>
-            <a:ext cx="4526280" cy="1691640"/>
-          </a:xfrm>
-          <a:prstGeom prst="rect">
-            <a:avLst/>
-          </a:prstGeom>
-          <a:noFill/>
-          <a:ln/>
-        </p:spPr>
-        <p:txBody>
-          <a:bodyPr wrap="square" lIns="762" tIns="762" rIns="762" bIns="762" rtlCol="0" anchor="ctr">
-            <a:normAutofit/>
-          </a:bodyPr>
-          <a:lstStyle/>
-          <a:p>
-            <a:r>
-              <a:rPr lang="en-US" sz="1280" dirty="0">
-                <a:solidFill>
-                  <a:srgbClr val="17252A"/>
-                </a:solidFill>
-                <a:latin typeface="Aptos" pitchFamily="34" charset="0"/>
-                <a:ea typeface="Aptos" pitchFamily="34" charset="-122"/>
-                <a:cs typeface="Aptos" pitchFamily="34" charset="-120"/>
-              </a:rPr>
-              <a:t>Volumes par table : joueur, équipe, performance, temps de jeu, xG, progression.</a:t>
-            </a:r>
-            <a:endParaRPr lang="en-US" sz="1280" dirty="0"/>
-          </a:p>
-          <a:p>
-            <a:r>
-              <a:rPr lang="en-US" sz="1280" dirty="0">
-                <a:solidFill>
-                  <a:srgbClr val="17252A"/>
-                </a:solidFill>
-                <a:latin typeface="Aptos" pitchFamily="34" charset="0"/>
-                <a:ea typeface="Aptos" pitchFamily="34" charset="-122"/>
-                <a:cs typeface="Aptos" pitchFamily="34" charset="-120"/>
-              </a:rPr>
-              <a:t>Validité des jointures entre tables métier.</a:t>
-            </a:r>
-            <a:endParaRPr lang="en-US" sz="1280" dirty="0"/>
-          </a:p>
-          <a:p>
-            <a:r>
-              <a:rPr lang="en-US" sz="1280" dirty="0">
-                <a:solidFill>
-                  <a:srgbClr val="17252A"/>
-                </a:solidFill>
-                <a:latin typeface="Aptos" pitchFamily="34" charset="0"/>
-                <a:ea typeface="Aptos" pitchFamily="34" charset="-122"/>
-                <a:cs typeface="Aptos" pitchFamily="34" charset="-120"/>
-              </a:rPr>
-              <a:t>Division sécurisée avec NULLIF dans les ratios.</a:t>
-            </a:r>
-            <a:endParaRPr lang="en-US" sz="1280" dirty="0"/>
-          </a:p>
-          <a:p>
-            <a:r>
-              <a:rPr lang="en-US" sz="1280" dirty="0">
-                <a:solidFill>
-                  <a:srgbClr val="17252A"/>
-                </a:solidFill>
-                <a:latin typeface="Aptos" pitchFamily="34" charset="0"/>
-                <a:ea typeface="Aptos" pitchFamily="34" charset="-122"/>
-                <a:cs typeface="Aptos" pitchFamily="34" charset="-120"/>
-              </a:rPr>
-              <a:t>Comparaison brut vs consolidé pour mesurer l’impact des doublons.</a:t>
-            </a:r>
-            <a:endParaRPr lang="en-US" sz="1280" dirty="0"/>
-          </a:p>
-        </p:txBody>
-      </p:sp>
-      <p:sp>
-        <p:nvSpPr>
-          <p:cNvPr id="15" name="Text 11"/>
-          <p:cNvSpPr/>
-          <p:nvPr/>
-        </p:nvSpPr>
-        <p:spPr>
-          <a:xfrm>
-            <a:off x="6446520" y="4069080"/>
-            <a:ext cx="4480560" cy="420624"/>
-          </a:xfrm>
-          <a:prstGeom prst="rect">
-            <a:avLst/>
-          </a:prstGeom>
-          <a:noFill/>
-          <a:ln/>
-        </p:spPr>
-        <p:txBody>
-          <a:bodyPr wrap="square" lIns="0" tIns="0" rIns="0" bIns="0" rtlCol="0" anchor="ctr">
-            <a:normAutofit/>
-          </a:bodyPr>
-          <a:lstStyle/>
-          <a:p>
-            <a:pPr marL="0" indent="0">
-              <a:buNone/>
-            </a:pPr>
-            <a:r>
-              <a:rPr lang="en-US" sz="1200" b="1" dirty="0">
-                <a:solidFill>
-                  <a:srgbClr val="2E7D32"/>
-                </a:solidFill>
-              </a:rPr>
-              <a:t>Les contrôles limitent le risque d’analyse faussée par un mauvais import ou des valeurs incohérentes.</a:t>
-            </a:r>
-            <a:endParaRPr lang="en-US" sz="1200" dirty="0"/>
-          </a:p>
-        </p:txBody>
-      </p:sp>
-      <p:sp>
-        <p:nvSpPr>
           <p:cNvPr id="21" name="ZoneTexte 20">
             <a:extLst>
               <a:ext uri="{FF2B5EF4-FFF2-40B4-BE49-F238E27FC236}">
@@ -17875,8 +20088,8 @@
         </p:nvSpPr>
         <p:spPr>
           <a:xfrm>
-            <a:off x="959420" y="1434477"/>
-            <a:ext cx="4527679" cy="3139321"/>
+            <a:off x="851266" y="1814467"/>
+            <a:ext cx="4298380" cy="4001095"/>
           </a:xfrm>
           <a:prstGeom prst="rect">
             <a:avLst/>
@@ -17906,7 +20119,7 @@
               <a:tabLst/>
             </a:pPr>
             <a:r>
-              <a:rPr kumimoji="0" lang="fr-FR" altLang="fr-FR" sz="1100" b="0" i="0" u="none" strike="noStrike" cap="none" normalizeH="0" baseline="0" dirty="0">
+              <a:rPr kumimoji="0" lang="fr-FR" altLang="fr-FR" sz="900" b="0" i="0" u="none" strike="noStrike" cap="none" normalizeH="0" baseline="0" dirty="0">
                 <a:ln>
                   <a:noFill/>
                 </a:ln>
@@ -17919,7 +20132,7 @@
               <a:t>SELECT </a:t>
             </a:r>
             <a:r>
-              <a:rPr kumimoji="0" lang="fr-FR" altLang="fr-FR" sz="1100" b="0" i="0" u="none" strike="noStrike" cap="none" normalizeH="0" baseline="0" dirty="0">
+              <a:rPr kumimoji="0" lang="fr-FR" altLang="fr-FR" sz="900" b="0" i="0" u="none" strike="noStrike" cap="none" normalizeH="0" baseline="0" dirty="0">
                 <a:ln>
                   <a:noFill/>
                 </a:ln>
@@ -17932,7 +20145,7 @@
               <a:t>'Joueurs' </a:t>
             </a:r>
             <a:r>
-              <a:rPr kumimoji="0" lang="fr-FR" altLang="fr-FR" sz="1100" b="0" i="0" u="none" strike="noStrike" cap="none" normalizeH="0" baseline="0" dirty="0">
+              <a:rPr kumimoji="0" lang="fr-FR" altLang="fr-FR" sz="900" b="0" i="0" u="none" strike="noStrike" cap="none" normalizeH="0" baseline="0" dirty="0">
                 <a:ln>
                   <a:noFill/>
                 </a:ln>
@@ -17945,7 +20158,7 @@
               <a:t>AS </a:t>
             </a:r>
             <a:r>
-              <a:rPr kumimoji="0" lang="fr-FR" altLang="fr-FR" sz="1100" b="0" i="0" u="none" strike="noStrike" cap="none" normalizeH="0" baseline="0" dirty="0" err="1">
+              <a:rPr kumimoji="0" lang="fr-FR" altLang="fr-FR" sz="900" b="0" i="0" u="none" strike="noStrike" cap="none" normalizeH="0" baseline="0" dirty="0" err="1">
                 <a:ln>
                   <a:noFill/>
                 </a:ln>
@@ -17958,7 +20171,7 @@
               <a:t>table_controlee</a:t>
             </a:r>
             <a:r>
-              <a:rPr kumimoji="0" lang="fr-FR" altLang="fr-FR" sz="1100" b="0" i="0" u="none" strike="noStrike" cap="none" normalizeH="0" baseline="0" dirty="0">
+              <a:rPr kumimoji="0" lang="fr-FR" altLang="fr-FR" sz="900" b="0" i="0" u="none" strike="noStrike" cap="none" normalizeH="0" baseline="0" dirty="0">
                 <a:ln>
                   <a:noFill/>
                 </a:ln>
@@ -17968,23 +20181,25 @@
                 <a:effectLst/>
                 <a:latin typeface="JetBrains Mono"/>
               </a:rPr>
-              <a:t>, COUNT(*) </a:t>
-            </a:r>
-            <a:r>
-              <a:rPr kumimoji="0" lang="fr-FR" altLang="fr-FR" sz="1100" b="0" i="0" u="none" strike="noStrike" cap="none" normalizeH="0" baseline="0" dirty="0">
+              <a:t>,</a:t>
+            </a:r>
+            <a:r>
+              <a:rPr kumimoji="0" lang="fr-FR" altLang="fr-FR" sz="900" b="0" i="0" u="none" strike="noStrike" cap="none" normalizeH="0" baseline="0" dirty="0">
                 <a:ln>
                   <a:noFill/>
                 </a:ln>
                 <a:solidFill>
-                  <a:srgbClr val="CF8E6D"/>
+                  <a:schemeClr val="accent3">
+                    <a:lumMod val="75000"/>
+                  </a:schemeClr>
                 </a:solidFill>
                 <a:effectLst/>
                 <a:latin typeface="JetBrains Mono"/>
               </a:rPr>
-              <a:t>AS </a:t>
-            </a:r>
-            <a:r>
-              <a:rPr kumimoji="0" lang="fr-FR" altLang="fr-FR" sz="1100" b="0" i="0" u="none" strike="noStrike" cap="none" normalizeH="0" baseline="0" dirty="0" err="1">
+              <a:t> COUNT</a:t>
+            </a:r>
+            <a:r>
+              <a:rPr kumimoji="0" lang="fr-FR" altLang="fr-FR" sz="900" b="0" i="0" u="none" strike="noStrike" cap="none" normalizeH="0" baseline="0" dirty="0">
                 <a:ln>
                   <a:noFill/>
                 </a:ln>
@@ -17994,48 +20209,49 @@
                 <a:effectLst/>
                 <a:latin typeface="JetBrains Mono"/>
               </a:rPr>
-              <a:t>total_lignes</a:t>
-            </a:r>
-            <a:br>
-              <a:rPr kumimoji="0" lang="fr-FR" altLang="fr-FR" sz="1100" b="0" i="0" u="none" strike="noStrike" cap="none" normalizeH="0" baseline="0" dirty="0">
+              <a:t>(</a:t>
+            </a:r>
+            <a:r>
+              <a:rPr kumimoji="0" lang="fr-FR" altLang="fr-FR" sz="900" b="0" i="0" u="none" strike="noStrike" cap="none" normalizeH="0" baseline="0" dirty="0">
                 <a:ln>
                   <a:noFill/>
                 </a:ln>
                 <a:solidFill>
-                  <a:srgbClr val="BCBEC4"/>
+                  <a:srgbClr val="FFFF00"/>
                 </a:solidFill>
                 <a:effectLst/>
                 <a:latin typeface="JetBrains Mono"/>
               </a:rPr>
-            </a:br>
-            <a:r>
-              <a:rPr kumimoji="0" lang="fr-FR" altLang="fr-FR" sz="1100" b="0" i="0" u="none" strike="noStrike" cap="none" normalizeH="0" baseline="0" dirty="0">
+              <a:t>*</a:t>
+            </a:r>
+            <a:r>
+              <a:rPr kumimoji="0" lang="fr-FR" altLang="fr-FR" sz="900" b="0" i="0" u="none" strike="noStrike" cap="none" normalizeH="0" baseline="0" dirty="0">
                 <a:ln>
                   <a:noFill/>
                 </a:ln>
                 <a:solidFill>
-                  <a:srgbClr val="CF8E6D"/>
+                  <a:srgbClr val="BCBEC4"/>
                 </a:solidFill>
                 <a:effectLst/>
                 <a:latin typeface="JetBrains Mono"/>
               </a:rPr>
-              <a:t>FROM </a:t>
-            </a:r>
-            <a:r>
-              <a:rPr kumimoji="0" lang="fr-FR" altLang="fr-FR" sz="1100" b="0" i="0" u="none" strike="noStrike" cap="none" normalizeH="0" baseline="0" dirty="0">
+              <a:t>) </a:t>
+            </a:r>
+            <a:r>
+              <a:rPr kumimoji="0" lang="fr-FR" altLang="fr-FR" sz="900" b="0" i="0" u="none" strike="noStrike" cap="none" normalizeH="0" baseline="0" dirty="0">
                 <a:ln>
                   <a:noFill/>
                 </a:ln>
                 <a:solidFill>
-                  <a:srgbClr val="BCBEC4"/>
+                  <a:srgbClr val="CF8E6D"/>
                 </a:solidFill>
                 <a:effectLst/>
                 <a:latin typeface="JetBrains Mono"/>
               </a:rPr>
-              <a:t>joueur</a:t>
-            </a:r>
-            <a:br>
-              <a:rPr kumimoji="0" lang="fr-FR" altLang="fr-FR" sz="1100" b="0" i="0" u="none" strike="noStrike" cap="none" normalizeH="0" baseline="0" dirty="0">
+              <a:t>AS </a:t>
+            </a:r>
+            <a:r>
+              <a:rPr kumimoji="0" lang="fr-FR" altLang="fr-FR" sz="900" b="0" i="0" u="none" strike="noStrike" cap="none" normalizeH="0" baseline="0" dirty="0" err="1">
                 <a:ln>
                   <a:noFill/>
                 </a:ln>
@@ -18045,9 +20261,10 @@
                 <a:effectLst/>
                 <a:latin typeface="JetBrains Mono"/>
               </a:rPr>
-            </a:br>
+              <a:t>total_lignes</a:t>
+            </a:r>
             <a:br>
-              <a:rPr kumimoji="0" lang="fr-FR" altLang="fr-FR" sz="1100" b="0" i="0" u="none" strike="noStrike" cap="none" normalizeH="0" baseline="0" dirty="0">
+              <a:rPr kumimoji="0" lang="fr-FR" altLang="fr-FR" sz="900" b="0" i="0" u="none" strike="noStrike" cap="none" normalizeH="0" baseline="0" dirty="0">
                 <a:ln>
                   <a:noFill/>
                 </a:ln>
@@ -18059,7 +20276,7 @@
               </a:rPr>
             </a:br>
             <a:r>
-              <a:rPr kumimoji="0" lang="fr-FR" altLang="fr-FR" sz="1100" b="0" i="0" u="none" strike="noStrike" cap="none" normalizeH="0" baseline="0" dirty="0">
+              <a:rPr kumimoji="0" lang="fr-FR" altLang="fr-FR" sz="900" b="0" i="0" u="none" strike="noStrike" cap="none" normalizeH="0" baseline="0" dirty="0">
                 <a:ln>
                   <a:noFill/>
                 </a:ln>
@@ -18069,60 +20286,60 @@
                 <a:effectLst/>
                 <a:latin typeface="JetBrains Mono"/>
               </a:rPr>
-              <a:t>UNION ALL</a:t>
-            </a:r>
-            <a:br>
-              <a:rPr kumimoji="0" lang="fr-FR" altLang="fr-FR" sz="1100" b="0" i="0" u="none" strike="noStrike" cap="none" normalizeH="0" baseline="0" dirty="0">
+              <a:t>FROM </a:t>
+            </a:r>
+            <a:r>
+              <a:rPr kumimoji="0" lang="fr-FR" altLang="fr-FR" sz="900" b="0" i="0" u="none" strike="noStrike" cap="none" normalizeH="0" baseline="0" dirty="0">
                 <a:ln>
                   <a:noFill/>
                 </a:ln>
                 <a:solidFill>
-                  <a:srgbClr val="CF8E6D"/>
+                  <a:srgbClr val="BCBEC4"/>
                 </a:solidFill>
                 <a:effectLst/>
                 <a:latin typeface="JetBrains Mono"/>
               </a:rPr>
-            </a:br>
+              <a:t>joueur</a:t>
+            </a:r>
             <a:br>
-              <a:rPr kumimoji="0" lang="fr-FR" altLang="fr-FR" sz="1100" b="0" i="0" u="none" strike="noStrike" cap="none" normalizeH="0" baseline="0" dirty="0">
+              <a:rPr kumimoji="0" lang="fr-FR" altLang="fr-FR" sz="900" b="0" i="0" u="none" strike="noStrike" cap="none" normalizeH="0" baseline="0" dirty="0">
                 <a:ln>
                   <a:noFill/>
                 </a:ln>
                 <a:solidFill>
-                  <a:srgbClr val="CF8E6D"/>
+                  <a:srgbClr val="BCBEC4"/>
                 </a:solidFill>
                 <a:effectLst/>
                 <a:latin typeface="JetBrains Mono"/>
               </a:rPr>
             </a:br>
-            <a:r>
-              <a:rPr kumimoji="0" lang="fr-FR" altLang="fr-FR" sz="1100" b="0" i="0" u="none" strike="noStrike" cap="none" normalizeH="0" baseline="0" dirty="0">
+            <a:br>
+              <a:rPr kumimoji="0" lang="fr-FR" altLang="fr-FR" sz="900" b="0" i="0" u="none" strike="noStrike" cap="none" normalizeH="0" baseline="0" dirty="0">
                 <a:ln>
                   <a:noFill/>
                 </a:ln>
                 <a:solidFill>
-                  <a:srgbClr val="CF8E6D"/>
+                  <a:srgbClr val="BCBEC4"/>
                 </a:solidFill>
                 <a:effectLst/>
                 <a:latin typeface="JetBrains Mono"/>
               </a:rPr>
-              <a:t>SELECT </a:t>
-            </a:r>
-            <a:r>
-              <a:rPr kumimoji="0" lang="fr-FR" altLang="fr-FR" sz="1100" b="0" i="0" u="none" strike="noStrike" cap="none" normalizeH="0" baseline="0" dirty="0">
+            </a:br>
+            <a:r>
+              <a:rPr kumimoji="0" lang="fr-FR" altLang="fr-FR" sz="900" b="0" i="0" u="none" strike="noStrike" cap="none" normalizeH="0" baseline="0" dirty="0">
                 <a:ln>
                   <a:noFill/>
                 </a:ln>
                 <a:solidFill>
-                  <a:srgbClr val="6AAB73"/>
+                  <a:srgbClr val="CF8E6D"/>
                 </a:solidFill>
                 <a:effectLst/>
                 <a:latin typeface="JetBrains Mono"/>
               </a:rPr>
-              <a:t>'Équipes' </a:t>
-            </a:r>
-            <a:r>
-              <a:rPr kumimoji="0" lang="fr-FR" altLang="fr-FR" sz="1100" b="0" i="0" u="none" strike="noStrike" cap="none" normalizeH="0" baseline="0" dirty="0">
+              <a:t>UNION ALL</a:t>
+            </a:r>
+            <a:br>
+              <a:rPr kumimoji="0" lang="fr-FR" altLang="fr-FR" sz="900" b="0" i="0" u="none" strike="noStrike" cap="none" normalizeH="0" baseline="0" dirty="0">
                 <a:ln>
                   <a:noFill/>
                 </a:ln>
@@ -18132,62 +20349,60 @@
                 <a:effectLst/>
                 <a:latin typeface="JetBrains Mono"/>
               </a:rPr>
-              <a:t>AS </a:t>
-            </a:r>
-            <a:r>
-              <a:rPr kumimoji="0" lang="fr-FR" altLang="fr-FR" sz="1100" b="0" i="0" u="none" strike="noStrike" cap="none" normalizeH="0" baseline="0" dirty="0" err="1">
+            </a:br>
+            <a:br>
+              <a:rPr kumimoji="0" lang="fr-FR" altLang="fr-FR" sz="900" b="0" i="0" u="none" strike="noStrike" cap="none" normalizeH="0" baseline="0" dirty="0">
                 <a:ln>
                   <a:noFill/>
                 </a:ln>
                 <a:solidFill>
-                  <a:srgbClr val="BCBEC4"/>
+                  <a:srgbClr val="CF8E6D"/>
                 </a:solidFill>
                 <a:effectLst/>
                 <a:latin typeface="JetBrains Mono"/>
               </a:rPr>
-              <a:t>table_controlee</a:t>
-            </a:r>
-            <a:r>
-              <a:rPr kumimoji="0" lang="fr-FR" altLang="fr-FR" sz="1100" b="0" i="0" u="none" strike="noStrike" cap="none" normalizeH="0" baseline="0" dirty="0">
+            </a:br>
+            <a:r>
+              <a:rPr kumimoji="0" lang="fr-FR" altLang="fr-FR" sz="900" b="0" i="0" u="none" strike="noStrike" cap="none" normalizeH="0" baseline="0" dirty="0">
                 <a:ln>
                   <a:noFill/>
                 </a:ln>
                 <a:solidFill>
-                  <a:srgbClr val="BCBEC4"/>
+                  <a:srgbClr val="CF8E6D"/>
                 </a:solidFill>
                 <a:effectLst/>
                 <a:latin typeface="JetBrains Mono"/>
               </a:rPr>
-              <a:t>, COUNT(*) </a:t>
-            </a:r>
-            <a:r>
-              <a:rPr kumimoji="0" lang="fr-FR" altLang="fr-FR" sz="1100" b="0" i="0" u="none" strike="noStrike" cap="none" normalizeH="0" baseline="0" dirty="0">
+              <a:t>SELECT </a:t>
+            </a:r>
+            <a:r>
+              <a:rPr kumimoji="0" lang="fr-FR" altLang="fr-FR" sz="900" b="0" i="0" u="none" strike="noStrike" cap="none" normalizeH="0" baseline="0" dirty="0">
                 <a:ln>
                   <a:noFill/>
                 </a:ln>
                 <a:solidFill>
-                  <a:srgbClr val="CF8E6D"/>
+                  <a:srgbClr val="6AAB73"/>
                 </a:solidFill>
                 <a:effectLst/>
                 <a:latin typeface="JetBrains Mono"/>
               </a:rPr>
-              <a:t>AS </a:t>
-            </a:r>
-            <a:r>
-              <a:rPr kumimoji="0" lang="fr-FR" altLang="fr-FR" sz="1100" b="0" i="0" u="none" strike="noStrike" cap="none" normalizeH="0" baseline="0" dirty="0" err="1">
+              <a:t>'Équipes' </a:t>
+            </a:r>
+            <a:r>
+              <a:rPr kumimoji="0" lang="fr-FR" altLang="fr-FR" sz="900" b="0" i="0" u="none" strike="noStrike" cap="none" normalizeH="0" baseline="0" dirty="0">
                 <a:ln>
                   <a:noFill/>
                 </a:ln>
                 <a:solidFill>
-                  <a:srgbClr val="BCBEC4"/>
+                  <a:srgbClr val="CF8E6D"/>
                 </a:solidFill>
                 <a:effectLst/>
                 <a:latin typeface="JetBrains Mono"/>
               </a:rPr>
-              <a:t>total_lignes</a:t>
-            </a:r>
-            <a:br>
-              <a:rPr kumimoji="0" lang="fr-FR" altLang="fr-FR" sz="1100" b="0" i="0" u="none" strike="noStrike" cap="none" normalizeH="0" baseline="0" dirty="0">
+              <a:t>AS </a:t>
+            </a:r>
+            <a:r>
+              <a:rPr kumimoji="0" lang="fr-FR" altLang="fr-FR" sz="900" b="0" i="0" u="none" strike="noStrike" cap="none" normalizeH="0" baseline="0" dirty="0" err="1">
                 <a:ln>
                   <a:noFill/>
                 </a:ln>
@@ -18197,35 +20412,38 @@
                 <a:effectLst/>
                 <a:latin typeface="JetBrains Mono"/>
               </a:rPr>
-            </a:br>
-            <a:r>
-              <a:rPr kumimoji="0" lang="fr-FR" altLang="fr-FR" sz="1100" b="0" i="0" u="none" strike="noStrike" cap="none" normalizeH="0" baseline="0" dirty="0">
+              <a:t>table_controlee</a:t>
+            </a:r>
+            <a:r>
+              <a:rPr kumimoji="0" lang="fr-FR" altLang="fr-FR" sz="900" b="0" i="0" u="none" strike="noStrike" cap="none" normalizeH="0" baseline="0" dirty="0">
                 <a:ln>
                   <a:noFill/>
                 </a:ln>
                 <a:solidFill>
-                  <a:srgbClr val="CF8E6D"/>
+                  <a:srgbClr val="BCBEC4"/>
                 </a:solidFill>
                 <a:effectLst/>
                 <a:latin typeface="JetBrains Mono"/>
               </a:rPr>
-              <a:t>FROM </a:t>
-            </a:r>
-            <a:r>
-              <a:rPr kumimoji="0" lang="fr-FR" altLang="fr-FR" sz="1100" b="0" i="0" u="none" strike="noStrike" cap="none" normalizeH="0" baseline="0" dirty="0" err="1">
+              <a:t>, </a:t>
+            </a:r>
+            <a:r>
+              <a:rPr kumimoji="0" lang="fr-FR" altLang="fr-FR" sz="900" b="0" i="0" u="none" strike="noStrike" cap="none" normalizeH="0" baseline="0" dirty="0">
                 <a:ln>
                   <a:noFill/>
                 </a:ln>
                 <a:solidFill>
-                  <a:srgbClr val="BCBEC4"/>
+                  <a:schemeClr val="accent3">
+                    <a:lumMod val="75000"/>
+                  </a:schemeClr>
                 </a:solidFill>
                 <a:effectLst/>
                 <a:latin typeface="JetBrains Mono"/>
               </a:rPr>
-              <a:t>equipe</a:t>
-            </a:r>
-            <a:br>
-              <a:rPr kumimoji="0" lang="fr-FR" altLang="fr-FR" sz="1100" b="0" i="0" u="none" strike="noStrike" cap="none" normalizeH="0" baseline="0" dirty="0">
+              <a:t>COUNT</a:t>
+            </a:r>
+            <a:r>
+              <a:rPr kumimoji="0" lang="fr-FR" altLang="fr-FR" sz="900" b="0" i="0" u="none" strike="noStrike" cap="none" normalizeH="0" baseline="0" dirty="0">
                 <a:ln>
                   <a:noFill/>
                 </a:ln>
@@ -18235,34 +20453,36 @@
                 <a:effectLst/>
                 <a:latin typeface="JetBrains Mono"/>
               </a:rPr>
-            </a:br>
-            <a:br>
-              <a:rPr kumimoji="0" lang="fr-FR" altLang="fr-FR" sz="1100" b="0" i="0" u="none" strike="noStrike" cap="none" normalizeH="0" baseline="0" dirty="0">
+              <a:t>(</a:t>
+            </a:r>
+            <a:r>
+              <a:rPr kumimoji="0" lang="fr-FR" altLang="fr-FR" sz="900" b="0" i="0" u="none" strike="noStrike" cap="none" normalizeH="0" baseline="0" dirty="0">
                 <a:ln>
                   <a:noFill/>
                 </a:ln>
                 <a:solidFill>
-                  <a:srgbClr val="BCBEC4"/>
+                  <a:srgbClr val="FFFF00"/>
                 </a:solidFill>
                 <a:effectLst/>
                 <a:latin typeface="JetBrains Mono"/>
               </a:rPr>
-            </a:br>
-            <a:r>
-              <a:rPr kumimoji="0" lang="fr-FR" altLang="fr-FR" sz="1100" b="0" i="0" u="none" strike="noStrike" cap="none" normalizeH="0" baseline="0" dirty="0">
+              <a:t>*</a:t>
+            </a:r>
+            <a:r>
+              <a:rPr kumimoji="0" lang="fr-FR" altLang="fr-FR" sz="900" b="0" i="0" u="none" strike="noStrike" cap="none" normalizeH="0" baseline="0" dirty="0">
                 <a:ln>
                   <a:noFill/>
                 </a:ln>
                 <a:solidFill>
-                  <a:srgbClr val="CF8E6D"/>
+                  <a:srgbClr val="BCBEC4"/>
                 </a:solidFill>
                 <a:effectLst/>
                 <a:latin typeface="JetBrains Mono"/>
               </a:rPr>
-              <a:t>UNION ALL</a:t>
-            </a:r>
-            <a:br>
-              <a:rPr kumimoji="0" lang="fr-FR" altLang="fr-FR" sz="1100" b="0" i="0" u="none" strike="noStrike" cap="none" normalizeH="0" baseline="0" dirty="0">
+              <a:t>) </a:t>
+            </a:r>
+            <a:r>
+              <a:rPr kumimoji="0" lang="fr-FR" altLang="fr-FR" sz="900" b="0" i="0" u="none" strike="noStrike" cap="none" normalizeH="0" baseline="0" dirty="0">
                 <a:ln>
                   <a:noFill/>
                 </a:ln>
@@ -18272,60 +20492,61 @@
                 <a:effectLst/>
                 <a:latin typeface="JetBrains Mono"/>
               </a:rPr>
-            </a:br>
-            <a:br>
-              <a:rPr kumimoji="0" lang="fr-FR" altLang="fr-FR" sz="1100" b="0" i="0" u="none" strike="noStrike" cap="none" normalizeH="0" baseline="0" dirty="0">
+              <a:t>AS </a:t>
+            </a:r>
+            <a:r>
+              <a:rPr kumimoji="0" lang="fr-FR" altLang="fr-FR" sz="900" b="0" i="0" u="none" strike="noStrike" cap="none" normalizeH="0" baseline="0" dirty="0" err="1">
                 <a:ln>
                   <a:noFill/>
                 </a:ln>
                 <a:solidFill>
-                  <a:srgbClr val="CF8E6D"/>
+                  <a:srgbClr val="BCBEC4"/>
                 </a:solidFill>
                 <a:effectLst/>
                 <a:latin typeface="JetBrains Mono"/>
               </a:rPr>
-            </a:br>
-            <a:r>
-              <a:rPr kumimoji="0" lang="fr-FR" altLang="fr-FR" sz="1100" b="0" i="0" u="none" strike="noStrike" cap="none" normalizeH="0" baseline="0" dirty="0">
+              <a:t>total_lignes</a:t>
+            </a:r>
+            <a:br>
+              <a:rPr kumimoji="0" lang="fr-FR" altLang="fr-FR" sz="900" b="0" i="0" u="none" strike="noStrike" cap="none" normalizeH="0" baseline="0" dirty="0">
                 <a:ln>
                   <a:noFill/>
                 </a:ln>
                 <a:solidFill>
-                  <a:srgbClr val="CF8E6D"/>
+                  <a:srgbClr val="BCBEC4"/>
                 </a:solidFill>
                 <a:effectLst/>
                 <a:latin typeface="JetBrains Mono"/>
               </a:rPr>
-              <a:t>SELECT </a:t>
-            </a:r>
-            <a:r>
-              <a:rPr kumimoji="0" lang="fr-FR" altLang="fr-FR" sz="1100" b="0" i="0" u="none" strike="noStrike" cap="none" normalizeH="0" baseline="0" dirty="0">
+            </a:br>
+            <a:r>
+              <a:rPr kumimoji="0" lang="fr-FR" altLang="fr-FR" sz="900" b="0" i="0" u="none" strike="noStrike" cap="none" normalizeH="0" baseline="0" dirty="0">
                 <a:ln>
                   <a:noFill/>
                 </a:ln>
                 <a:solidFill>
-                  <a:srgbClr val="6AAB73"/>
+                  <a:srgbClr val="CF8E6D"/>
                 </a:solidFill>
                 <a:effectLst/>
                 <a:latin typeface="JetBrains Mono"/>
               </a:rPr>
-              <a:t>'Performances' </a:t>
-            </a:r>
-            <a:r>
-              <a:rPr kumimoji="0" lang="fr-FR" altLang="fr-FR" sz="1100" b="0" i="0" u="none" strike="noStrike" cap="none" normalizeH="0" baseline="0" dirty="0">
+              <a:t>FROM </a:t>
+            </a:r>
+            <a:r>
+              <a:rPr kumimoji="0" lang="fr-FR" altLang="fr-FR" sz="900" b="0" i="0" u="none" strike="noStrike" cap="none" normalizeH="0" baseline="0" dirty="0" err="1">
                 <a:ln>
                   <a:noFill/>
                 </a:ln>
                 <a:solidFill>
-                  <a:srgbClr val="CF8E6D"/>
+                  <a:srgbClr val="BCBEC4"/>
                 </a:solidFill>
                 <a:effectLst/>
                 <a:latin typeface="JetBrains Mono"/>
               </a:rPr>
-              <a:t>AS </a:t>
-            </a:r>
-            <a:r>
-              <a:rPr kumimoji="0" lang="fr-FR" altLang="fr-FR" sz="1100" b="0" i="0" u="none" strike="noStrike" cap="none" normalizeH="0" baseline="0" dirty="0" err="1">
+              <a:t>equipe</a:t>
+            </a:r>
+            <a:br>
+              <a:rPr kumimoji="0" lang="fr-FR" altLang="fr-FR" sz="900" b="0" i="0" u="none" strike="noStrike" cap="none" normalizeH="0" baseline="0" dirty="0">
                 <a:ln>
                   <a:noFill/>
                 </a:ln>
@@ -18335,10 +20556,9 @@
                 <a:effectLst/>
                 <a:latin typeface="JetBrains Mono"/>
               </a:rPr>
-              <a:t>table_controlee</a:t>
-            </a:r>
-            <a:r>
-              <a:rPr kumimoji="0" lang="fr-FR" altLang="fr-FR" sz="1100" b="0" i="0" u="none" strike="noStrike" cap="none" normalizeH="0" baseline="0" dirty="0">
+            </a:br>
+            <a:br>
+              <a:rPr kumimoji="0" lang="fr-FR" altLang="fr-FR" sz="900" b="0" i="0" u="none" strike="noStrike" cap="none" normalizeH="0" baseline="0" dirty="0">
                 <a:ln>
                   <a:noFill/>
                 </a:ln>
@@ -18348,10 +20568,9 @@
                 <a:effectLst/>
                 <a:latin typeface="JetBrains Mono"/>
               </a:rPr>
-              <a:t>, COUNT(*) </a:t>
-            </a:r>
-            <a:r>
-              <a:rPr kumimoji="0" lang="fr-FR" altLang="fr-FR" sz="1100" b="0" i="0" u="none" strike="noStrike" cap="none" normalizeH="0" baseline="0" dirty="0">
+            </a:br>
+            <a:r>
+              <a:rPr kumimoji="0" lang="fr-FR" altLang="fr-FR" sz="900" b="0" i="0" u="none" strike="noStrike" cap="none" normalizeH="0" baseline="0" dirty="0">
                 <a:ln>
                   <a:noFill/>
                 </a:ln>
@@ -18361,35 +20580,34 @@
                 <a:effectLst/>
                 <a:latin typeface="JetBrains Mono"/>
               </a:rPr>
-              <a:t>AS </a:t>
-            </a:r>
-            <a:r>
-              <a:rPr kumimoji="0" lang="fr-FR" altLang="fr-FR" sz="1100" b="0" i="0" u="none" strike="noStrike" cap="none" normalizeH="0" baseline="0" dirty="0" err="1">
+              <a:t>UNION ALL</a:t>
+            </a:r>
+            <a:br>
+              <a:rPr kumimoji="0" lang="fr-FR" altLang="fr-FR" sz="900" b="0" i="0" u="none" strike="noStrike" cap="none" normalizeH="0" baseline="0" dirty="0">
                 <a:ln>
                   <a:noFill/>
                 </a:ln>
                 <a:solidFill>
-                  <a:srgbClr val="BCBEC4"/>
+                  <a:srgbClr val="CF8E6D"/>
                 </a:solidFill>
                 <a:effectLst/>
                 <a:latin typeface="JetBrains Mono"/>
               </a:rPr>
-              <a:t>total_lignes</a:t>
-            </a:r>
+            </a:br>
             <a:br>
-              <a:rPr kumimoji="0" lang="fr-FR" altLang="fr-FR" sz="1100" b="0" i="0" u="none" strike="noStrike" cap="none" normalizeH="0" baseline="0" dirty="0">
+              <a:rPr kumimoji="0" lang="fr-FR" altLang="fr-FR" sz="900" b="0" i="0" u="none" strike="noStrike" cap="none" normalizeH="0" baseline="0" dirty="0">
                 <a:ln>
                   <a:noFill/>
                 </a:ln>
                 <a:solidFill>
-                  <a:srgbClr val="BCBEC4"/>
+                  <a:srgbClr val="CF8E6D"/>
                 </a:solidFill>
                 <a:effectLst/>
                 <a:latin typeface="JetBrains Mono"/>
               </a:rPr>
             </a:br>
             <a:r>
-              <a:rPr kumimoji="0" lang="fr-FR" altLang="fr-FR" sz="1100" b="0" i="0" u="none" strike="noStrike" cap="none" normalizeH="0" baseline="0" dirty="0">
+              <a:rPr kumimoji="0" lang="fr-FR" altLang="fr-FR" sz="900" b="0" i="0" u="none" strike="noStrike" cap="none" normalizeH="0" baseline="0" dirty="0">
                 <a:ln>
                   <a:noFill/>
                 </a:ln>
@@ -18399,35 +20617,36 @@
                 <a:effectLst/>
                 <a:latin typeface="JetBrains Mono"/>
               </a:rPr>
-              <a:t>FROM </a:t>
-            </a:r>
-            <a:r>
-              <a:rPr kumimoji="0" lang="fr-FR" altLang="fr-FR" sz="1100" b="0" i="0" u="none" strike="noStrike" cap="none" normalizeH="0" baseline="0" dirty="0">
+              <a:t>SELECT </a:t>
+            </a:r>
+            <a:r>
+              <a:rPr kumimoji="0" lang="fr-FR" altLang="fr-FR" sz="900" b="0" i="0" u="none" strike="noStrike" cap="none" normalizeH="0" baseline="0" dirty="0">
                 <a:ln>
                   <a:noFill/>
                 </a:ln>
                 <a:solidFill>
-                  <a:srgbClr val="BCBEC4"/>
+                  <a:srgbClr val="6AAB73"/>
                 </a:solidFill>
                 <a:effectLst/>
                 <a:latin typeface="JetBrains Mono"/>
               </a:rPr>
-              <a:t>performance</a:t>
-            </a:r>
-            <a:br>
-              <a:rPr kumimoji="0" lang="fr-FR" altLang="fr-FR" sz="1100" b="0" i="0" u="none" strike="noStrike" cap="none" normalizeH="0" baseline="0" dirty="0">
+              <a:t>'Performances' </a:t>
+            </a:r>
+            <a:r>
+              <a:rPr kumimoji="0" lang="fr-FR" altLang="fr-FR" sz="900" b="0" i="0" u="none" strike="noStrike" cap="none" normalizeH="0" baseline="0" dirty="0">
                 <a:ln>
                   <a:noFill/>
                 </a:ln>
                 <a:solidFill>
-                  <a:srgbClr val="BCBEC4"/>
+                  <a:srgbClr val="CF8E6D"/>
                 </a:solidFill>
                 <a:effectLst/>
                 <a:latin typeface="JetBrains Mono"/>
               </a:rPr>
-            </a:br>
-            <a:br>
-              <a:rPr kumimoji="0" lang="fr-FR" altLang="fr-FR" sz="1100" b="0" i="0" u="none" strike="noStrike" cap="none" normalizeH="0" baseline="0" dirty="0">
+              <a:t>AS </a:t>
+            </a:r>
+            <a:r>
+              <a:rPr kumimoji="0" lang="fr-FR" altLang="fr-FR" sz="900" b="0" i="0" u="none" strike="noStrike" cap="none" normalizeH="0" baseline="0" dirty="0" err="1">
                 <a:ln>
                   <a:noFill/>
                 </a:ln>
@@ -18437,72 +20656,77 @@
                 <a:effectLst/>
                 <a:latin typeface="JetBrains Mono"/>
               </a:rPr>
-            </a:br>
-            <a:r>
-              <a:rPr kumimoji="0" lang="fr-FR" altLang="fr-FR" sz="1100" b="0" i="0" u="none" strike="noStrike" cap="none" normalizeH="0" baseline="0" dirty="0">
+              <a:t>table_controlee</a:t>
+            </a:r>
+            <a:r>
+              <a:rPr kumimoji="0" lang="fr-FR" altLang="fr-FR" sz="900" b="0" i="0" u="none" strike="noStrike" cap="none" normalizeH="0" baseline="0" dirty="0">
                 <a:ln>
                   <a:noFill/>
                 </a:ln>
                 <a:solidFill>
-                  <a:srgbClr val="CF8E6D"/>
+                  <a:srgbClr val="BCBEC4"/>
                 </a:solidFill>
                 <a:effectLst/>
                 <a:latin typeface="JetBrains Mono"/>
               </a:rPr>
-              <a:t>UNION ALL</a:t>
-            </a:r>
-            <a:br>
-              <a:rPr kumimoji="0" lang="fr-FR" altLang="fr-FR" sz="1100" b="0" i="0" u="none" strike="noStrike" cap="none" normalizeH="0" baseline="0" dirty="0">
+              <a:t>, </a:t>
+            </a:r>
+            <a:r>
+              <a:rPr kumimoji="0" lang="fr-FR" altLang="fr-FR" sz="900" b="0" i="0" u="none" strike="noStrike" cap="none" normalizeH="0" baseline="0" dirty="0">
                 <a:ln>
                   <a:noFill/>
                 </a:ln>
                 <a:solidFill>
-                  <a:srgbClr val="CF8E6D"/>
+                  <a:schemeClr val="accent3">
+                    <a:lumMod val="75000"/>
+                  </a:schemeClr>
                 </a:solidFill>
                 <a:effectLst/>
                 <a:latin typeface="JetBrains Mono"/>
               </a:rPr>
-            </a:br>
-            <a:br>
-              <a:rPr kumimoji="0" lang="fr-FR" altLang="fr-FR" sz="1100" b="0" i="0" u="none" strike="noStrike" cap="none" normalizeH="0" baseline="0" dirty="0">
+              <a:t>COUNT</a:t>
+            </a:r>
+            <a:r>
+              <a:rPr kumimoji="0" lang="fr-FR" altLang="fr-FR" sz="900" b="0" i="0" u="none" strike="noStrike" cap="none" normalizeH="0" baseline="0" dirty="0">
                 <a:ln>
                   <a:noFill/>
                 </a:ln>
                 <a:solidFill>
-                  <a:srgbClr val="CF8E6D"/>
+                  <a:srgbClr val="BCBEC4"/>
                 </a:solidFill>
                 <a:effectLst/>
                 <a:latin typeface="JetBrains Mono"/>
               </a:rPr>
-            </a:br>
-            <a:r>
-              <a:rPr kumimoji="0" lang="fr-FR" altLang="fr-FR" sz="1100" b="0" i="0" u="none" strike="noStrike" cap="none" normalizeH="0" baseline="0" dirty="0">
+              <a:t>(</a:t>
+            </a:r>
+            <a:r>
+              <a:rPr kumimoji="0" lang="fr-FR" altLang="fr-FR" sz="900" b="0" i="0" u="none" strike="noStrike" cap="none" normalizeH="0" baseline="0" dirty="0">
                 <a:ln>
                   <a:noFill/>
                 </a:ln>
                 <a:solidFill>
-                  <a:srgbClr val="CF8E6D"/>
+                  <a:srgbClr val="FFFF00"/>
                 </a:solidFill>
                 <a:effectLst/>
                 <a:latin typeface="JetBrains Mono"/>
               </a:rPr>
-              <a:t>SELECT </a:t>
-            </a:r>
-            <a:r>
-              <a:rPr kumimoji="0" lang="fr-FR" altLang="fr-FR" sz="1100" b="0" i="0" u="none" strike="noStrike" cap="none" normalizeH="0" baseline="0" dirty="0">
+              <a:t>*</a:t>
+            </a:r>
+            <a:r>
+              <a:rPr kumimoji="0" lang="fr-FR" altLang="fr-FR" sz="900" b="0" i="0" u="none" strike="noStrike" cap="none" normalizeH="0" baseline="0" dirty="0">
                 <a:ln>
                   <a:noFill/>
                 </a:ln>
                 <a:solidFill>
-                  <a:srgbClr val="6AAB73"/>
+                  <a:srgbClr val="BCBEC4"/>
                 </a:solidFill>
                 <a:effectLst/>
                 <a:latin typeface="JetBrains Mono"/>
               </a:rPr>
-              <a:t>'Temps de jeu' </a:t>
-            </a:r>
-            <a:r>
-              <a:rPr kumimoji="0" lang="fr-FR" altLang="fr-FR" sz="1100" b="0" i="0" u="none" strike="noStrike" cap="none" normalizeH="0" baseline="0" dirty="0">
+              <a:t>) </a:t>
+            </a:r>
+            <a:r>
+              <a:rPr kumimoji="0" lang="fr-FR" altLang="fr-FR" sz="900" b="0" i="0" u="none" strike="noStrike" cap="none" normalizeH="0" baseline="0" dirty="0">
                 <a:ln>
                   <a:noFill/>
                 </a:ln>
@@ -18515,7 +20739,7 @@
               <a:t>AS </a:t>
             </a:r>
             <a:r>
-              <a:rPr kumimoji="0" lang="fr-FR" altLang="fr-FR" sz="1100" b="0" i="0" u="none" strike="noStrike" cap="none" normalizeH="0" baseline="0" dirty="0" err="1">
+              <a:rPr kumimoji="0" lang="fr-FR" altLang="fr-FR" sz="900" b="0" i="0" u="none" strike="noStrike" cap="none" normalizeH="0" baseline="0" dirty="0" err="1">
                 <a:ln>
                   <a:noFill/>
                 </a:ln>
@@ -18525,10 +20749,10 @@
                 <a:effectLst/>
                 <a:latin typeface="JetBrains Mono"/>
               </a:rPr>
-              <a:t>table_controlee</a:t>
-            </a:r>
-            <a:r>
-              <a:rPr kumimoji="0" lang="fr-FR" altLang="fr-FR" sz="1100" b="0" i="0" u="none" strike="noStrike" cap="none" normalizeH="0" baseline="0" dirty="0">
+              <a:t>total_lignes</a:t>
+            </a:r>
+            <a:br>
+              <a:rPr kumimoji="0" lang="fr-FR" altLang="fr-FR" sz="900" b="0" i="0" u="none" strike="noStrike" cap="none" normalizeH="0" baseline="0" dirty="0">
                 <a:ln>
                   <a:noFill/>
                 </a:ln>
@@ -18538,10 +20762,9 @@
                 <a:effectLst/>
                 <a:latin typeface="JetBrains Mono"/>
               </a:rPr>
-              <a:t>, COUNT(*) </a:t>
-            </a:r>
-            <a:r>
-              <a:rPr kumimoji="0" lang="fr-FR" altLang="fr-FR" sz="1100" b="0" i="0" u="none" strike="noStrike" cap="none" normalizeH="0" baseline="0" dirty="0">
+            </a:br>
+            <a:r>
+              <a:rPr kumimoji="0" lang="fr-FR" altLang="fr-FR" sz="900" b="0" i="0" u="none" strike="noStrike" cap="none" normalizeH="0" baseline="0" dirty="0">
                 <a:ln>
                   <a:noFill/>
                 </a:ln>
@@ -18551,10 +20774,10 @@
                 <a:effectLst/>
                 <a:latin typeface="JetBrains Mono"/>
               </a:rPr>
-              <a:t>AS </a:t>
-            </a:r>
-            <a:r>
-              <a:rPr kumimoji="0" lang="fr-FR" altLang="fr-FR" sz="1100" b="0" i="0" u="none" strike="noStrike" cap="none" normalizeH="0" baseline="0" dirty="0" err="1">
+              <a:t>FROM </a:t>
+            </a:r>
+            <a:r>
+              <a:rPr kumimoji="0" lang="fr-FR" altLang="fr-FR" sz="900" b="0" i="0" u="none" strike="noStrike" cap="none" normalizeH="0" baseline="0" dirty="0">
                 <a:ln>
                   <a:noFill/>
                 </a:ln>
@@ -18564,10 +20787,10 @@
                 <a:effectLst/>
                 <a:latin typeface="JetBrains Mono"/>
               </a:rPr>
-              <a:t>total_lignes</a:t>
+              <a:t>performance</a:t>
             </a:r>
             <a:br>
-              <a:rPr kumimoji="0" lang="fr-FR" altLang="fr-FR" sz="1100" b="0" i="0" u="none" strike="noStrike" cap="none" normalizeH="0" baseline="0" dirty="0">
+              <a:rPr kumimoji="0" lang="fr-FR" altLang="fr-FR" sz="900" b="0" i="0" u="none" strike="noStrike" cap="none" normalizeH="0" baseline="0" dirty="0">
                 <a:ln>
                   <a:noFill/>
                 </a:ln>
@@ -18578,33 +20801,239 @@
                 <a:latin typeface="JetBrains Mono"/>
               </a:rPr>
             </a:br>
-            <a:r>
-              <a:rPr kumimoji="0" lang="fr-FR" altLang="fr-FR" sz="1100" b="0" i="0" u="none" strike="noStrike" cap="none" normalizeH="0" baseline="0" dirty="0">
+            <a:br>
+              <a:rPr kumimoji="0" lang="fr-FR" altLang="fr-FR" sz="900" b="0" i="0" u="none" strike="noStrike" cap="none" normalizeH="0" baseline="0" dirty="0">
                 <a:ln>
                   <a:noFill/>
                 </a:ln>
                 <a:solidFill>
-                  <a:srgbClr val="CF8E6D"/>
+                  <a:srgbClr val="BCBEC4"/>
                 </a:solidFill>
                 <a:effectLst/>
                 <a:latin typeface="JetBrains Mono"/>
               </a:rPr>
-              <a:t>FROM </a:t>
-            </a:r>
-            <a:r>
-              <a:rPr kumimoji="0" lang="fr-FR" altLang="fr-FR" sz="1100" b="0" i="0" u="none" strike="noStrike" cap="none" normalizeH="0" baseline="0" dirty="0" err="1">
+            </a:br>
+            <a:r>
+              <a:rPr kumimoji="0" lang="fr-FR" altLang="fr-FR" sz="900" b="0" i="0" u="none" strike="noStrike" cap="none" normalizeH="0" baseline="0" dirty="0">
                 <a:ln>
                   <a:noFill/>
                 </a:ln>
                 <a:solidFill>
-                  <a:srgbClr val="BCBEC4"/>
+                  <a:srgbClr val="CF8E6D"/>
                 </a:solidFill>
                 <a:effectLst/>
                 <a:latin typeface="JetBrains Mono"/>
               </a:rPr>
+              <a:t>UNION ALL</a:t>
+            </a:r>
+            <a:br>
+              <a:rPr kumimoji="0" lang="fr-FR" altLang="fr-FR" sz="900" b="0" i="0" u="none" strike="noStrike" cap="none" normalizeH="0" baseline="0" dirty="0">
+                <a:ln>
+                  <a:noFill/>
+                </a:ln>
+                <a:solidFill>
+                  <a:srgbClr val="CF8E6D"/>
+                </a:solidFill>
+                <a:effectLst/>
+                <a:latin typeface="JetBrains Mono"/>
+              </a:rPr>
+            </a:br>
+            <a:br>
+              <a:rPr kumimoji="0" lang="fr-FR" altLang="fr-FR" sz="900" b="0" i="0" u="none" strike="noStrike" cap="none" normalizeH="0" baseline="0" dirty="0">
+                <a:ln>
+                  <a:noFill/>
+                </a:ln>
+                <a:solidFill>
+                  <a:srgbClr val="CF8E6D"/>
+                </a:solidFill>
+                <a:effectLst/>
+                <a:latin typeface="JetBrains Mono"/>
+              </a:rPr>
+            </a:br>
+            <a:r>
+              <a:rPr kumimoji="0" lang="fr-FR" altLang="fr-FR" sz="900" b="0" i="0" u="none" strike="noStrike" cap="none" normalizeH="0" baseline="0" dirty="0">
+                <a:ln>
+                  <a:noFill/>
+                </a:ln>
+                <a:solidFill>
+                  <a:srgbClr val="CF8E6D"/>
+                </a:solidFill>
+                <a:effectLst/>
+                <a:latin typeface="JetBrains Mono"/>
+              </a:rPr>
+              <a:t>SELECT </a:t>
+            </a:r>
+            <a:r>
+              <a:rPr kumimoji="0" lang="fr-FR" altLang="fr-FR" sz="900" b="0" i="0" u="none" strike="noStrike" cap="none" normalizeH="0" baseline="0" dirty="0">
+                <a:ln>
+                  <a:noFill/>
+                </a:ln>
+                <a:solidFill>
+                  <a:srgbClr val="6AAB73"/>
+                </a:solidFill>
+                <a:effectLst/>
+                <a:latin typeface="JetBrains Mono"/>
+              </a:rPr>
+              <a:t>'Temps de jeu' </a:t>
+            </a:r>
+            <a:r>
+              <a:rPr kumimoji="0" lang="fr-FR" altLang="fr-FR" sz="900" b="0" i="0" u="none" strike="noStrike" cap="none" normalizeH="0" baseline="0" dirty="0">
+                <a:ln>
+                  <a:noFill/>
+                </a:ln>
+                <a:solidFill>
+                  <a:srgbClr val="CF8E6D"/>
+                </a:solidFill>
+                <a:effectLst/>
+                <a:latin typeface="JetBrains Mono"/>
+              </a:rPr>
+              <a:t>AS </a:t>
+            </a:r>
+            <a:r>
+              <a:rPr kumimoji="0" lang="fr-FR" altLang="fr-FR" sz="900" b="0" i="0" u="none" strike="noStrike" cap="none" normalizeH="0" baseline="0" dirty="0" err="1">
+                <a:ln>
+                  <a:noFill/>
+                </a:ln>
+                <a:solidFill>
+                  <a:srgbClr val="BCBEC4"/>
+                </a:solidFill>
+                <a:effectLst/>
+                <a:latin typeface="JetBrains Mono"/>
+              </a:rPr>
+              <a:t>table_controlee</a:t>
+            </a:r>
+            <a:r>
+              <a:rPr kumimoji="0" lang="fr-FR" altLang="fr-FR" sz="900" b="0" i="0" u="none" strike="noStrike" cap="none" normalizeH="0" baseline="0" dirty="0">
+                <a:ln>
+                  <a:noFill/>
+                </a:ln>
+                <a:solidFill>
+                  <a:srgbClr val="BCBEC4"/>
+                </a:solidFill>
+                <a:effectLst/>
+                <a:latin typeface="JetBrains Mono"/>
+              </a:rPr>
+              <a:t>, </a:t>
+            </a:r>
+            <a:r>
+              <a:rPr kumimoji="0" lang="fr-FR" altLang="fr-FR" sz="900" b="0" i="0" u="none" strike="noStrike" cap="none" normalizeH="0" baseline="0" dirty="0">
+                <a:ln>
+                  <a:noFill/>
+                </a:ln>
+                <a:solidFill>
+                  <a:schemeClr val="accent3">
+                    <a:lumMod val="75000"/>
+                  </a:schemeClr>
+                </a:solidFill>
+                <a:effectLst/>
+                <a:latin typeface="JetBrains Mono"/>
+              </a:rPr>
+              <a:t>COUNT</a:t>
+            </a:r>
+            <a:r>
+              <a:rPr kumimoji="0" lang="fr-FR" altLang="fr-FR" sz="900" b="0" i="0" u="none" strike="noStrike" cap="none" normalizeH="0" baseline="0" dirty="0">
+                <a:ln>
+                  <a:noFill/>
+                </a:ln>
+                <a:solidFill>
+                  <a:srgbClr val="BCBEC4"/>
+                </a:solidFill>
+                <a:effectLst/>
+                <a:latin typeface="JetBrains Mono"/>
+              </a:rPr>
+              <a:t>(</a:t>
+            </a:r>
+            <a:r>
+              <a:rPr kumimoji="0" lang="fr-FR" altLang="fr-FR" sz="900" b="0" i="0" u="none" strike="noStrike" cap="none" normalizeH="0" baseline="0" dirty="0">
+                <a:ln>
+                  <a:noFill/>
+                </a:ln>
+                <a:solidFill>
+                  <a:srgbClr val="FFFF00"/>
+                </a:solidFill>
+                <a:effectLst/>
+                <a:latin typeface="JetBrains Mono"/>
+              </a:rPr>
+              <a:t>*</a:t>
+            </a:r>
+            <a:r>
+              <a:rPr kumimoji="0" lang="fr-FR" altLang="fr-FR" sz="900" b="0" i="0" u="none" strike="noStrike" cap="none" normalizeH="0" baseline="0" dirty="0">
+                <a:ln>
+                  <a:noFill/>
+                </a:ln>
+                <a:solidFill>
+                  <a:srgbClr val="BCBEC4"/>
+                </a:solidFill>
+                <a:effectLst/>
+                <a:latin typeface="JetBrains Mono"/>
+              </a:rPr>
+              <a:t>) </a:t>
+            </a:r>
+            <a:r>
+              <a:rPr kumimoji="0" lang="fr-FR" altLang="fr-FR" sz="900" b="0" i="0" u="none" strike="noStrike" cap="none" normalizeH="0" baseline="0" dirty="0">
+                <a:ln>
+                  <a:noFill/>
+                </a:ln>
+                <a:solidFill>
+                  <a:srgbClr val="CF8E6D"/>
+                </a:solidFill>
+                <a:effectLst/>
+                <a:latin typeface="JetBrains Mono"/>
+              </a:rPr>
+              <a:t>AS </a:t>
+            </a:r>
+            <a:r>
+              <a:rPr kumimoji="0" lang="fr-FR" altLang="fr-FR" sz="900" b="0" i="0" u="none" strike="noStrike" cap="none" normalizeH="0" baseline="0" dirty="0" err="1">
+                <a:ln>
+                  <a:noFill/>
+                </a:ln>
+                <a:solidFill>
+                  <a:srgbClr val="BCBEC4"/>
+                </a:solidFill>
+                <a:effectLst/>
+                <a:latin typeface="JetBrains Mono"/>
+              </a:rPr>
+              <a:t>total_lignes</a:t>
+            </a:r>
+            <a:br>
+              <a:rPr kumimoji="0" lang="fr-FR" altLang="fr-FR" sz="900" b="0" i="0" u="none" strike="noStrike" cap="none" normalizeH="0" baseline="0" dirty="0">
+                <a:ln>
+                  <a:noFill/>
+                </a:ln>
+                <a:solidFill>
+                  <a:srgbClr val="BCBEC4"/>
+                </a:solidFill>
+                <a:effectLst/>
+                <a:latin typeface="JetBrains Mono"/>
+              </a:rPr>
+            </a:br>
+            <a:r>
+              <a:rPr kumimoji="0" lang="fr-FR" altLang="fr-FR" sz="900" b="0" i="0" u="none" strike="noStrike" cap="none" normalizeH="0" baseline="0" dirty="0">
+                <a:ln>
+                  <a:noFill/>
+                </a:ln>
+                <a:solidFill>
+                  <a:srgbClr val="CF8E6D"/>
+                </a:solidFill>
+                <a:effectLst/>
+                <a:latin typeface="JetBrains Mono"/>
+              </a:rPr>
+              <a:t>FROM </a:t>
+            </a:r>
+            <a:r>
+              <a:rPr kumimoji="0" lang="fr-FR" altLang="fr-FR" sz="900" b="0" i="0" u="none" strike="noStrike" cap="none" normalizeH="0" baseline="0" dirty="0" err="1">
+                <a:ln>
+                  <a:noFill/>
+                </a:ln>
+                <a:solidFill>
+                  <a:srgbClr val="BCBEC4"/>
+                </a:solidFill>
+                <a:effectLst/>
+                <a:latin typeface="JetBrains Mono"/>
+              </a:rPr>
               <a:t>temps_de_jeu</a:t>
             </a:r>
-            <a:endParaRPr kumimoji="0" lang="fr-FR" altLang="fr-FR" sz="1100" b="0" i="0" u="none" strike="noStrike" cap="none" normalizeH="0" baseline="0" dirty="0">
+            <a:endParaRPr kumimoji="0" lang="fr-FR" altLang="fr-FR" sz="900" b="0" i="0" u="none" strike="noStrike" cap="none" normalizeH="0" baseline="0" dirty="0">
               <a:ln>
                 <a:noFill/>
               </a:ln>
@@ -18632,15 +21061,773 @@
               <a:buNone/>
               <a:tabLst/>
             </a:pPr>
-            <a:r>
-              <a:rPr lang="fr-FR" altLang="fr-FR" sz="1100" dirty="0">
-                <a:solidFill>
-                  <a:srgbClr val="FF0000"/>
-                </a:solidFill>
+            <a:endParaRPr lang="fr-FR" altLang="fr-FR" sz="900" dirty="0">
+              <a:solidFill>
+                <a:srgbClr val="BCBEC4"/>
+              </a:solidFill>
+              <a:latin typeface="JetBrains Mono"/>
+            </a:endParaRPr>
+          </a:p>
+          <a:p>
+            <a:pPr marL="0" marR="0" lvl="0" indent="0" algn="l" defTabSz="914400" rtl="0" eaLnBrk="0" fontAlgn="base" latinLnBrk="0" hangingPunct="0">
+              <a:lnSpc>
+                <a:spcPct val="100000"/>
+              </a:lnSpc>
+              <a:spcBef>
+                <a:spcPct val="0"/>
+              </a:spcBef>
+              <a:spcAft>
+                <a:spcPct val="0"/>
+              </a:spcAft>
+              <a:buClrTx/>
+              <a:buSzTx/>
+              <a:buFontTx/>
+              <a:buNone/>
+              <a:tabLst/>
+            </a:pPr>
+            <a:r>
+              <a:rPr kumimoji="0" lang="en-US" altLang="fr-FR" sz="900" b="0" i="0" u="none" strike="noStrike" cap="none" normalizeH="0" baseline="0" dirty="0">
+                <a:ln>
+                  <a:noFill/>
+                </a:ln>
+                <a:solidFill>
+                  <a:srgbClr val="BA8062"/>
+                </a:solidFill>
+                <a:effectLst/>
                 <a:latin typeface="JetBrains Mono"/>
               </a:rPr>
-              <a:t>…</a:t>
-            </a:r>
+              <a:t>SELECT</a:t>
+            </a:r>
+            <a:r>
+              <a:rPr kumimoji="0" lang="en-US" altLang="fr-FR" sz="900" b="0" i="0" u="none" strike="noStrike" cap="none" normalizeH="0" baseline="0" dirty="0">
+                <a:ln>
+                  <a:noFill/>
+                </a:ln>
+                <a:solidFill>
+                  <a:srgbClr val="BCBEC4"/>
+                </a:solidFill>
+                <a:effectLst/>
+                <a:latin typeface="JetBrains Mono"/>
+              </a:rPr>
+              <a:t> </a:t>
+            </a:r>
+            <a:r>
+              <a:rPr kumimoji="0" lang="en-US" altLang="fr-FR" sz="900" b="0" i="0" u="none" strike="noStrike" cap="none" normalizeH="0" baseline="0" dirty="0">
+                <a:ln>
+                  <a:noFill/>
+                </a:ln>
+                <a:solidFill>
+                  <a:srgbClr val="619B69"/>
+                </a:solidFill>
+                <a:effectLst/>
+                <a:latin typeface="JetBrains Mono"/>
+              </a:rPr>
+              <a:t>'</a:t>
+            </a:r>
+            <a:r>
+              <a:rPr kumimoji="0" lang="en-US" altLang="fr-FR" sz="900" b="0" i="0" u="none" strike="noStrike" cap="none" normalizeH="0" baseline="0" dirty="0" err="1">
+                <a:ln>
+                  <a:noFill/>
+                </a:ln>
+                <a:solidFill>
+                  <a:srgbClr val="619B69"/>
+                </a:solidFill>
+                <a:effectLst/>
+                <a:latin typeface="JetBrains Mono"/>
+              </a:rPr>
+              <a:t>Attendu</a:t>
+            </a:r>
+            <a:r>
+              <a:rPr kumimoji="0" lang="en-US" altLang="fr-FR" sz="900" b="0" i="0" u="none" strike="noStrike" cap="none" normalizeH="0" baseline="0" dirty="0">
+                <a:ln>
+                  <a:noFill/>
+                </a:ln>
+                <a:solidFill>
+                  <a:srgbClr val="619B69"/>
+                </a:solidFill>
+                <a:effectLst/>
+                <a:latin typeface="JetBrains Mono"/>
+              </a:rPr>
+              <a:t>' </a:t>
+            </a:r>
+            <a:r>
+              <a:rPr kumimoji="0" lang="en-US" altLang="fr-FR" sz="900" b="0" i="0" u="none" strike="noStrike" cap="none" normalizeH="0" baseline="0" dirty="0">
+                <a:ln>
+                  <a:noFill/>
+                </a:ln>
+                <a:solidFill>
+                  <a:srgbClr val="BA8062"/>
+                </a:solidFill>
+                <a:effectLst/>
+                <a:latin typeface="JetBrains Mono"/>
+              </a:rPr>
+              <a:t>AS</a:t>
+            </a:r>
+            <a:r>
+              <a:rPr kumimoji="0" lang="en-US" altLang="fr-FR" sz="900" b="0" i="0" u="none" strike="noStrike" cap="none" normalizeH="0" baseline="0" dirty="0">
+                <a:ln>
+                  <a:noFill/>
+                </a:ln>
+                <a:solidFill>
+                  <a:srgbClr val="BCBEC4"/>
+                </a:solidFill>
+                <a:effectLst/>
+                <a:latin typeface="JetBrains Mono"/>
+              </a:rPr>
+              <a:t> </a:t>
+            </a:r>
+            <a:r>
+              <a:rPr kumimoji="0" lang="en-US" altLang="fr-FR" sz="900" b="0" i="0" u="none" strike="noStrike" cap="none" normalizeH="0" baseline="0" dirty="0" err="1">
+                <a:ln>
+                  <a:noFill/>
+                </a:ln>
+                <a:solidFill>
+                  <a:srgbClr val="BCBEC4"/>
+                </a:solidFill>
+                <a:effectLst/>
+                <a:latin typeface="JetBrains Mono"/>
+              </a:rPr>
+              <a:t>table_controlee</a:t>
+            </a:r>
+            <a:r>
+              <a:rPr kumimoji="0" lang="en-US" altLang="fr-FR" sz="900" b="0" i="0" u="none" strike="noStrike" cap="none" normalizeH="0" baseline="0" dirty="0">
+                <a:ln>
+                  <a:noFill/>
+                </a:ln>
+                <a:solidFill>
+                  <a:srgbClr val="BCBEC4"/>
+                </a:solidFill>
+                <a:effectLst/>
+                <a:latin typeface="JetBrains Mono"/>
+              </a:rPr>
+              <a:t>, </a:t>
+            </a:r>
+            <a:r>
+              <a:rPr kumimoji="0" lang="en-US" altLang="fr-FR" sz="900" b="0" i="0" u="none" strike="noStrike" cap="none" normalizeH="0" baseline="0" dirty="0">
+                <a:ln>
+                  <a:noFill/>
+                </a:ln>
+                <a:solidFill>
+                  <a:schemeClr val="accent3">
+                    <a:lumMod val="75000"/>
+                  </a:schemeClr>
+                </a:solidFill>
+                <a:effectLst/>
+                <a:latin typeface="JetBrains Mono"/>
+              </a:rPr>
+              <a:t>COUNT</a:t>
+            </a:r>
+            <a:r>
+              <a:rPr kumimoji="0" lang="en-US" altLang="fr-FR" sz="900" b="0" i="0" u="none" strike="noStrike" cap="none" normalizeH="0" baseline="0" dirty="0">
+                <a:ln>
+                  <a:noFill/>
+                </a:ln>
+                <a:solidFill>
+                  <a:srgbClr val="BCBEC4"/>
+                </a:solidFill>
+                <a:effectLst/>
+                <a:latin typeface="JetBrains Mono"/>
+              </a:rPr>
+              <a:t>(</a:t>
+            </a:r>
+            <a:r>
+              <a:rPr kumimoji="0" lang="en-US" altLang="fr-FR" sz="900" b="0" i="0" u="none" strike="noStrike" cap="none" normalizeH="0" baseline="0" dirty="0">
+                <a:ln>
+                  <a:noFill/>
+                </a:ln>
+                <a:solidFill>
+                  <a:srgbClr val="FFFF00"/>
+                </a:solidFill>
+                <a:effectLst/>
+                <a:latin typeface="JetBrains Mono"/>
+              </a:rPr>
+              <a:t>*</a:t>
+            </a:r>
+            <a:r>
+              <a:rPr kumimoji="0" lang="en-US" altLang="fr-FR" sz="900" b="0" i="0" u="none" strike="noStrike" cap="none" normalizeH="0" baseline="0" dirty="0">
+                <a:ln>
+                  <a:noFill/>
+                </a:ln>
+                <a:solidFill>
+                  <a:srgbClr val="BCBEC4"/>
+                </a:solidFill>
+                <a:effectLst/>
+                <a:latin typeface="JetBrains Mono"/>
+              </a:rPr>
+              <a:t>) </a:t>
+            </a:r>
+            <a:r>
+              <a:rPr kumimoji="0" lang="en-US" altLang="fr-FR" sz="900" b="0" i="0" u="none" strike="noStrike" cap="none" normalizeH="0" baseline="0" dirty="0">
+                <a:ln>
+                  <a:noFill/>
+                </a:ln>
+                <a:solidFill>
+                  <a:srgbClr val="BA8062"/>
+                </a:solidFill>
+                <a:effectLst/>
+                <a:latin typeface="JetBrains Mono"/>
+              </a:rPr>
+              <a:t>AS</a:t>
+            </a:r>
+            <a:r>
+              <a:rPr kumimoji="0" lang="en-US" altLang="fr-FR" sz="900" b="0" i="0" u="none" strike="noStrike" cap="none" normalizeH="0" baseline="0" dirty="0">
+                <a:ln>
+                  <a:noFill/>
+                </a:ln>
+                <a:solidFill>
+                  <a:srgbClr val="BCBEC4"/>
+                </a:solidFill>
+                <a:effectLst/>
+                <a:latin typeface="JetBrains Mono"/>
+              </a:rPr>
+              <a:t> </a:t>
+            </a:r>
+            <a:r>
+              <a:rPr kumimoji="0" lang="en-US" altLang="fr-FR" sz="900" b="0" i="0" u="none" strike="noStrike" cap="none" normalizeH="0" baseline="0" dirty="0" err="1">
+                <a:ln>
+                  <a:noFill/>
+                </a:ln>
+                <a:solidFill>
+                  <a:srgbClr val="BCBEC4"/>
+                </a:solidFill>
+                <a:effectLst/>
+                <a:latin typeface="JetBrains Mono"/>
+              </a:rPr>
+              <a:t>total_lignes</a:t>
+            </a:r>
+            <a:endParaRPr kumimoji="0" lang="en-US" altLang="fr-FR" sz="900" b="0" i="0" u="none" strike="noStrike" cap="none" normalizeH="0" baseline="0" dirty="0">
+              <a:ln>
+                <a:noFill/>
+              </a:ln>
+              <a:solidFill>
+                <a:srgbClr val="BCBEC4"/>
+              </a:solidFill>
+              <a:effectLst/>
+              <a:latin typeface="JetBrains Mono"/>
+            </a:endParaRPr>
+          </a:p>
+          <a:p>
+            <a:pPr marL="0" marR="0" lvl="0" indent="0" algn="l" defTabSz="914400" rtl="0" eaLnBrk="0" fontAlgn="base" latinLnBrk="0" hangingPunct="0">
+              <a:lnSpc>
+                <a:spcPct val="100000"/>
+              </a:lnSpc>
+              <a:spcBef>
+                <a:spcPct val="0"/>
+              </a:spcBef>
+              <a:spcAft>
+                <a:spcPct val="0"/>
+              </a:spcAft>
+              <a:buClrTx/>
+              <a:buSzTx/>
+              <a:buFontTx/>
+              <a:buNone/>
+              <a:tabLst/>
+            </a:pPr>
+            <a:r>
+              <a:rPr kumimoji="0" lang="en-US" altLang="fr-FR" sz="900" b="0" i="0" u="none" strike="noStrike" cap="none" normalizeH="0" baseline="0" dirty="0">
+                <a:ln>
+                  <a:noFill/>
+                </a:ln>
+                <a:solidFill>
+                  <a:srgbClr val="BA8062"/>
+                </a:solidFill>
+                <a:effectLst/>
+                <a:latin typeface="JetBrains Mono"/>
+              </a:rPr>
+              <a:t>FROM</a:t>
+            </a:r>
+            <a:r>
+              <a:rPr kumimoji="0" lang="en-US" altLang="fr-FR" sz="900" b="0" i="0" u="none" strike="noStrike" cap="none" normalizeH="0" baseline="0" dirty="0">
+                <a:ln>
+                  <a:noFill/>
+                </a:ln>
+                <a:solidFill>
+                  <a:srgbClr val="BCBEC4"/>
+                </a:solidFill>
+                <a:effectLst/>
+                <a:latin typeface="JetBrains Mono"/>
+              </a:rPr>
+              <a:t> </a:t>
+            </a:r>
+            <a:r>
+              <a:rPr kumimoji="0" lang="en-US" altLang="fr-FR" sz="900" b="0" i="0" u="none" strike="noStrike" cap="none" normalizeH="0" baseline="0" dirty="0" err="1">
+                <a:ln>
+                  <a:noFill/>
+                </a:ln>
+                <a:solidFill>
+                  <a:srgbClr val="BCBEC4"/>
+                </a:solidFill>
+                <a:effectLst/>
+                <a:latin typeface="JetBrains Mono"/>
+              </a:rPr>
+              <a:t>attendu</a:t>
+            </a:r>
+            <a:endParaRPr kumimoji="0" lang="en-US" altLang="fr-FR" sz="900" b="0" i="0" u="none" strike="noStrike" cap="none" normalizeH="0" baseline="0" dirty="0">
+              <a:ln>
+                <a:noFill/>
+              </a:ln>
+              <a:solidFill>
+                <a:srgbClr val="BCBEC4"/>
+              </a:solidFill>
+              <a:effectLst/>
+              <a:latin typeface="JetBrains Mono"/>
+            </a:endParaRPr>
+          </a:p>
+          <a:p>
+            <a:pPr marL="0" marR="0" lvl="0" indent="0" algn="l" defTabSz="914400" rtl="0" eaLnBrk="0" fontAlgn="base" latinLnBrk="0" hangingPunct="0">
+              <a:lnSpc>
+                <a:spcPct val="100000"/>
+              </a:lnSpc>
+              <a:spcBef>
+                <a:spcPct val="0"/>
+              </a:spcBef>
+              <a:spcAft>
+                <a:spcPct val="0"/>
+              </a:spcAft>
+              <a:buClrTx/>
+              <a:buSzTx/>
+              <a:buFontTx/>
+              <a:buNone/>
+              <a:tabLst/>
+            </a:pPr>
+            <a:endParaRPr kumimoji="0" lang="en-US" altLang="fr-FR" sz="900" b="0" i="0" u="none" strike="noStrike" cap="none" normalizeH="0" baseline="0" dirty="0">
+              <a:ln>
+                <a:noFill/>
+              </a:ln>
+              <a:solidFill>
+                <a:srgbClr val="BCBEC4"/>
+              </a:solidFill>
+              <a:effectLst/>
+              <a:latin typeface="JetBrains Mono"/>
+            </a:endParaRPr>
+          </a:p>
+          <a:p>
+            <a:pPr marL="0" marR="0" lvl="0" indent="0" algn="l" defTabSz="914400" rtl="0" eaLnBrk="0" fontAlgn="base" latinLnBrk="0" hangingPunct="0">
+              <a:lnSpc>
+                <a:spcPct val="100000"/>
+              </a:lnSpc>
+              <a:spcBef>
+                <a:spcPct val="0"/>
+              </a:spcBef>
+              <a:spcAft>
+                <a:spcPct val="0"/>
+              </a:spcAft>
+              <a:buClrTx/>
+              <a:buSzTx/>
+              <a:buFontTx/>
+              <a:buNone/>
+              <a:tabLst/>
+            </a:pPr>
+            <a:r>
+              <a:rPr kumimoji="0" lang="en-US" altLang="fr-FR" sz="900" b="0" i="0" u="none" strike="noStrike" cap="none" normalizeH="0" baseline="0" dirty="0">
+                <a:ln>
+                  <a:noFill/>
+                </a:ln>
+                <a:solidFill>
+                  <a:srgbClr val="BA8062"/>
+                </a:solidFill>
+                <a:effectLst/>
+                <a:latin typeface="JetBrains Mono"/>
+              </a:rPr>
+              <a:t>UNION ALL</a:t>
+            </a:r>
+          </a:p>
+          <a:p>
+            <a:pPr marL="0" marR="0" lvl="0" indent="0" algn="l" defTabSz="914400" rtl="0" eaLnBrk="0" fontAlgn="base" latinLnBrk="0" hangingPunct="0">
+              <a:lnSpc>
+                <a:spcPct val="100000"/>
+              </a:lnSpc>
+              <a:spcBef>
+                <a:spcPct val="0"/>
+              </a:spcBef>
+              <a:spcAft>
+                <a:spcPct val="0"/>
+              </a:spcAft>
+              <a:buClrTx/>
+              <a:buSzTx/>
+              <a:buFontTx/>
+              <a:buNone/>
+              <a:tabLst/>
+            </a:pPr>
+            <a:endParaRPr kumimoji="0" lang="en-US" altLang="fr-FR" sz="900" b="0" i="0" u="none" strike="noStrike" cap="none" normalizeH="0" baseline="0" dirty="0">
+              <a:ln>
+                <a:noFill/>
+              </a:ln>
+              <a:solidFill>
+                <a:srgbClr val="BCBEC4"/>
+              </a:solidFill>
+              <a:effectLst/>
+              <a:latin typeface="JetBrains Mono"/>
+            </a:endParaRPr>
+          </a:p>
+          <a:p>
+            <a:pPr marL="0" marR="0" lvl="0" indent="0" algn="l" defTabSz="914400" rtl="0" eaLnBrk="0" fontAlgn="base" latinLnBrk="0" hangingPunct="0">
+              <a:lnSpc>
+                <a:spcPct val="100000"/>
+              </a:lnSpc>
+              <a:spcBef>
+                <a:spcPct val="0"/>
+              </a:spcBef>
+              <a:spcAft>
+                <a:spcPct val="0"/>
+              </a:spcAft>
+              <a:buClrTx/>
+              <a:buSzTx/>
+              <a:buFontTx/>
+              <a:buNone/>
+              <a:tabLst/>
+            </a:pPr>
+            <a:r>
+              <a:rPr kumimoji="0" lang="en-US" altLang="fr-FR" sz="900" b="0" i="0" u="none" strike="noStrike" cap="none" normalizeH="0" baseline="0" dirty="0">
+                <a:ln>
+                  <a:noFill/>
+                </a:ln>
+                <a:solidFill>
+                  <a:srgbClr val="BA8062"/>
+                </a:solidFill>
+                <a:effectLst/>
+                <a:latin typeface="JetBrains Mono"/>
+              </a:rPr>
+              <a:t>SELECT</a:t>
+            </a:r>
+            <a:r>
+              <a:rPr kumimoji="0" lang="en-US" altLang="fr-FR" sz="900" b="0" i="0" u="none" strike="noStrike" cap="none" normalizeH="0" baseline="0" dirty="0">
+                <a:ln>
+                  <a:noFill/>
+                </a:ln>
+                <a:solidFill>
+                  <a:srgbClr val="BCBEC4"/>
+                </a:solidFill>
+                <a:effectLst/>
+                <a:latin typeface="JetBrains Mono"/>
+              </a:rPr>
+              <a:t> </a:t>
+            </a:r>
+            <a:r>
+              <a:rPr kumimoji="0" lang="en-US" altLang="fr-FR" sz="900" b="0" i="0" u="none" strike="noStrike" cap="none" normalizeH="0" baseline="0" dirty="0">
+                <a:ln>
+                  <a:noFill/>
+                </a:ln>
+                <a:solidFill>
+                  <a:srgbClr val="619B69"/>
+                </a:solidFill>
+                <a:effectLst/>
+                <a:latin typeface="JetBrains Mono"/>
+              </a:rPr>
+              <a:t>'Progression' </a:t>
+            </a:r>
+            <a:r>
+              <a:rPr kumimoji="0" lang="en-US" altLang="fr-FR" sz="900" b="0" i="0" u="none" strike="noStrike" cap="none" normalizeH="0" baseline="0" dirty="0">
+                <a:ln>
+                  <a:noFill/>
+                </a:ln>
+                <a:solidFill>
+                  <a:srgbClr val="BA8062"/>
+                </a:solidFill>
+                <a:effectLst/>
+                <a:latin typeface="JetBrains Mono"/>
+              </a:rPr>
+              <a:t>AS</a:t>
+            </a:r>
+            <a:r>
+              <a:rPr kumimoji="0" lang="en-US" altLang="fr-FR" sz="900" b="0" i="0" u="none" strike="noStrike" cap="none" normalizeH="0" baseline="0" dirty="0">
+                <a:ln>
+                  <a:noFill/>
+                </a:ln>
+                <a:solidFill>
+                  <a:srgbClr val="BCBEC4"/>
+                </a:solidFill>
+                <a:effectLst/>
+                <a:latin typeface="JetBrains Mono"/>
+              </a:rPr>
+              <a:t> </a:t>
+            </a:r>
+            <a:r>
+              <a:rPr kumimoji="0" lang="en-US" altLang="fr-FR" sz="900" b="0" i="0" u="none" strike="noStrike" cap="none" normalizeH="0" baseline="0" dirty="0" err="1">
+                <a:ln>
+                  <a:noFill/>
+                </a:ln>
+                <a:solidFill>
+                  <a:srgbClr val="BCBEC4"/>
+                </a:solidFill>
+                <a:effectLst/>
+                <a:latin typeface="JetBrains Mono"/>
+              </a:rPr>
+              <a:t>table_controlee</a:t>
+            </a:r>
+            <a:r>
+              <a:rPr kumimoji="0" lang="en-US" altLang="fr-FR" sz="900" b="0" i="0" u="none" strike="noStrike" cap="none" normalizeH="0" baseline="0" dirty="0">
+                <a:ln>
+                  <a:noFill/>
+                </a:ln>
+                <a:solidFill>
+                  <a:srgbClr val="BCBEC4"/>
+                </a:solidFill>
+                <a:effectLst/>
+                <a:latin typeface="JetBrains Mono"/>
+              </a:rPr>
+              <a:t>, </a:t>
+            </a:r>
+            <a:r>
+              <a:rPr kumimoji="0" lang="en-US" altLang="fr-FR" sz="900" b="0" i="0" u="none" strike="noStrike" cap="none" normalizeH="0" baseline="0" dirty="0">
+                <a:ln>
+                  <a:noFill/>
+                </a:ln>
+                <a:solidFill>
+                  <a:schemeClr val="accent3">
+                    <a:lumMod val="75000"/>
+                  </a:schemeClr>
+                </a:solidFill>
+                <a:effectLst/>
+                <a:latin typeface="JetBrains Mono"/>
+              </a:rPr>
+              <a:t>COUNT</a:t>
+            </a:r>
+            <a:r>
+              <a:rPr kumimoji="0" lang="en-US" altLang="fr-FR" sz="900" b="0" i="0" u="none" strike="noStrike" cap="none" normalizeH="0" baseline="0" dirty="0">
+                <a:ln>
+                  <a:noFill/>
+                </a:ln>
+                <a:solidFill>
+                  <a:srgbClr val="BCBEC4"/>
+                </a:solidFill>
+                <a:effectLst/>
+                <a:latin typeface="JetBrains Mono"/>
+              </a:rPr>
+              <a:t>(</a:t>
+            </a:r>
+            <a:r>
+              <a:rPr kumimoji="0" lang="en-US" altLang="fr-FR" sz="900" b="0" i="0" u="none" strike="noStrike" cap="none" normalizeH="0" baseline="0" dirty="0">
+                <a:ln>
+                  <a:noFill/>
+                </a:ln>
+                <a:solidFill>
+                  <a:srgbClr val="FFFF00"/>
+                </a:solidFill>
+                <a:effectLst/>
+                <a:latin typeface="JetBrains Mono"/>
+              </a:rPr>
+              <a:t>*</a:t>
+            </a:r>
+            <a:r>
+              <a:rPr kumimoji="0" lang="en-US" altLang="fr-FR" sz="900" b="0" i="0" u="none" strike="noStrike" cap="none" normalizeH="0" baseline="0" dirty="0">
+                <a:ln>
+                  <a:noFill/>
+                </a:ln>
+                <a:solidFill>
+                  <a:srgbClr val="BCBEC4"/>
+                </a:solidFill>
+                <a:effectLst/>
+                <a:latin typeface="JetBrains Mono"/>
+              </a:rPr>
+              <a:t>) </a:t>
+            </a:r>
+            <a:r>
+              <a:rPr kumimoji="0" lang="en-US" altLang="fr-FR" sz="900" b="0" i="0" u="none" strike="noStrike" cap="none" normalizeH="0" baseline="0" dirty="0">
+                <a:ln>
+                  <a:noFill/>
+                </a:ln>
+                <a:solidFill>
+                  <a:srgbClr val="BA8062"/>
+                </a:solidFill>
+                <a:effectLst/>
+                <a:latin typeface="JetBrains Mono"/>
+              </a:rPr>
+              <a:t>AS</a:t>
+            </a:r>
+            <a:r>
+              <a:rPr kumimoji="0" lang="en-US" altLang="fr-FR" sz="900" b="0" i="0" u="none" strike="noStrike" cap="none" normalizeH="0" baseline="0" dirty="0">
+                <a:ln>
+                  <a:noFill/>
+                </a:ln>
+                <a:solidFill>
+                  <a:srgbClr val="BCBEC4"/>
+                </a:solidFill>
+                <a:effectLst/>
+                <a:latin typeface="JetBrains Mono"/>
+              </a:rPr>
+              <a:t> </a:t>
+            </a:r>
+            <a:r>
+              <a:rPr kumimoji="0" lang="en-US" altLang="fr-FR" sz="900" b="0" i="0" u="none" strike="noStrike" cap="none" normalizeH="0" baseline="0" dirty="0" err="1">
+                <a:ln>
+                  <a:noFill/>
+                </a:ln>
+                <a:solidFill>
+                  <a:srgbClr val="BCBEC4"/>
+                </a:solidFill>
+                <a:effectLst/>
+                <a:latin typeface="JetBrains Mono"/>
+              </a:rPr>
+              <a:t>total_lignes</a:t>
+            </a:r>
+            <a:endParaRPr kumimoji="0" lang="en-US" altLang="fr-FR" sz="900" b="0" i="0" u="none" strike="noStrike" cap="none" normalizeH="0" baseline="0" dirty="0">
+              <a:ln>
+                <a:noFill/>
+              </a:ln>
+              <a:solidFill>
+                <a:srgbClr val="BCBEC4"/>
+              </a:solidFill>
+              <a:effectLst/>
+              <a:latin typeface="JetBrains Mono"/>
+            </a:endParaRPr>
+          </a:p>
+          <a:p>
+            <a:pPr marL="0" marR="0" lvl="0" indent="0" algn="l" defTabSz="914400" rtl="0" eaLnBrk="0" fontAlgn="base" latinLnBrk="0" hangingPunct="0">
+              <a:lnSpc>
+                <a:spcPct val="100000"/>
+              </a:lnSpc>
+              <a:spcBef>
+                <a:spcPct val="0"/>
+              </a:spcBef>
+              <a:spcAft>
+                <a:spcPct val="0"/>
+              </a:spcAft>
+              <a:buClrTx/>
+              <a:buSzTx/>
+              <a:buFontTx/>
+              <a:buNone/>
+              <a:tabLst/>
+            </a:pPr>
+            <a:r>
+              <a:rPr kumimoji="0" lang="en-US" altLang="fr-FR" sz="900" b="0" i="0" u="none" strike="noStrike" cap="none" normalizeH="0" baseline="0" dirty="0">
+                <a:ln>
+                  <a:noFill/>
+                </a:ln>
+                <a:solidFill>
+                  <a:srgbClr val="BA8062"/>
+                </a:solidFill>
+                <a:effectLst/>
+                <a:latin typeface="JetBrains Mono"/>
+              </a:rPr>
+              <a:t>FROM</a:t>
+            </a:r>
+            <a:r>
+              <a:rPr kumimoji="0" lang="en-US" altLang="fr-FR" sz="900" b="0" i="0" u="none" strike="noStrike" cap="none" normalizeH="0" baseline="0" dirty="0">
+                <a:ln>
+                  <a:noFill/>
+                </a:ln>
+                <a:solidFill>
+                  <a:srgbClr val="BCBEC4"/>
+                </a:solidFill>
+                <a:effectLst/>
+                <a:latin typeface="JetBrains Mono"/>
+              </a:rPr>
+              <a:t> progression</a:t>
+            </a:r>
+          </a:p>
+          <a:p>
+            <a:pPr marL="0" marR="0" lvl="0" indent="0" algn="l" defTabSz="914400" rtl="0" eaLnBrk="0" fontAlgn="base" latinLnBrk="0" hangingPunct="0">
+              <a:lnSpc>
+                <a:spcPct val="100000"/>
+              </a:lnSpc>
+              <a:spcBef>
+                <a:spcPct val="0"/>
+              </a:spcBef>
+              <a:spcAft>
+                <a:spcPct val="0"/>
+              </a:spcAft>
+              <a:buClrTx/>
+              <a:buSzTx/>
+              <a:buFontTx/>
+              <a:buNone/>
+              <a:tabLst/>
+            </a:pPr>
+            <a:endParaRPr kumimoji="0" lang="en-US" altLang="fr-FR" sz="900" b="0" i="0" u="none" strike="noStrike" cap="none" normalizeH="0" baseline="0" dirty="0">
+              <a:ln>
+                <a:noFill/>
+              </a:ln>
+              <a:solidFill>
+                <a:srgbClr val="BCBEC4"/>
+              </a:solidFill>
+              <a:effectLst/>
+              <a:latin typeface="JetBrains Mono"/>
+            </a:endParaRPr>
+          </a:p>
+          <a:p>
+            <a:pPr marL="0" marR="0" lvl="0" indent="0" algn="l" defTabSz="914400" rtl="0" eaLnBrk="0" fontAlgn="base" latinLnBrk="0" hangingPunct="0">
+              <a:lnSpc>
+                <a:spcPct val="100000"/>
+              </a:lnSpc>
+              <a:spcBef>
+                <a:spcPct val="0"/>
+              </a:spcBef>
+              <a:spcAft>
+                <a:spcPct val="0"/>
+              </a:spcAft>
+              <a:buClrTx/>
+              <a:buSzTx/>
+              <a:buFontTx/>
+              <a:buNone/>
+              <a:tabLst/>
+            </a:pPr>
+            <a:r>
+              <a:rPr kumimoji="0" lang="en-US" altLang="fr-FR" sz="900" b="0" i="0" u="none" strike="noStrike" cap="none" normalizeH="0" baseline="0" dirty="0">
+                <a:ln>
+                  <a:noFill/>
+                </a:ln>
+                <a:solidFill>
+                  <a:srgbClr val="BA8062"/>
+                </a:solidFill>
+                <a:effectLst/>
+                <a:latin typeface="JetBrains Mono"/>
+              </a:rPr>
+              <a:t>ORDER BY </a:t>
+            </a:r>
+            <a:r>
+              <a:rPr kumimoji="0" lang="en-US" altLang="fr-FR" sz="900" b="0" i="0" u="none" strike="noStrike" cap="none" normalizeH="0" baseline="0" dirty="0" err="1">
+                <a:ln>
+                  <a:noFill/>
+                </a:ln>
+                <a:solidFill>
+                  <a:srgbClr val="BCBEC4"/>
+                </a:solidFill>
+                <a:effectLst/>
+                <a:latin typeface="JetBrains Mono"/>
+              </a:rPr>
+              <a:t>table_controlee</a:t>
+            </a:r>
+            <a:r>
+              <a:rPr kumimoji="0" lang="en-US" altLang="fr-FR" sz="900" b="0" i="0" u="none" strike="noStrike" cap="none" normalizeH="0" baseline="0" dirty="0">
+                <a:ln>
+                  <a:noFill/>
+                </a:ln>
+                <a:solidFill>
+                  <a:srgbClr val="BCBEC4"/>
+                </a:solidFill>
+                <a:effectLst/>
+                <a:latin typeface="JetBrains Mono"/>
+              </a:rPr>
+              <a:t>;</a:t>
+            </a:r>
+            <a:endParaRPr kumimoji="0" lang="fr-FR" altLang="fr-FR" sz="900" b="0" i="0" u="none" strike="noStrike" cap="none" normalizeH="0" baseline="0" dirty="0">
+              <a:ln>
+                <a:noFill/>
+              </a:ln>
+              <a:solidFill>
+                <a:srgbClr val="BCBEC4"/>
+              </a:solidFill>
+              <a:effectLst/>
+              <a:latin typeface="JetBrains Mono"/>
+            </a:endParaRPr>
+          </a:p>
+          <a:p>
+            <a:pPr marL="0" marR="0" lvl="0" indent="0" algn="l" defTabSz="914400" rtl="0" eaLnBrk="0" fontAlgn="base" latinLnBrk="0" hangingPunct="0">
+              <a:lnSpc>
+                <a:spcPct val="100000"/>
+              </a:lnSpc>
+              <a:spcBef>
+                <a:spcPct val="0"/>
+              </a:spcBef>
+              <a:spcAft>
+                <a:spcPct val="0"/>
+              </a:spcAft>
+              <a:buClrTx/>
+              <a:buSzTx/>
+              <a:buFontTx/>
+              <a:buNone/>
+              <a:tabLst/>
+            </a:pPr>
             <a:endParaRPr kumimoji="0" lang="fr-FR" altLang="fr-FR" sz="1100" b="0" i="0" u="none" strike="noStrike" cap="none" normalizeH="0" baseline="0" dirty="0">
               <a:ln>
                 <a:noFill/>
@@ -18650,6 +21837,331 @@
               </a:solidFill>
               <a:effectLst/>
               <a:latin typeface="Arial" panose="020B0604020202020204" pitchFamily="34" charset="0"/>
+            </a:endParaRPr>
+          </a:p>
+        </p:txBody>
+      </p:sp>
+      <p:sp>
+        <p:nvSpPr>
+          <p:cNvPr id="13" name="Text 9"/>
+          <p:cNvSpPr/>
+          <p:nvPr/>
+        </p:nvSpPr>
+        <p:spPr>
+          <a:xfrm>
+            <a:off x="5890788" y="1658606"/>
+            <a:ext cx="3298932" cy="274320"/>
+          </a:xfrm>
+          <a:prstGeom prst="rect">
+            <a:avLst/>
+          </a:prstGeom>
+          <a:noFill/>
+          <a:ln/>
+        </p:spPr>
+        <p:txBody>
+          <a:bodyPr wrap="square" lIns="0" tIns="0" rIns="0" bIns="0" rtlCol="0" anchor="ctr"/>
+          <a:lstStyle/>
+          <a:p>
+            <a:pPr marL="0" indent="0">
+              <a:buNone/>
+            </a:pPr>
+            <a:r>
+              <a:rPr lang="en-US" sz="1700" b="1" dirty="0">
+                <a:solidFill>
+                  <a:srgbClr val="17252A"/>
+                </a:solidFill>
+              </a:rPr>
+              <a:t>Contrôles réalisés</a:t>
+            </a:r>
+            <a:endParaRPr lang="en-US" sz="1700" dirty="0"/>
+          </a:p>
+        </p:txBody>
+      </p:sp>
+      <p:sp>
+        <p:nvSpPr>
+          <p:cNvPr id="14" name="Text 10"/>
+          <p:cNvSpPr/>
+          <p:nvPr/>
+        </p:nvSpPr>
+        <p:spPr>
+          <a:xfrm>
+            <a:off x="5890788" y="2058879"/>
+            <a:ext cx="5426141" cy="684832"/>
+          </a:xfrm>
+          <a:prstGeom prst="rect">
+            <a:avLst/>
+          </a:prstGeom>
+          <a:noFill/>
+          <a:ln/>
+        </p:spPr>
+        <p:txBody>
+          <a:bodyPr wrap="square" lIns="762" tIns="762" rIns="762" bIns="762" rtlCol="0" anchor="t">
+            <a:normAutofit/>
+          </a:bodyPr>
+          <a:lstStyle/>
+          <a:p>
+            <a:pPr marL="171450" indent="-171450">
+              <a:buFont typeface="Wingdings" panose="05000000000000000000" pitchFamily="2" charset="2"/>
+              <a:buChar char="§"/>
+            </a:pPr>
+            <a:r>
+              <a:rPr lang="en-US" sz="1100" dirty="0">
+                <a:solidFill>
+                  <a:srgbClr val="17252A"/>
+                </a:solidFill>
+                <a:latin typeface="Aptos" pitchFamily="34" charset="0"/>
+                <a:ea typeface="Aptos" pitchFamily="34" charset="-122"/>
+                <a:cs typeface="Aptos" pitchFamily="34" charset="-120"/>
+              </a:rPr>
+              <a:t>Volumes par table : joueur, équipe, performance, temps de jeu, xG, progression.</a:t>
+            </a:r>
+            <a:endParaRPr lang="en-US" sz="1100" dirty="0"/>
+          </a:p>
+          <a:p>
+            <a:pPr marL="171450" indent="-171450">
+              <a:buFont typeface="Wingdings" panose="05000000000000000000" pitchFamily="2" charset="2"/>
+              <a:buChar char="§"/>
+            </a:pPr>
+            <a:r>
+              <a:rPr lang="en-US" sz="1100" dirty="0">
+                <a:solidFill>
+                  <a:srgbClr val="17252A"/>
+                </a:solidFill>
+                <a:latin typeface="Aptos" pitchFamily="34" charset="0"/>
+                <a:ea typeface="Aptos" pitchFamily="34" charset="-122"/>
+                <a:cs typeface="Aptos" pitchFamily="34" charset="-120"/>
+              </a:rPr>
+              <a:t>Validité des jointures entre tables métier.</a:t>
+            </a:r>
+            <a:endParaRPr lang="en-US" sz="1100" dirty="0"/>
+          </a:p>
+          <a:p>
+            <a:pPr marL="171450" indent="-171450">
+              <a:buFont typeface="Wingdings" panose="05000000000000000000" pitchFamily="2" charset="2"/>
+              <a:buChar char="§"/>
+            </a:pPr>
+            <a:r>
+              <a:rPr lang="en-US" sz="1100" dirty="0">
+                <a:solidFill>
+                  <a:srgbClr val="17252A"/>
+                </a:solidFill>
+                <a:latin typeface="Aptos" pitchFamily="34" charset="0"/>
+                <a:ea typeface="Aptos" pitchFamily="34" charset="-122"/>
+                <a:cs typeface="Aptos" pitchFamily="34" charset="-120"/>
+              </a:rPr>
+              <a:t>Division sécurisée avec NULLIF dans les ratios.</a:t>
+            </a:r>
+            <a:endParaRPr lang="en-US" sz="1100" dirty="0"/>
+          </a:p>
+          <a:p>
+            <a:pPr marL="171450" indent="-171450">
+              <a:buFont typeface="Wingdings" panose="05000000000000000000" pitchFamily="2" charset="2"/>
+              <a:buChar char="§"/>
+            </a:pPr>
+            <a:r>
+              <a:rPr lang="en-US" sz="1100" dirty="0">
+                <a:solidFill>
+                  <a:srgbClr val="17252A"/>
+                </a:solidFill>
+                <a:latin typeface="Aptos" pitchFamily="34" charset="0"/>
+                <a:ea typeface="Aptos" pitchFamily="34" charset="-122"/>
+                <a:cs typeface="Aptos" pitchFamily="34" charset="-120"/>
+              </a:rPr>
+              <a:t>Comparaison brut vs consolidé pour mesurer l’impact des doublons.</a:t>
+            </a:r>
+            <a:endParaRPr lang="en-US" sz="1100" dirty="0"/>
+          </a:p>
+        </p:txBody>
+      </p:sp>
+      <p:sp>
+        <p:nvSpPr>
+          <p:cNvPr id="15" name="Text 11"/>
+          <p:cNvSpPr/>
+          <p:nvPr/>
+        </p:nvSpPr>
+        <p:spPr>
+          <a:xfrm>
+            <a:off x="5890787" y="2851035"/>
+            <a:ext cx="5341793" cy="420624"/>
+          </a:xfrm>
+          <a:prstGeom prst="rect">
+            <a:avLst/>
+          </a:prstGeom>
+          <a:noFill/>
+          <a:ln/>
+        </p:spPr>
+        <p:txBody>
+          <a:bodyPr wrap="square" lIns="0" tIns="0" rIns="0" bIns="0" rtlCol="0" anchor="ctr">
+            <a:normAutofit/>
+          </a:bodyPr>
+          <a:lstStyle/>
+          <a:p>
+            <a:pPr marL="0" indent="0">
+              <a:buNone/>
+            </a:pPr>
+            <a:r>
+              <a:rPr lang="en-US" sz="1100" b="1" dirty="0">
+                <a:solidFill>
+                  <a:srgbClr val="2E7D32"/>
+                </a:solidFill>
+              </a:rPr>
+              <a:t>Les contrôles limitent le risque d’analyse faussée par un mauvais import ou des valeurs incohérentes.</a:t>
+            </a:r>
+            <a:endParaRPr lang="en-US" sz="1100" dirty="0"/>
+          </a:p>
+        </p:txBody>
+      </p:sp>
+      <p:sp>
+        <p:nvSpPr>
+          <p:cNvPr id="10" name="Shape 2">
+            <a:extLst>
+              <a:ext uri="{FF2B5EF4-FFF2-40B4-BE49-F238E27FC236}">
+                <a16:creationId xmlns:a16="http://schemas.microsoft.com/office/drawing/2014/main" id="{03661550-2089-031E-87F2-C45BEDB65C02}"/>
+              </a:ext>
+            </a:extLst>
+          </p:cNvPr>
+          <p:cNvSpPr/>
+          <p:nvPr/>
+        </p:nvSpPr>
+        <p:spPr>
+          <a:xfrm>
+            <a:off x="502920" y="1124712"/>
+            <a:ext cx="2148840" cy="0"/>
+          </a:xfrm>
+          <a:prstGeom prst="line">
+            <a:avLst/>
+          </a:prstGeom>
+          <a:noFill/>
+          <a:ln w="38100">
+            <a:solidFill>
+              <a:srgbClr val="E20044"/>
+            </a:solidFill>
+            <a:prstDash val="solid"/>
+          </a:ln>
+        </p:spPr>
+        <p:txBody>
+          <a:bodyPr/>
+          <a:lstStyle/>
+          <a:p>
+            <a:endParaRPr/>
+          </a:p>
+        </p:txBody>
+      </p:sp>
+      <p:sp>
+        <p:nvSpPr>
+          <p:cNvPr id="20" name="Shape 8">
+            <a:extLst>
+              <a:ext uri="{FF2B5EF4-FFF2-40B4-BE49-F238E27FC236}">
+                <a16:creationId xmlns:a16="http://schemas.microsoft.com/office/drawing/2014/main" id="{53E4B3FB-C690-B672-913A-131947B76521}"/>
+              </a:ext>
+            </a:extLst>
+          </p:cNvPr>
+          <p:cNvSpPr/>
+          <p:nvPr/>
+        </p:nvSpPr>
+        <p:spPr>
+          <a:xfrm>
+            <a:off x="5698285" y="3610999"/>
+            <a:ext cx="5731715" cy="2352858"/>
+          </a:xfrm>
+          <a:prstGeom prst="roundRect">
+            <a:avLst>
+              <a:gd name="adj" fmla="val 2051"/>
+            </a:avLst>
+          </a:prstGeom>
+          <a:solidFill>
+            <a:schemeClr val="tx1">
+              <a:lumMod val="95000"/>
+              <a:lumOff val="5000"/>
+            </a:schemeClr>
+          </a:solidFill>
+          <a:ln w="12700">
+            <a:solidFill>
+              <a:srgbClr val="DCE4EA"/>
+            </a:solidFill>
+            <a:prstDash val="solid"/>
+          </a:ln>
+          <a:effectLst>
+            <a:outerShdw blurRad="12700" dist="50800" dir="2700000" algn="bl" rotWithShape="0">
+              <a:srgbClr val="000000">
+                <a:alpha val="12000"/>
+              </a:srgbClr>
+            </a:outerShdw>
+          </a:effectLst>
+        </p:spPr>
+      </p:sp>
+      <p:pic>
+        <p:nvPicPr>
+          <p:cNvPr id="19" name="Image 18">
+            <a:extLst>
+              <a:ext uri="{FF2B5EF4-FFF2-40B4-BE49-F238E27FC236}">
+                <a16:creationId xmlns:a16="http://schemas.microsoft.com/office/drawing/2014/main" id="{BAFC5F8B-B701-27CF-33CB-6A8EC8D09723}"/>
+              </a:ext>
+            </a:extLst>
+          </p:cNvPr>
+          <p:cNvPicPr>
+            <a:picLocks noChangeAspect="1"/>
+          </p:cNvPicPr>
+          <p:nvPr/>
+        </p:nvPicPr>
+        <p:blipFill>
+          <a:blip r:embed="rId4"/>
+          <a:stretch>
+            <a:fillRect/>
+          </a:stretch>
+        </p:blipFill>
+        <p:spPr>
+          <a:xfrm>
+            <a:off x="6367546" y="4189768"/>
+            <a:ext cx="4413632" cy="1606567"/>
+          </a:xfrm>
+          <a:prstGeom prst="rect">
+            <a:avLst/>
+          </a:prstGeom>
+        </p:spPr>
+      </p:pic>
+      <p:sp>
+        <p:nvSpPr>
+          <p:cNvPr id="22" name="Text 9">
+            <a:extLst>
+              <a:ext uri="{FF2B5EF4-FFF2-40B4-BE49-F238E27FC236}">
+                <a16:creationId xmlns:a16="http://schemas.microsoft.com/office/drawing/2014/main" id="{B65D3C38-0AC9-13FB-C364-5A48A778E91B}"/>
+              </a:ext>
+            </a:extLst>
+          </p:cNvPr>
+          <p:cNvSpPr/>
+          <p:nvPr/>
+        </p:nvSpPr>
+        <p:spPr>
+          <a:xfrm>
+            <a:off x="5890787" y="3788861"/>
+            <a:ext cx="3182209" cy="274320"/>
+          </a:xfrm>
+          <a:prstGeom prst="rect">
+            <a:avLst/>
+          </a:prstGeom>
+          <a:noFill/>
+          <a:ln/>
+        </p:spPr>
+        <p:txBody>
+          <a:bodyPr wrap="square" lIns="0" tIns="0" rIns="0" bIns="0" rtlCol="0" anchor="ctr"/>
+          <a:lstStyle/>
+          <a:p>
+            <a:pPr marL="0" indent="0">
+              <a:buNone/>
+            </a:pPr>
+            <a:r>
+              <a:rPr lang="en-US" sz="1700" b="1" dirty="0">
+                <a:solidFill>
+                  <a:schemeClr val="bg1"/>
+                </a:solidFill>
+              </a:rPr>
+              <a:t>Résultat</a:t>
+            </a:r>
+            <a:endParaRPr lang="en-US" sz="1700" dirty="0">
+              <a:solidFill>
+                <a:schemeClr val="bg1"/>
+              </a:solidFill>
             </a:endParaRPr>
           </a:p>
         </p:txBody>
@@ -18762,29 +22274,6 @@
           </a:p>
         </p:txBody>
       </p:sp>
-      <p:sp>
-        <p:nvSpPr>
-          <p:cNvPr id="4" name="Shape 2"/>
-          <p:cNvSpPr/>
-          <p:nvPr/>
-        </p:nvSpPr>
-        <p:spPr>
-          <a:xfrm>
-            <a:off x="502920" y="1060704"/>
-            <a:ext cx="11155680" cy="0"/>
-          </a:xfrm>
-          <a:prstGeom prst="line">
-            <a:avLst/>
-          </a:prstGeom>
-          <a:noFill/>
-          <a:ln w="12700">
-            <a:solidFill>
-              <a:srgbClr val="DCE4EA"/>
-            </a:solidFill>
-            <a:prstDash val="solid"/>
-          </a:ln>
-        </p:spPr>
-      </p:sp>
       <p:pic>
         <p:nvPicPr>
           <p:cNvPr id="5" name="Image 0" descr="/mnt/data/assets_spdp/logo_icon.png"/>
@@ -18911,7 +22400,7 @@
         </p:nvSpPr>
         <p:spPr>
           <a:xfrm>
-            <a:off x="685800" y="1234440"/>
+            <a:off x="685800" y="1647394"/>
             <a:ext cx="3246120" cy="3886200"/>
           </a:xfrm>
           <a:prstGeom prst="roundRect">
@@ -18945,7 +22434,7 @@
         </p:nvSpPr>
         <p:spPr>
           <a:xfrm>
-            <a:off x="914400" y="1508760"/>
+            <a:off x="914400" y="1921714"/>
             <a:ext cx="2651760" cy="530352"/>
           </a:xfrm>
           <a:prstGeom prst="rect">
@@ -18995,7 +22484,7 @@
         </p:nvSpPr>
         <p:spPr>
           <a:xfrm>
-            <a:off x="914400" y="2240280"/>
+            <a:off x="914400" y="2653234"/>
             <a:ext cx="2560320" cy="1188720"/>
           </a:xfrm>
           <a:prstGeom prst="rect">
@@ -19061,7 +22550,7 @@
         </p:nvSpPr>
         <p:spPr>
           <a:xfrm>
-            <a:off x="4251960" y="1234440"/>
+            <a:off x="4251960" y="1647394"/>
             <a:ext cx="3246120" cy="3886200"/>
           </a:xfrm>
           <a:prstGeom prst="roundRect">
@@ -19095,7 +22584,7 @@
         </p:nvSpPr>
         <p:spPr>
           <a:xfrm>
-            <a:off x="4480560" y="1508760"/>
+            <a:off x="4480560" y="1921714"/>
             <a:ext cx="2651760" cy="530352"/>
           </a:xfrm>
           <a:prstGeom prst="rect">
@@ -19145,7 +22634,7 @@
         </p:nvSpPr>
         <p:spPr>
           <a:xfrm>
-            <a:off x="4480560" y="2240280"/>
+            <a:off x="4480560" y="2653234"/>
             <a:ext cx="2560320" cy="1188720"/>
           </a:xfrm>
           <a:prstGeom prst="rect">
@@ -19211,7 +22700,7 @@
         </p:nvSpPr>
         <p:spPr>
           <a:xfrm>
-            <a:off x="7818120" y="1234440"/>
+            <a:off x="7818120" y="1647394"/>
             <a:ext cx="3688080" cy="2011680"/>
           </a:xfrm>
           <a:prstGeom prst="roundRect">
@@ -19248,7 +22737,7 @@
         </p:nvSpPr>
         <p:spPr>
           <a:xfrm>
-            <a:off x="7818120" y="3282696"/>
+            <a:off x="7818120" y="3695650"/>
             <a:ext cx="3337560" cy="164592"/>
           </a:xfrm>
           <a:prstGeom prst="rect">
@@ -19284,7 +22773,7 @@
         </p:nvSpPr>
         <p:spPr>
           <a:xfrm>
-            <a:off x="7818120" y="3703320"/>
+            <a:off x="7818120" y="4116274"/>
             <a:ext cx="3291840" cy="502920"/>
           </a:xfrm>
           <a:prstGeom prst="rect">
@@ -19322,7 +22811,7 @@
         </p:nvSpPr>
         <p:spPr>
           <a:xfrm>
-            <a:off x="7818120" y="4434840"/>
+            <a:off x="7818120" y="4847794"/>
             <a:ext cx="1298448" cy="292608"/>
           </a:xfrm>
           <a:prstGeom prst="roundRect">
@@ -19351,7 +22840,7 @@
         </p:nvSpPr>
         <p:spPr>
           <a:xfrm>
-            <a:off x="7891272" y="4471416"/>
+            <a:off x="7891272" y="4884370"/>
             <a:ext cx="1152144" cy="219456"/>
           </a:xfrm>
           <a:prstGeom prst="rect">
@@ -19387,7 +22876,7 @@
         </p:nvSpPr>
         <p:spPr>
           <a:xfrm>
-            <a:off x="9235440" y="4434840"/>
+            <a:off x="9235440" y="4847794"/>
             <a:ext cx="1188720" cy="292608"/>
           </a:xfrm>
           <a:prstGeom prst="roundRect">
@@ -19416,7 +22905,7 @@
         </p:nvSpPr>
         <p:spPr>
           <a:xfrm>
-            <a:off x="9308592" y="4471416"/>
+            <a:off x="9308592" y="4884370"/>
             <a:ext cx="1042416" cy="219456"/>
           </a:xfrm>
           <a:prstGeom prst="rect">
@@ -19466,7 +22955,7 @@
         </p:blipFill>
         <p:spPr>
           <a:xfrm>
-            <a:off x="7920052" y="1735309"/>
+            <a:off x="7920052" y="2148263"/>
             <a:ext cx="3484215" cy="905629"/>
           </a:xfrm>
           <a:prstGeom prst="rect">
@@ -19474,6 +22963,42 @@
           </a:prstGeom>
         </p:spPr>
       </p:pic>
+      <p:sp>
+        <p:nvSpPr>
+          <p:cNvPr id="16" name="Shape 2">
+            <a:extLst>
+              <a:ext uri="{FF2B5EF4-FFF2-40B4-BE49-F238E27FC236}">
+                <a16:creationId xmlns:a16="http://schemas.microsoft.com/office/drawing/2014/main" id="{6226294F-4E5F-7020-E191-03716CE52CBB}"/>
+              </a:ext>
+            </a:extLst>
+          </p:cNvPr>
+          <p:cNvSpPr/>
+          <p:nvPr/>
+        </p:nvSpPr>
+        <p:spPr>
+          <a:xfrm>
+            <a:off x="502920" y="1124712"/>
+            <a:ext cx="2148840" cy="0"/>
+          </a:xfrm>
+          <a:prstGeom prst="line">
+            <a:avLst/>
+          </a:prstGeom>
+          <a:noFill/>
+          <a:ln w="38100">
+            <a:solidFill>
+              <a:srgbClr val="E20044"/>
+            </a:solidFill>
+            <a:prstDash val="solid"/>
+          </a:ln>
+        </p:spPr>
+        <p:txBody>
+          <a:bodyPr/>
+          <a:lstStyle/>
+          <a:p>
+            <a:endParaRPr/>
+          </a:p>
+        </p:txBody>
+      </p:sp>
     </p:spTree>
   </p:cSld>
   <p:clrMapOvr>
@@ -19485,7 +23010,7 @@
 <file path=ppt/theme/theme1.xml><?xml version="1.0" encoding="utf-8"?>
 <a:theme xmlns:a="http://schemas.openxmlformats.org/drawingml/2006/main" name="Office Theme">
   <a:themeElements>
-    <a:clrScheme name="Office">
+    <a:clrScheme name="Rouge violet">
       <a:dk1>
         <a:sysClr val="windowText" lastClr="000000"/>
       </a:dk1>
@@ -19493,34 +23018,34 @@
         <a:sysClr val="window" lastClr="FFFFFF"/>
       </a:lt1>
       <a:dk2>
-        <a:srgbClr val="44546A"/>
+        <a:srgbClr val="454551"/>
       </a:dk2>
       <a:lt2>
-        <a:srgbClr val="E7E6E6"/>
+        <a:srgbClr val="D8D9DC"/>
       </a:lt2>
       <a:accent1>
-        <a:srgbClr val="4472C4"/>
+        <a:srgbClr val="E32D91"/>
       </a:accent1>
       <a:accent2>
-        <a:srgbClr val="ED7D31"/>
+        <a:srgbClr val="C830CC"/>
       </a:accent2>
       <a:accent3>
-        <a:srgbClr val="A5A5A5"/>
+        <a:srgbClr val="4EA6DC"/>
       </a:accent3>
       <a:accent4>
-        <a:srgbClr val="FFC000"/>
+        <a:srgbClr val="4775E7"/>
       </a:accent4>
       <a:accent5>
-        <a:srgbClr val="5B9BD5"/>
+        <a:srgbClr val="8971E1"/>
       </a:accent5>
       <a:accent6>
-        <a:srgbClr val="70AD47"/>
+        <a:srgbClr val="D54773"/>
       </a:accent6>
       <a:hlink>
-        <a:srgbClr val="0563C1"/>
+        <a:srgbClr val="6B9F25"/>
       </a:hlink>
       <a:folHlink>
-        <a:srgbClr val="954F72"/>
+        <a:srgbClr val="8C8C8C"/>
       </a:folHlink>
     </a:clrScheme>
     <a:fontScheme name="Office">

--- a/livrables/Presentation_P5_SportDataPulse.pptx
+++ b/livrables/Presentation_P5_SportDataPulse.pptx
@@ -20088,8 +20088,8 @@
         </p:nvSpPr>
         <p:spPr>
           <a:xfrm>
-            <a:off x="851266" y="1814467"/>
-            <a:ext cx="4298380" cy="4001095"/>
+            <a:off x="806244" y="1658563"/>
+            <a:ext cx="4298380" cy="4416594"/>
           </a:xfrm>
           <a:prstGeom prst="rect">
             <a:avLst/>
@@ -21033,6 +21033,81 @@
               </a:rPr>
               <a:t>temps_de_jeu</a:t>
             </a:r>
+            <a:endParaRPr kumimoji="0" lang="fr-FR" altLang="fr-FR" sz="900" b="0" i="0" u="none" strike="noStrike" cap="none" normalizeH="0" baseline="0" dirty="0">
+              <a:ln>
+                <a:noFill/>
+              </a:ln>
+              <a:solidFill>
+                <a:srgbClr val="BCBEC4"/>
+              </a:solidFill>
+              <a:effectLst/>
+              <a:latin typeface="JetBrains Mono"/>
+            </a:endParaRPr>
+          </a:p>
+          <a:p>
+            <a:pPr marL="0" marR="0" lvl="0" indent="0" algn="l" defTabSz="914400" rtl="0" eaLnBrk="0" fontAlgn="base" latinLnBrk="0" hangingPunct="0">
+              <a:lnSpc>
+                <a:spcPct val="100000"/>
+              </a:lnSpc>
+              <a:spcBef>
+                <a:spcPct val="0"/>
+              </a:spcBef>
+              <a:spcAft>
+                <a:spcPct val="0"/>
+              </a:spcAft>
+              <a:buClrTx/>
+              <a:buSzTx/>
+              <a:buFontTx/>
+              <a:buNone/>
+              <a:tabLst/>
+            </a:pPr>
+            <a:endParaRPr lang="fr-FR" altLang="fr-FR" sz="900" dirty="0">
+              <a:solidFill>
+                <a:srgbClr val="BCBEC4"/>
+              </a:solidFill>
+              <a:latin typeface="JetBrains Mono"/>
+            </a:endParaRPr>
+          </a:p>
+          <a:p>
+            <a:pPr eaLnBrk="0" fontAlgn="base" hangingPunct="0">
+              <a:spcBef>
+                <a:spcPct val="0"/>
+              </a:spcBef>
+              <a:spcAft>
+                <a:spcPct val="0"/>
+              </a:spcAft>
+            </a:pPr>
+            <a:r>
+              <a:rPr kumimoji="0" lang="en-US" altLang="fr-FR" sz="900" b="0" i="0" u="none" strike="noStrike" cap="none" normalizeH="0" baseline="0" dirty="0">
+                <a:ln>
+                  <a:noFill/>
+                </a:ln>
+                <a:solidFill>
+                  <a:srgbClr val="BA8062"/>
+                </a:solidFill>
+                <a:effectLst/>
+                <a:latin typeface="JetBrains Mono"/>
+              </a:rPr>
+              <a:t>UNION ALL</a:t>
+            </a:r>
+          </a:p>
+          <a:p>
+            <a:pPr marL="0" marR="0" lvl="0" indent="0" algn="l" defTabSz="914400" rtl="0" eaLnBrk="0" fontAlgn="base" latinLnBrk="0" hangingPunct="0">
+              <a:lnSpc>
+                <a:spcPct val="100000"/>
+              </a:lnSpc>
+              <a:spcBef>
+                <a:spcPct val="0"/>
+              </a:spcBef>
+              <a:spcAft>
+                <a:spcPct val="0"/>
+              </a:spcAft>
+              <a:buClrTx/>
+              <a:buSzTx/>
+              <a:buFontTx/>
+              <a:buNone/>
+              <a:tabLst/>
+            </a:pPr>
             <a:endParaRPr kumimoji="0" lang="fr-FR" altLang="fr-FR" sz="900" b="0" i="0" u="none" strike="noStrike" cap="none" normalizeH="0" baseline="0" dirty="0">
               <a:ln>
                 <a:noFill/>
